--- a/presentation/PawPal_Engineers_Pitch.pptx
+++ b/presentation/PawPal_Engineers_Pitch.pptx
@@ -2,18 +2,18 @@
 <file path=ppt/presentation.xml><?xml version="1.0" encoding="utf-8"?>
 <p:presentation xmlns:p="http://schemas.openxmlformats.org/presentationml/2006/main">
   <p:sldMasterIdLst>
-    <p:sldMasterId xmlns:r="http://schemas.openxmlformats.org/officeDocument/2006/relationships" id="2147483648" r:id="R6d14fde65bb64e66"/>
+    <p:sldMasterId xmlns:r="http://schemas.openxmlformats.org/officeDocument/2006/relationships" id="2147483648" r:id="R12263533431f4e4f"/>
   </p:sldMasterIdLst>
   <p:notesMasterIdLst>
-    <p:notesMasterId xmlns:r="http://schemas.openxmlformats.org/officeDocument/2006/relationships" r:id="R226b05c8d9cc4b48"/>
+    <p:notesMasterId xmlns:r="http://schemas.openxmlformats.org/officeDocument/2006/relationships" r:id="R27668a6d7b234c48"/>
   </p:notesMasterIdLst>
   <p:sldIdLst>
-    <p:sldId xmlns:r="http://schemas.openxmlformats.org/officeDocument/2006/relationships" id="256" r:id="Rdbfa6e9745274ae8"/>
-    <p:sldId xmlns:r="http://schemas.openxmlformats.org/officeDocument/2006/relationships" id="257" r:id="Rbbc61edd243d425e"/>
-    <p:sldId xmlns:r="http://schemas.openxmlformats.org/officeDocument/2006/relationships" id="258" r:id="Ra770db8b1b6e4843"/>
-    <p:sldId xmlns:r="http://schemas.openxmlformats.org/officeDocument/2006/relationships" id="259" r:id="R7b986da98d7a48f0"/>
-    <p:sldId xmlns:r="http://schemas.openxmlformats.org/officeDocument/2006/relationships" id="260" r:id="Rbb0a40c3d99e4684"/>
-    <p:sldId xmlns:r="http://schemas.openxmlformats.org/officeDocument/2006/relationships" id="261" r:id="Rf34f23821f664905"/>
+    <p:sldId xmlns:r="http://schemas.openxmlformats.org/officeDocument/2006/relationships" id="256" r:id="R721695be37994370"/>
+    <p:sldId xmlns:r="http://schemas.openxmlformats.org/officeDocument/2006/relationships" id="257" r:id="Rb0b62295f5c04345"/>
+    <p:sldId xmlns:r="http://schemas.openxmlformats.org/officeDocument/2006/relationships" id="258" r:id="R30c436ad52bf4c5c"/>
+    <p:sldId xmlns:r="http://schemas.openxmlformats.org/officeDocument/2006/relationships" id="259" r:id="R6fa78332376c4cf9"/>
+    <p:sldId xmlns:r="http://schemas.openxmlformats.org/officeDocument/2006/relationships" id="260" r:id="R28c16e24e05e432b"/>
+    <p:sldId xmlns:r="http://schemas.openxmlformats.org/officeDocument/2006/relationships" id="261" r:id="Rfaf8434a11c24c37"/>
   </p:sldIdLst>
   <p:sldSz cx="12192000" cy="6858000"/>
   <p:notesSz cx="6858000" cy="9144000"/>
@@ -467,7 +467,7 @@
           </a:p>
           <a:p xmlns:a="http://schemas.openxmlformats.org/drawingml/2006/main">
             <a:r>
-              <a:t>- Cover image: screenshot captured from the local PawPal Streamlit application on August 4, 2026.</a:t>
+              <a:t>- Cover illustration generated with the built-in OpenAI image-generation tool on August 4, 2026.</a:t>
             </a:r>
           </a:p>
         </p:txBody>
@@ -555,6 +555,11 @@
               <a:t>- PawPal+ project repository: https://github.com/hemalekamohanram/codepath-applied-ai-system-project</a:t>
             </a:r>
           </a:p>
+          <a:p xmlns:a="http://schemas.openxmlformats.org/drawingml/2006/main">
+            <a:r>
+              <a:t>- Schedule image captured from the local PawPal Streamlit application on August 4, 2026.</a:t>
+            </a:r>
+          </a:p>
         </p:txBody>
       </p:sp>
       <p:sp>
@@ -640,6 +645,11 @@
               <a:t>- PawPal+ project repository: https://github.com/hemalekamohanram/codepath-applied-ai-system-project</a:t>
             </a:r>
           </a:p>
+          <a:p xmlns:a="http://schemas.openxmlformats.org/drawingml/2006/main">
+            <a:r>
+              <a:t>- Guidance image captured from the local PawPal Streamlit application on August 4, 2026.</a:t>
+            </a:r>
+          </a:p>
         </p:txBody>
       </p:sp>
       <p:sp>
@@ -723,6 +733,11 @@
           <a:p xmlns:a="http://schemas.openxmlformats.org/drawingml/2006/main">
             <a:r>
               <a:t>- PawPal+ project repository: https://github.com/hemalekamohanram/codepath-applied-ai-system-project</a:t>
+            </a:r>
+          </a:p>
+          <a:p xmlns:a="http://schemas.openxmlformats.org/drawingml/2006/main">
+            <a:r>
+              <a:t>- Guardrail image captured from the local PawPal Streamlit application on August 4, 2026.</a:t>
             </a:r>
           </a:p>
         </p:txBody>
@@ -960,7 +975,7 @@
   </p:cSld>
   <p:clrMap bg1="lt1" tx1="dk1" bg2="lt2" tx2="dk2" accent1="accent1" accent2="accent2" accent3="accent3" accent4="accent4" accent5="accent5" accent6="accent6" hlink="hlink" folHlink="folHlink"/>
   <p:sldLayoutIdLst>
-    <p:sldLayoutId xmlns:r="http://schemas.openxmlformats.org/officeDocument/2006/relationships" id="2147483649" r:id="R65b6cbd2b8244b88"/>
+    <p:sldLayoutId xmlns:r="http://schemas.openxmlformats.org/officeDocument/2006/relationships" id="2147483649" r:id="Rca34961fba944437"/>
   </p:sldLayoutIdLst>
   <p:txStyles>
     <p:titleStyle>
@@ -1490,6 +1505,13 @@
 <file path=ppt/slides/slide1.xml><?xml version="1.0" encoding="utf-8"?>
 <p:sld xmlns:p="http://schemas.openxmlformats.org/presentationml/2006/main">
   <p:cSld>
+    <p:bg>
+      <p:bgPr>
+        <a:solidFill xmlns:a="http://schemas.openxmlformats.org/drawingml/2006/main">
+          <a:srgbClr val="FFF9F1"/>
+        </a:solidFill>
+      </p:bgPr>
+    </p:bg>
     <p:spTree>
       <p:nvGrpSpPr>
         <p:cNvPr id="1" name=""/>
@@ -1499,12 +1521,37 @@
       <p:grpSpPr>
         <a:xfrm xmlns:a="http://schemas.openxmlformats.org/drawingml/2006/main"/>
       </p:grpSpPr>
-      <p:sp>
-        <p:nvSpPr>
-          <p:cNvPr id="7" name="Google-Shape-532-p58-2">
+      <p:pic>
+        <p:nvPicPr>
+          <p:cNvPr id="7" name=""/>
+          <p:cNvPicPr>
+            <a:picLocks xmlns:a="http://schemas.openxmlformats.org/drawingml/2006/main" noChangeAspect="1"/>
+          </p:cNvPicPr>
+          <p:nvPr/>
+        </p:nvPicPr>
+        <p:blipFill>
+          <a:blip xmlns:r="http://schemas.openxmlformats.org/officeDocument/2006/relationships" xmlns:a="http://schemas.openxmlformats.org/drawingml/2006/main" r:embed="Re137e1b10e09419f"/>
+          <a:srcRect xmlns:a="http://schemas.openxmlformats.org/drawingml/2006/main" l="0" t="7813" r="0" b="7813"/>
+          <a:stretch xmlns:a="http://schemas.openxmlformats.org/drawingml/2006/main">
+            <a:fillRect l="0" t="0" r="0" b="0"/>
+          </a:stretch>
+        </p:blipFill>
+        <p:spPr>
+          <a:xfrm xmlns:a="http://schemas.openxmlformats.org/drawingml/2006/main">
+            <a:off x="0" y="0"/>
+            <a:ext cx="12192000" cy="6858000"/>
+          </a:xfrm>
+          <a:prstGeom xmlns:a="http://schemas.openxmlformats.org/drawingml/2006/main" prst="rect">
+            <a:avLst/>
+          </a:prstGeom>
+        </p:spPr>
+      </p:pic>
+      <p:sp>
+        <p:nvSpPr>
+          <p:cNvPr id="2" name="cover-kicker">
             <a:extLst xmlns:a="http://schemas.openxmlformats.org/drawingml/2006/main">
               <a:ext uri="{FF2B5EF4-FFF2-40B4-BE49-F238E27FC236}">
-                <a16:creationId xmlns:a16="http://schemas.microsoft.com/office/drawing/2014/main" id="{54AC289E-AC5F-4B27-949C-0D6E4D744972}"/>
+                <a16:creationId xmlns:a16="http://schemas.microsoft.com/office/drawing/2014/main" id="{AD822DA4-8041-43CA-AC21-4775F1697738}"/>
               </a:ext>
             </a:extLst>
           </p:cNvPr>
@@ -1515,41 +1562,52 @@
         </p:nvSpPr>
         <p:spPr>
           <a:xfrm xmlns:a="http://schemas.openxmlformats.org/drawingml/2006/main">
-            <a:off x="11279315" y="6279261"/>
-            <a:ext cx="518922" cy="241268"/>
-          </a:xfrm>
-          <a:prstGeom xmlns:a="http://schemas.openxmlformats.org/drawingml/2006/main" prst="rect">
-            <a:avLst/>
-          </a:prstGeom>
-        </p:spPr>
-        <p:txBody>
-          <a:bodyPr xmlns:a="http://schemas.openxmlformats.org/drawingml/2006/main" wrap="square" lIns="0" tIns="0" rIns="0" bIns="0" anchor="b">
-            <a:noAutofit/>
-          </a:bodyPr>
-          <a:lstStyle xmlns:a="http://schemas.openxmlformats.org/drawingml/2006/main"/>
-          <a:p xmlns:a="http://schemas.openxmlformats.org/drawingml/2006/main">
-            <a:pPr algn="r">
-              <a:defRPr sz="1000">
-                <a:solidFill>
-                  <a:srgbClr val="000000"/>
-                </a:solidFill>
-                <a:latin typeface="Helvetica Neue"/>
-                <a:ea typeface="Helvetica Neue"/>
-                <a:cs typeface="Helvetica Neue"/>
-              </a:defRPr>
-            </a:pPr>
-            <a:r>
-              <a:t>1</a:t>
-            </a:r>
-          </a:p>
-        </p:txBody>
-      </p:sp>
-      <p:sp>
-        <p:nvSpPr>
-          <p:cNvPr id="2" name="Google-Shape-533-p58-3">
+            <a:off x="628650" y="609600"/>
+            <a:ext cx="3619500" cy="361950"/>
+          </a:xfrm>
+          <a:prstGeom xmlns:a="http://schemas.openxmlformats.org/drawingml/2006/main" prst="rect">
+            <a:avLst/>
+          </a:prstGeom>
+          <a:noFill xmlns:a="http://schemas.openxmlformats.org/drawingml/2006/main"/>
+          <a:ln xmlns:a="http://schemas.openxmlformats.org/drawingml/2006/main" w="0">
+            <a:noFill/>
+            <a:prstDash val="solid"/>
+          </a:ln>
+        </p:spPr>
+        <p:txBody>
+          <a:bodyPr xmlns:a="http://schemas.openxmlformats.org/drawingml/2006/main" anchor="t"/>
+          <a:lstStyle xmlns:a="http://schemas.openxmlformats.org/drawingml/2006/main"/>
+          <a:p xmlns:a="http://schemas.openxmlformats.org/drawingml/2006/main">
+            <a:pPr algn="l">
+              <a:defRPr sz="1350" b="1">
+                <a:solidFill>
+                  <a:srgbClr val="6F527F"/>
+                </a:solidFill>
+                <a:latin typeface="Arial"/>
+                <a:ea typeface="Arial"/>
+                <a:cs typeface="Arial"/>
+              </a:defRPr>
+            </a:pPr>
+            <a:r>
+              <a:rPr sz="1350" b="1">
+                <a:solidFill>
+                  <a:srgbClr val="6F527F"/>
+                </a:solidFill>
+                <a:latin typeface="Arial"/>
+                <a:ea typeface="Arial"/>
+                <a:cs typeface="Arial"/>
+              </a:rPr>
+              <a:t>ENGINEER’S PITCH</a:t>
+            </a:r>
+          </a:p>
+        </p:txBody>
+      </p:sp>
+      <p:sp>
+        <p:nvSpPr>
+          <p:cNvPr id="3" name="cover-title">
             <a:extLst xmlns:a="http://schemas.openxmlformats.org/drawingml/2006/main">
               <a:ext uri="{FF2B5EF4-FFF2-40B4-BE49-F238E27FC236}">
-                <a16:creationId xmlns:a16="http://schemas.microsoft.com/office/drawing/2014/main" id="{9BC03E88-930D-4241-8F89-2CF9CDF2A2C5}"/>
+                <a16:creationId xmlns:a16="http://schemas.microsoft.com/office/drawing/2014/main" id="{553AA98C-4967-4F01-A2FF-B8FA59C9D35C}"/>
               </a:ext>
             </a:extLst>
           </p:cNvPr>
@@ -1560,53 +1618,52 @@
         </p:nvSpPr>
         <p:spPr>
           <a:xfrm xmlns:a="http://schemas.openxmlformats.org/drawingml/2006/main">
-            <a:off x="393668" y="344043"/>
-            <a:ext cx="11404568" cy="1047464"/>
-          </a:xfrm>
-          <a:prstGeom xmlns:a="http://schemas.openxmlformats.org/drawingml/2006/main" prst="rect">
-            <a:avLst/>
-          </a:prstGeom>
-        </p:spPr>
-        <p:txBody>
-          <a:bodyPr xmlns:a="http://schemas.openxmlformats.org/drawingml/2006/main" wrap="square" lIns="0" tIns="0" rIns="0" bIns="0" anchor="t">
-            <a:noAutofit/>
-          </a:bodyPr>
+            <a:off x="590550" y="1476375"/>
+            <a:ext cx="4762500" cy="857250"/>
+          </a:xfrm>
+          <a:prstGeom xmlns:a="http://schemas.openxmlformats.org/drawingml/2006/main" prst="rect">
+            <a:avLst/>
+          </a:prstGeom>
+          <a:noFill xmlns:a="http://schemas.openxmlformats.org/drawingml/2006/main"/>
+          <a:ln xmlns:a="http://schemas.openxmlformats.org/drawingml/2006/main" w="0">
+            <a:noFill/>
+            <a:prstDash val="solid"/>
+          </a:ln>
+        </p:spPr>
+        <p:txBody>
+          <a:bodyPr xmlns:a="http://schemas.openxmlformats.org/drawingml/2006/main" anchor="t"/>
           <a:lstStyle xmlns:a="http://schemas.openxmlformats.org/drawingml/2006/main"/>
           <a:p xmlns:a="http://schemas.openxmlformats.org/drawingml/2006/main">
             <a:pPr algn="l">
-              <a:lnSpc>
-                <a:spcPct val="100000"/>
-              </a:lnSpc>
-              <a:buNone/>
-              <a:defRPr sz="2900">
-                <a:solidFill>
-                  <a:srgbClr val="000000"/>
-                </a:solidFill>
-                <a:latin typeface="Helvetica Neue"/>
-                <a:ea typeface="Helvetica Neue"/>
-                <a:cs typeface="Helvetica Neue"/>
-              </a:defRPr>
-            </a:pPr>
-            <a:r>
-              <a:rPr sz="2900" b="1">
-                <a:solidFill>
-                  <a:srgbClr val="3D8DFF"/>
-                </a:solidFill>
-                <a:latin typeface="Arial"/>
-                <a:ea typeface="Arial"/>
-                <a:cs typeface="Arial"/>
-              </a:rPr>
-              <a:t>PAWPAL+</a:t>
-            </a:r>
-          </a:p>
-        </p:txBody>
-      </p:sp>
-      <p:sp>
-        <p:nvSpPr>
-          <p:cNvPr id="3" name="Picture-3-4-backing">
+              <a:defRPr sz="4950" b="1">
+                <a:solidFill>
+                  <a:srgbClr val="3B234D"/>
+                </a:solidFill>
+                <a:latin typeface="Arial"/>
+                <a:ea typeface="Arial"/>
+                <a:cs typeface="Arial"/>
+              </a:defRPr>
+            </a:pPr>
+            <a:r>
+              <a:rPr sz="4950" b="1">
+                <a:solidFill>
+                  <a:srgbClr val="3B234D"/>
+                </a:solidFill>
+                <a:latin typeface="Arial"/>
+                <a:ea typeface="Arial"/>
+                <a:cs typeface="Arial"/>
+              </a:rPr>
+              <a:t>PawPal+</a:t>
+            </a:r>
+          </a:p>
+        </p:txBody>
+      </p:sp>
+      <p:sp>
+        <p:nvSpPr>
+          <p:cNvPr id="4" name="cover-subtitle">
             <a:extLst xmlns:a="http://schemas.openxmlformats.org/drawingml/2006/main">
               <a:ext uri="{FF2B5EF4-FFF2-40B4-BE49-F238E27FC236}">
-                <a16:creationId xmlns:a16="http://schemas.microsoft.com/office/drawing/2014/main" id="{4836AFCB-C7C5-4A83-B974-C0F618B91033}"/>
+                <a16:creationId xmlns:a16="http://schemas.microsoft.com/office/drawing/2014/main" id="{E3E38A1A-EE1C-4846-9C45-B38B9EDDBF6E}"/>
               </a:ext>
             </a:extLst>
           </p:cNvPr>
@@ -1617,31 +1674,75 @@
         </p:nvSpPr>
         <p:spPr>
           <a:xfrm xmlns:a="http://schemas.openxmlformats.org/drawingml/2006/main">
-            <a:off x="6269069" y="396431"/>
-            <a:ext cx="5539740" cy="5602034"/>
-          </a:xfrm>
-          <a:prstGeom xmlns:a="http://schemas.openxmlformats.org/drawingml/2006/main" prst="roundRect">
-            <a:avLst>
-              <a:gd name="adj" fmla="val 1376"/>
-            </a:avLst>
-          </a:prstGeom>
-          <a:solidFill xmlns:a="http://schemas.openxmlformats.org/drawingml/2006/main">
-            <a:srgbClr val="EAF5FB"/>
-          </a:solidFill>
-          <a:ln xmlns:a="http://schemas.openxmlformats.org/drawingml/2006/main" w="9525">
-            <a:solidFill>
-              <a:srgbClr val="B8BCC4"/>
-            </a:solidFill>
-            <a:prstDash val="solid"/>
-          </a:ln>
-        </p:spPr>
-      </p:sp>
-      <p:sp>
-        <p:nvSpPr>
-          <p:cNvPr id="5" name="Google-Shape-534-p58-5">
+            <a:off x="628650" y="2571750"/>
+            <a:ext cx="4905375" cy="1238250"/>
+          </a:xfrm>
+          <a:prstGeom xmlns:a="http://schemas.openxmlformats.org/drawingml/2006/main" prst="rect">
+            <a:avLst/>
+          </a:prstGeom>
+          <a:noFill xmlns:a="http://schemas.openxmlformats.org/drawingml/2006/main"/>
+          <a:ln xmlns:a="http://schemas.openxmlformats.org/drawingml/2006/main" w="0">
+            <a:noFill/>
+            <a:prstDash val="solid"/>
+          </a:ln>
+        </p:spPr>
+        <p:txBody>
+          <a:bodyPr xmlns:a="http://schemas.openxmlformats.org/drawingml/2006/main" anchor="t"/>
+          <a:lstStyle xmlns:a="http://schemas.openxmlformats.org/drawingml/2006/main"/>
+          <a:p xmlns:a="http://schemas.openxmlformats.org/drawingml/2006/main">
+            <a:pPr algn="l">
+              <a:defRPr sz="2325" b="1">
+                <a:solidFill>
+                  <a:srgbClr val="2B2630"/>
+                </a:solidFill>
+                <a:latin typeface="Arial"/>
+                <a:ea typeface="Arial"/>
+                <a:cs typeface="Arial"/>
+              </a:defRPr>
+            </a:pPr>
+            <a:r>
+              <a:rPr sz="2325" b="1">
+                <a:solidFill>
+                  <a:srgbClr val="2B2630"/>
+                </a:solidFill>
+                <a:latin typeface="Arial"/>
+                <a:ea typeface="Arial"/>
+                <a:cs typeface="Arial"/>
+              </a:rPr>
+              <a:t>Pet-care planning that is</a:t>
+            </a:r>
+          </a:p>
+          <a:p xmlns:a="http://schemas.openxmlformats.org/drawingml/2006/main">
+            <a:pPr algn="l">
+              <a:defRPr sz="2325" b="1">
+                <a:solidFill>
+                  <a:srgbClr val="2B2630"/>
+                </a:solidFill>
+                <a:latin typeface="Arial"/>
+                <a:ea typeface="Arial"/>
+                <a:cs typeface="Arial"/>
+              </a:defRPr>
+            </a:pPr>
+            <a:r>
+              <a:rPr sz="2325" b="1">
+                <a:solidFill>
+                  <a:srgbClr val="2B2630"/>
+                </a:solidFill>
+                <a:latin typeface="Arial"/>
+                <a:ea typeface="Arial"/>
+                <a:cs typeface="Arial"/>
+              </a:rPr>
+              <a:t>predictable, grounded, and safer.</a:t>
+            </a:r>
+          </a:p>
+        </p:txBody>
+      </p:sp>
+      <p:sp>
+        <p:nvSpPr>
+          <p:cNvPr id="5" name="cover-detail">
             <a:extLst xmlns:a="http://schemas.openxmlformats.org/drawingml/2006/main">
               <a:ext uri="{FF2B5EF4-FFF2-40B4-BE49-F238E27FC236}">
-                <a16:creationId xmlns:a16="http://schemas.microsoft.com/office/drawing/2014/main" id="{8872253F-7E27-4716-A277-DB1F4C85480B}"/>
+                <a16:creationId xmlns:a16="http://schemas.microsoft.com/office/drawing/2014/main" id="{DF0CB62C-D8F4-4950-AEE4-5EA7ECA0D4E2}"/>
               </a:ext>
             </a:extLst>
           </p:cNvPr>
@@ -1652,104 +1753,106 @@
         </p:nvSpPr>
         <p:spPr>
           <a:xfrm xmlns:a="http://schemas.openxmlformats.org/drawingml/2006/main">
-            <a:off x="393668" y="2031968"/>
-            <a:ext cx="5537168" cy="3962400"/>
-          </a:xfrm>
-          <a:prstGeom xmlns:a="http://schemas.openxmlformats.org/drawingml/2006/main" prst="rect">
-            <a:avLst/>
-          </a:prstGeom>
-        </p:spPr>
-        <p:txBody>
-          <a:bodyPr xmlns:a="http://schemas.openxmlformats.org/drawingml/2006/main" wrap="square" lIns="0" tIns="0" rIns="0" bIns="0" anchor="t">
-            <a:noAutofit/>
-          </a:bodyPr>
+            <a:off x="628650" y="4095750"/>
+            <a:ext cx="5000625" cy="457200"/>
+          </a:xfrm>
+          <a:prstGeom xmlns:a="http://schemas.openxmlformats.org/drawingml/2006/main" prst="rect">
+            <a:avLst/>
+          </a:prstGeom>
+          <a:noFill xmlns:a="http://schemas.openxmlformats.org/drawingml/2006/main"/>
+          <a:ln xmlns:a="http://schemas.openxmlformats.org/drawingml/2006/main" w="0">
+            <a:noFill/>
+            <a:prstDash val="solid"/>
+          </a:ln>
+        </p:spPr>
+        <p:txBody>
+          <a:bodyPr xmlns:a="http://schemas.openxmlformats.org/drawingml/2006/main" anchor="t"/>
           <a:lstStyle xmlns:a="http://schemas.openxmlformats.org/drawingml/2006/main"/>
           <a:p xmlns:a="http://schemas.openxmlformats.org/drawingml/2006/main">
             <a:pPr algn="l">
-              <a:lnSpc>
-                <a:spcPct val="100000"/>
-              </a:lnSpc>
-              <a:buNone/>
-              <a:defRPr sz="2400">
-                <a:solidFill>
-                  <a:srgbClr val="000000"/>
-                </a:solidFill>
-                <a:latin typeface="Helvetica Neue"/>
-                <a:ea typeface="Helvetica Neue"/>
-                <a:cs typeface="Helvetica Neue"/>
-              </a:defRPr>
-            </a:pPr>
-            <a:r>
-              <a:rPr sz="2400" b="1">
-                <a:solidFill>
-                  <a:srgbClr val="000000"/>
-                </a:solidFill>
-                <a:latin typeface="Arial"/>
-                <a:ea typeface="Arial"/>
-                <a:cs typeface="Arial"/>
-              </a:rPr>
-              <a:t>Applied AI that plans pet care—and knows when to stop.</a:t>
-            </a:r>
-          </a:p>
+              <a:defRPr sz="1350" b="0">
+                <a:solidFill>
+                  <a:srgbClr val="6D6570"/>
+                </a:solidFill>
+                <a:latin typeface="Arial"/>
+                <a:ea typeface="Arial"/>
+                <a:cs typeface="Arial"/>
+              </a:defRPr>
+            </a:pPr>
+            <a:r>
+              <a:rPr sz="1350" b="0">
+                <a:solidFill>
+                  <a:srgbClr val="6D6570"/>
+                </a:solidFill>
+                <a:latin typeface="Arial"/>
+                <a:ea typeface="Arial"/>
+                <a:cs typeface="Arial"/>
+              </a:rPr>
+              <a:t>Applied AI final project  •  Python  •  RAG  •  Claude</a:t>
+            </a:r>
+          </a:p>
+        </p:txBody>
+      </p:sp>
+      <p:sp>
+        <p:nvSpPr>
+          <p:cNvPr id="6" name="cover-name">
+            <a:extLst xmlns:a="http://schemas.openxmlformats.org/drawingml/2006/main">
+              <a:ext uri="{FF2B5EF4-FFF2-40B4-BE49-F238E27FC236}">
+                <a16:creationId xmlns:a16="http://schemas.microsoft.com/office/drawing/2014/main" id="{5CA7DFD3-7895-4820-85AC-4AD4372FA29F}"/>
+              </a:ext>
+            </a:extLst>
+          </p:cNvPr>
+          <p:cNvSpPr>
+            <a:spLocks xmlns:a="http://schemas.openxmlformats.org/drawingml/2006/main" noGrp="1"/>
+          </p:cNvSpPr>
+          <p:nvPr/>
+        </p:nvSpPr>
+        <p:spPr>
+          <a:xfrm xmlns:a="http://schemas.openxmlformats.org/drawingml/2006/main">
+            <a:off x="628650" y="5857875"/>
+            <a:ext cx="3429000" cy="381000"/>
+          </a:xfrm>
+          <a:prstGeom xmlns:a="http://schemas.openxmlformats.org/drawingml/2006/main" prst="rect">
+            <a:avLst/>
+          </a:prstGeom>
+          <a:noFill xmlns:a="http://schemas.openxmlformats.org/drawingml/2006/main"/>
+          <a:ln xmlns:a="http://schemas.openxmlformats.org/drawingml/2006/main" w="0">
+            <a:noFill/>
+            <a:prstDash val="solid"/>
+          </a:ln>
+        </p:spPr>
+        <p:txBody>
+          <a:bodyPr xmlns:a="http://schemas.openxmlformats.org/drawingml/2006/main" anchor="t"/>
+          <a:lstStyle xmlns:a="http://schemas.openxmlformats.org/drawingml/2006/main"/>
           <a:p xmlns:a="http://schemas.openxmlformats.org/drawingml/2006/main">
             <a:pPr algn="l">
-              <a:lnSpc>
-                <a:spcPct val="100000"/>
-              </a:lnSpc>
-              <a:buNone/>
-              <a:defRPr sz="2400">
-                <a:solidFill>
-                  <a:srgbClr val="000000"/>
-                </a:solidFill>
-                <a:latin typeface="Helvetica Neue"/>
-                <a:ea typeface="Helvetica Neue"/>
-                <a:cs typeface="Helvetica Neue"/>
-              </a:defRPr>
-            </a:pPr>
-            <a:r>
-              <a:rPr sz="1800" b="0">
-                <a:solidFill>
-                  <a:srgbClr val="31343A"/>
-                </a:solidFill>
-                <a:latin typeface="Arial"/>
-                <a:ea typeface="Arial"/>
-                <a:cs typeface="Arial"/>
-              </a:rPr>
-              <a:t>RAG-grounded Claude guidance
-Deterministic scheduling
-Tested safety guardrails</a:t>
-            </a:r>
-          </a:p>
-        </p:txBody>
-      </p:sp>
-      <p:pic>
-        <p:nvPicPr>
-          <p:cNvPr id="11" name=""/>
-          <p:cNvPicPr>
-            <a:picLocks xmlns:a="http://schemas.openxmlformats.org/drawingml/2006/main" noChangeAspect="1"/>
-          </p:cNvPicPr>
-          <p:nvPr/>
-        </p:nvPicPr>
-        <p:blipFill>
-          <a:blip xmlns:r="http://schemas.openxmlformats.org/officeDocument/2006/relationships" xmlns:a="http://schemas.openxmlformats.org/drawingml/2006/main" r:embed="R05022be9e8da4d4d"/>
-          <a:stretch xmlns:a="http://schemas.openxmlformats.org/drawingml/2006/main"/>
-        </p:blipFill>
-        <p:spPr>
-          <a:xfrm xmlns:a="http://schemas.openxmlformats.org/drawingml/2006/main">
-            <a:off x="6902721" y="396431"/>
-            <a:ext cx="4272437" cy="5602034"/>
-          </a:xfrm>
-          <a:prstGeom xmlns:a="http://schemas.openxmlformats.org/drawingml/2006/main" prst="roundRect">
-            <a:avLst>
-              <a:gd name="adj" fmla="val 2063"/>
-            </a:avLst>
-          </a:prstGeom>
-        </p:spPr>
-      </p:pic>
+              <a:defRPr sz="1500" b="1">
+                <a:solidFill>
+                  <a:srgbClr val="3B234D"/>
+                </a:solidFill>
+                <a:latin typeface="Arial"/>
+                <a:ea typeface="Arial"/>
+                <a:cs typeface="Arial"/>
+              </a:defRPr>
+            </a:pPr>
+            <a:r>
+              <a:rPr sz="1500" b="1">
+                <a:solidFill>
+                  <a:srgbClr val="3B234D"/>
+                </a:solidFill>
+                <a:latin typeface="Arial"/>
+                <a:ea typeface="Arial"/>
+                <a:cs typeface="Arial"/>
+              </a:rPr>
+              <a:t>Hemaleka Mohanram</a:t>
+            </a:r>
+          </a:p>
+        </p:txBody>
+      </p:sp>
     </p:spTree>
     <p:extLst>
       <p:ext uri="{BB962C8B-B14F-4D97-AF65-F5344CB8AC3E}">
-        <p14:creationId xmlns:p14="http://schemas.microsoft.com/office/powerpoint/2010/main" val="1569522824"/>
+        <p14:creationId xmlns:p14="http://schemas.microsoft.com/office/powerpoint/2010/main" val="1912363014"/>
       </p:ext>
     </p:extLst>
   </p:cSld>
@@ -1759,6 +1862,13 @@
 <file path=ppt/slides/slide2.xml><?xml version="1.0" encoding="utf-8"?>
 <p:sld xmlns:p="http://schemas.openxmlformats.org/presentationml/2006/main">
   <p:cSld>
+    <p:bg>
+      <p:bgPr>
+        <a:solidFill xmlns:a="http://schemas.openxmlformats.org/drawingml/2006/main">
+          <a:srgbClr val="FFF9F1"/>
+        </a:solidFill>
+      </p:bgPr>
+    </p:bg>
     <p:spTree>
       <p:nvGrpSpPr>
         <p:cNvPr id="1" name=""/>
@@ -1770,10 +1880,10 @@
       </p:grpSpPr>
       <p:sp>
         <p:nvSpPr>
-          <p:cNvPr id="5" name="Google-Shape-534-p58-1">
+          <p:cNvPr id="9" name="problem-kicker">
             <a:extLst xmlns:a="http://schemas.openxmlformats.org/drawingml/2006/main">
               <a:ext uri="{FF2B5EF4-FFF2-40B4-BE49-F238E27FC236}">
-                <a16:creationId xmlns:a16="http://schemas.microsoft.com/office/drawing/2014/main" id="{44D0AA98-A64A-4FCF-904C-5E6E3F70FF81}"/>
+                <a16:creationId xmlns:a16="http://schemas.microsoft.com/office/drawing/2014/main" id="{072CA00C-3FA6-4CDC-9391-863F6BB0CAD5}"/>
               </a:ext>
             </a:extLst>
           </p:cNvPr>
@@ -1784,134 +1894,52 @@
         </p:nvSpPr>
         <p:spPr>
           <a:xfrm xmlns:a="http://schemas.openxmlformats.org/drawingml/2006/main">
-            <a:off x="393668" y="1838801"/>
-            <a:ext cx="5533168" cy="4155567"/>
-          </a:xfrm>
-          <a:prstGeom xmlns:a="http://schemas.openxmlformats.org/drawingml/2006/main" prst="rect">
-            <a:avLst/>
-          </a:prstGeom>
-        </p:spPr>
-        <p:txBody>
-          <a:bodyPr xmlns:a="http://schemas.openxmlformats.org/drawingml/2006/main" wrap="square" lIns="0" tIns="0" rIns="0" bIns="0" anchor="t">
-            <a:noAutofit/>
-          </a:bodyPr>
+            <a:off x="628650" y="495300"/>
+            <a:ext cx="2667000" cy="323850"/>
+          </a:xfrm>
+          <a:prstGeom xmlns:a="http://schemas.openxmlformats.org/drawingml/2006/main" prst="rect">
+            <a:avLst/>
+          </a:prstGeom>
+          <a:noFill xmlns:a="http://schemas.openxmlformats.org/drawingml/2006/main"/>
+          <a:ln xmlns:a="http://schemas.openxmlformats.org/drawingml/2006/main" w="0">
+            <a:noFill/>
+            <a:prstDash val="solid"/>
+          </a:ln>
+        </p:spPr>
+        <p:txBody>
+          <a:bodyPr xmlns:a="http://schemas.openxmlformats.org/drawingml/2006/main" anchor="t"/>
           <a:lstStyle xmlns:a="http://schemas.openxmlformats.org/drawingml/2006/main"/>
           <a:p xmlns:a="http://schemas.openxmlformats.org/drawingml/2006/main">
             <a:pPr algn="l">
-              <a:lnSpc>
-                <a:spcPct val="100000"/>
-              </a:lnSpc>
-              <a:buNone/>
-              <a:defRPr sz="2400">
-                <a:solidFill>
-                  <a:srgbClr val="000000"/>
-                </a:solidFill>
-                <a:latin typeface="Helvetica Neue"/>
-                <a:ea typeface="Helvetica Neue"/>
-                <a:cs typeface="Helvetica Neue"/>
-              </a:defRPr>
-            </a:pPr>
-            <a:r>
-              <a:rPr sz="1950" b="1">
-                <a:solidFill>
-                  <a:srgbClr val="3D8DFF"/>
-                </a:solidFill>
-                <a:latin typeface="Arial"/>
-                <a:ea typeface="Arial"/>
-                <a:cs typeface="Arial"/>
-              </a:rPr>
-              <a:t>The user challenge</a:t>
-            </a:r>
-          </a:p>
-          <a:p xmlns:a="http://schemas.openxmlformats.org/drawingml/2006/main">
-            <a:pPr algn="l">
-              <a:lnSpc>
-                <a:spcPct val="100000"/>
-              </a:lnSpc>
-              <a:buNone/>
-              <a:defRPr sz="2400">
-                <a:solidFill>
-                  <a:srgbClr val="000000"/>
-                </a:solidFill>
-                <a:latin typeface="Helvetica Neue"/>
-                <a:ea typeface="Helvetica Neue"/>
-                <a:cs typeface="Helvetica Neue"/>
-              </a:defRPr>
-            </a:pPr>
-            <a:r>
-              <a:rPr sz="1800" b="0">
-                <a:solidFill>
-                  <a:srgbClr val="000000"/>
-                </a:solidFill>
-                <a:latin typeface="Arial"/>
-                <a:ea typeface="Arial"/>
-                <a:cs typeface="Arial"/>
-              </a:rPr>
-              <a:t>Owners juggle walks, feeding, medication, grooming, and appointments.</a:t>
-            </a:r>
-          </a:p>
-          <a:p xmlns:a="http://schemas.openxmlformats.org/drawingml/2006/main">
-            <a:pPr algn="l">
-              <a:lnSpc>
-                <a:spcPct val="100000"/>
-              </a:lnSpc>
-              <a:buNone/>
-              <a:defRPr sz="2400">
-                <a:solidFill>
-                  <a:srgbClr val="000000"/>
-                </a:solidFill>
-                <a:latin typeface="Helvetica Neue"/>
-                <a:ea typeface="Helvetica Neue"/>
-                <a:cs typeface="Helvetica Neue"/>
-              </a:defRPr>
-            </a:pPr>
-            <a:r>
-              <a:rPr sz="1800" b="0">
-                <a:solidFill>
-                  <a:srgbClr val="000000"/>
-                </a:solidFill>
-                <a:latin typeface="Arial"/>
-                <a:ea typeface="Arial"/>
-                <a:cs typeface="Arial"/>
-              </a:rPr>
-              <a:t>Limited time makes priority and timing hard to manage.</a:t>
-            </a:r>
-          </a:p>
-          <a:p xmlns:a="http://schemas.openxmlformats.org/drawingml/2006/main">
-            <a:pPr algn="l">
-              <a:lnSpc>
-                <a:spcPct val="100000"/>
-              </a:lnSpc>
-              <a:buNone/>
-              <a:defRPr sz="2400">
-                <a:solidFill>
-                  <a:srgbClr val="000000"/>
-                </a:solidFill>
-                <a:latin typeface="Helvetica Neue"/>
-                <a:ea typeface="Helvetica Neue"/>
-                <a:cs typeface="Helvetica Neue"/>
-              </a:defRPr>
-            </a:pPr>
-            <a:r>
-              <a:rPr sz="1800" b="0">
-                <a:solidFill>
-                  <a:srgbClr val="000000"/>
-                </a:solidFill>
-                <a:latin typeface="Arial"/>
-                <a:ea typeface="Arial"/>
-                <a:cs typeface="Arial"/>
-              </a:rPr>
-              <a:t>A generic chatbot may ignore the actual schedule or give unsupported advice.</a:t>
-            </a:r>
-          </a:p>
-        </p:txBody>
-      </p:sp>
-      <p:sp>
-        <p:nvSpPr>
-          <p:cNvPr id="2" name="Google-Shape-532-p58-3">
+              <a:defRPr sz="1275" b="1">
+                <a:solidFill>
+                  <a:srgbClr val="E98777"/>
+                </a:solidFill>
+                <a:latin typeface="Arial"/>
+                <a:ea typeface="Arial"/>
+                <a:cs typeface="Arial"/>
+              </a:defRPr>
+            </a:pPr>
+            <a:r>
+              <a:rPr sz="1275" b="1">
+                <a:solidFill>
+                  <a:srgbClr val="E98777"/>
+                </a:solidFill>
+                <a:latin typeface="Arial"/>
+                <a:ea typeface="Arial"/>
+                <a:cs typeface="Arial"/>
+              </a:rPr>
+              <a:t>THE PROBLEM</a:t>
+            </a:r>
+          </a:p>
+        </p:txBody>
+      </p:sp>
+      <p:sp>
+        <p:nvSpPr>
+          <p:cNvPr id="2" name="problem-title">
             <a:extLst xmlns:a="http://schemas.openxmlformats.org/drawingml/2006/main">
               <a:ext uri="{FF2B5EF4-FFF2-40B4-BE49-F238E27FC236}">
-                <a16:creationId xmlns:a16="http://schemas.microsoft.com/office/drawing/2014/main" id="{524A580A-C3F4-45F6-927F-C8BCADEFF440}"/>
+                <a16:creationId xmlns:a16="http://schemas.microsoft.com/office/drawing/2014/main" id="{6A353D4D-121D-44B9-86A0-2BDEF7DEEDA0}"/>
               </a:ext>
             </a:extLst>
           </p:cNvPr>
@@ -1922,41 +1950,75 @@
         </p:nvSpPr>
         <p:spPr>
           <a:xfrm xmlns:a="http://schemas.openxmlformats.org/drawingml/2006/main">
-            <a:off x="11279315" y="6279261"/>
-            <a:ext cx="518922" cy="241268"/>
-          </a:xfrm>
-          <a:prstGeom xmlns:a="http://schemas.openxmlformats.org/drawingml/2006/main" prst="rect">
-            <a:avLst/>
-          </a:prstGeom>
-        </p:spPr>
-        <p:txBody>
-          <a:bodyPr xmlns:a="http://schemas.openxmlformats.org/drawingml/2006/main" wrap="square" lIns="0" tIns="0" rIns="0" bIns="0" anchor="b">
-            <a:noAutofit/>
-          </a:bodyPr>
-          <a:lstStyle xmlns:a="http://schemas.openxmlformats.org/drawingml/2006/main"/>
-          <a:p xmlns:a="http://schemas.openxmlformats.org/drawingml/2006/main">
-            <a:pPr algn="r">
-              <a:defRPr sz="1000">
-                <a:solidFill>
-                  <a:srgbClr val="000000"/>
-                </a:solidFill>
-                <a:latin typeface="Helvetica Neue"/>
-                <a:ea typeface="Helvetica Neue"/>
-                <a:cs typeface="Helvetica Neue"/>
-              </a:defRPr>
-            </a:pPr>
-            <a:r>
-              <a:t>2</a:t>
-            </a:r>
-          </a:p>
-        </p:txBody>
-      </p:sp>
-      <p:sp>
-        <p:nvSpPr>
-          <p:cNvPr id="3" name="Google-Shape-533-p58-4">
+            <a:off x="628650" y="1009650"/>
+            <a:ext cx="6286500" cy="1238250"/>
+          </a:xfrm>
+          <a:prstGeom xmlns:a="http://schemas.openxmlformats.org/drawingml/2006/main" prst="rect">
+            <a:avLst/>
+          </a:prstGeom>
+          <a:noFill xmlns:a="http://schemas.openxmlformats.org/drawingml/2006/main"/>
+          <a:ln xmlns:a="http://schemas.openxmlformats.org/drawingml/2006/main" w="0">
+            <a:noFill/>
+            <a:prstDash val="solid"/>
+          </a:ln>
+        </p:spPr>
+        <p:txBody>
+          <a:bodyPr xmlns:a="http://schemas.openxmlformats.org/drawingml/2006/main" anchor="t"/>
+          <a:lstStyle xmlns:a="http://schemas.openxmlformats.org/drawingml/2006/main"/>
+          <a:p xmlns:a="http://schemas.openxmlformats.org/drawingml/2006/main">
+            <a:pPr algn="l">
+              <a:defRPr sz="3225" b="1">
+                <a:solidFill>
+                  <a:srgbClr val="3B234D"/>
+                </a:solidFill>
+                <a:latin typeface="Arial"/>
+                <a:ea typeface="Arial"/>
+                <a:cs typeface="Arial"/>
+              </a:defRPr>
+            </a:pPr>
+            <a:r>
+              <a:rPr sz="3225" b="1">
+                <a:solidFill>
+                  <a:srgbClr val="3B234D"/>
+                </a:solidFill>
+                <a:latin typeface="Arial"/>
+                <a:ea typeface="Arial"/>
+                <a:cs typeface="Arial"/>
+              </a:rPr>
+              <a:t>Pet owners need a plan,</a:t>
+            </a:r>
+          </a:p>
+          <a:p xmlns:a="http://schemas.openxmlformats.org/drawingml/2006/main">
+            <a:pPr algn="l">
+              <a:defRPr sz="3225" b="1">
+                <a:solidFill>
+                  <a:srgbClr val="3B234D"/>
+                </a:solidFill>
+                <a:latin typeface="Arial"/>
+                <a:ea typeface="Arial"/>
+                <a:cs typeface="Arial"/>
+              </a:defRPr>
+            </a:pPr>
+            <a:r>
+              <a:rPr sz="3225" b="1">
+                <a:solidFill>
+                  <a:srgbClr val="3B234D"/>
+                </a:solidFill>
+                <a:latin typeface="Arial"/>
+                <a:ea typeface="Arial"/>
+                <a:cs typeface="Arial"/>
+              </a:rPr>
+              <a:t>not another generic chatbot.</a:t>
+            </a:r>
+          </a:p>
+        </p:txBody>
+      </p:sp>
+      <p:sp>
+        <p:nvSpPr>
+          <p:cNvPr id="3" name="problem-body">
             <a:extLst xmlns:a="http://schemas.openxmlformats.org/drawingml/2006/main">
               <a:ext uri="{FF2B5EF4-FFF2-40B4-BE49-F238E27FC236}">
-                <a16:creationId xmlns:a16="http://schemas.microsoft.com/office/drawing/2014/main" id="{91A431C4-7F4A-47A9-BCBC-9C174AD4DBB1}"/>
+                <a16:creationId xmlns:a16="http://schemas.microsoft.com/office/drawing/2014/main" id="{2EBBFD34-B5CD-48FF-A2B0-2BD43C45401E}"/>
               </a:ext>
             </a:extLst>
           </p:cNvPr>
@@ -1967,53 +2029,74 @@
         </p:nvSpPr>
         <p:spPr>
           <a:xfrm xmlns:a="http://schemas.openxmlformats.org/drawingml/2006/main">
-            <a:off x="393668" y="344043"/>
-            <a:ext cx="11404568" cy="1047464"/>
-          </a:xfrm>
-          <a:prstGeom xmlns:a="http://schemas.openxmlformats.org/drawingml/2006/main" prst="rect">
-            <a:avLst/>
-          </a:prstGeom>
-        </p:spPr>
-        <p:txBody>
-          <a:bodyPr xmlns:a="http://schemas.openxmlformats.org/drawingml/2006/main" wrap="square" lIns="0" tIns="0" rIns="0" bIns="0" anchor="t">
-            <a:noAutofit/>
-          </a:bodyPr>
+            <a:off x="647700" y="2571750"/>
+            <a:ext cx="5715000" cy="1285875"/>
+          </a:xfrm>
+          <a:prstGeom xmlns:a="http://schemas.openxmlformats.org/drawingml/2006/main" prst="rect">
+            <a:avLst/>
+          </a:prstGeom>
+          <a:noFill xmlns:a="http://schemas.openxmlformats.org/drawingml/2006/main"/>
+          <a:ln xmlns:a="http://schemas.openxmlformats.org/drawingml/2006/main" w="0">
+            <a:noFill/>
+            <a:prstDash val="solid"/>
+          </a:ln>
+        </p:spPr>
+        <p:txBody>
+          <a:bodyPr xmlns:a="http://schemas.openxmlformats.org/drawingml/2006/main" anchor="t"/>
           <a:lstStyle xmlns:a="http://schemas.openxmlformats.org/drawingml/2006/main"/>
           <a:p xmlns:a="http://schemas.openxmlformats.org/drawingml/2006/main">
             <a:pPr algn="l">
-              <a:lnSpc>
-                <a:spcPct val="100000"/>
-              </a:lnSpc>
-              <a:buNone/>
-              <a:defRPr sz="2900">
-                <a:solidFill>
-                  <a:srgbClr val="000000"/>
-                </a:solidFill>
-                <a:latin typeface="Helvetica Neue"/>
-                <a:ea typeface="Helvetica Neue"/>
-                <a:cs typeface="Helvetica Neue"/>
-              </a:defRPr>
-            </a:pPr>
-            <a:r>
-              <a:rPr sz="2900" b="1">
-                <a:solidFill>
-                  <a:srgbClr val="000000"/>
-                </a:solidFill>
-                <a:latin typeface="Arial"/>
-                <a:ea typeface="Arial"/>
-                <a:cs typeface="Arial"/>
-              </a:rPr>
-              <a:t>Pet care is a scheduling problem before it is an AI problem.</a:t>
-            </a:r>
-          </a:p>
-        </p:txBody>
-      </p:sp>
-      <p:sp>
-        <p:nvSpPr>
-          <p:cNvPr id="4" name="Google-Shape-534-p58-5">
+              <a:defRPr sz="1725" b="0">
+                <a:solidFill>
+                  <a:srgbClr val="2B2630"/>
+                </a:solidFill>
+                <a:latin typeface="Arial"/>
+                <a:ea typeface="Arial"/>
+                <a:cs typeface="Arial"/>
+              </a:defRPr>
+            </a:pPr>
+            <a:r>
+              <a:rPr sz="1725" b="0">
+                <a:solidFill>
+                  <a:srgbClr val="2B2630"/>
+                </a:solidFill>
+                <a:latin typeface="Arial"/>
+                <a:ea typeface="Arial"/>
+                <a:cs typeface="Arial"/>
+              </a:rPr>
+              <a:t>Walks, feeding, medication, grooming, and appointments compete for limited time. The first challenge is deciding what matters today—and what actually fits.</a:t>
+            </a:r>
+          </a:p>
+        </p:txBody>
+      </p:sp>
+      <p:cxnSp>
+        <p:nvCxnSpPr>
+          <p:cNvPr id="12" name="problem-rule"/>
+          <p:cNvCxnSpPr/>
+          <p:nvPr/>
+        </p:nvCxnSpPr>
+        <p:spPr>
+          <a:xfrm xmlns:a="http://schemas.openxmlformats.org/drawingml/2006/main">
+            <a:off x="647700" y="4143375"/>
+            <a:ext cx="5238750" cy="95"/>
+          </a:xfrm>
+          <a:prstGeom xmlns:a="http://schemas.openxmlformats.org/drawingml/2006/main" prst="straightConnector1">
+            <a:avLst/>
+          </a:prstGeom>
+          <a:ln xmlns:a="http://schemas.openxmlformats.org/drawingml/2006/main" w="38100">
+            <a:solidFill>
+              <a:srgbClr val="E98777"/>
+            </a:solidFill>
+            <a:prstDash val="solid"/>
+          </a:ln>
+        </p:spPr>
+      </p:cxnSp>
+      <p:sp>
+        <p:nvSpPr>
+          <p:cNvPr id="5" name="problem-answer">
             <a:extLst xmlns:a="http://schemas.openxmlformats.org/drawingml/2006/main">
               <a:ext uri="{FF2B5EF4-FFF2-40B4-BE49-F238E27FC236}">
-                <a16:creationId xmlns:a16="http://schemas.microsoft.com/office/drawing/2014/main" id="{D8272AEF-B6B2-4446-8404-9FE825ED2C83}"/>
+                <a16:creationId xmlns:a16="http://schemas.microsoft.com/office/drawing/2014/main" id="{B647E1E2-825C-4E83-B9D1-79586923A5FC}"/>
               </a:ext>
             </a:extLst>
           </p:cNvPr>
@@ -2024,97 +2107,181 @@
         </p:nvSpPr>
         <p:spPr>
           <a:xfrm xmlns:a="http://schemas.openxmlformats.org/drawingml/2006/main">
-            <a:off x="6265069" y="2192655"/>
-            <a:ext cx="5537168" cy="3801713"/>
-          </a:xfrm>
-          <a:prstGeom xmlns:a="http://schemas.openxmlformats.org/drawingml/2006/main" prst="rect">
-            <a:avLst/>
-          </a:prstGeom>
-        </p:spPr>
-        <p:txBody>
-          <a:bodyPr xmlns:a="http://schemas.openxmlformats.org/drawingml/2006/main" wrap="square" lIns="0" tIns="0" rIns="0" bIns="0" anchor="t">
-            <a:noAutofit/>
-          </a:bodyPr>
+            <a:off x="647700" y="4429125"/>
+            <a:ext cx="5715000" cy="1143000"/>
+          </a:xfrm>
+          <a:prstGeom xmlns:a="http://schemas.openxmlformats.org/drawingml/2006/main" prst="rect">
+            <a:avLst/>
+          </a:prstGeom>
+          <a:noFill xmlns:a="http://schemas.openxmlformats.org/drawingml/2006/main"/>
+          <a:ln xmlns:a="http://schemas.openxmlformats.org/drawingml/2006/main" w="0">
+            <a:noFill/>
+            <a:prstDash val="solid"/>
+          </a:ln>
+        </p:spPr>
+        <p:txBody>
+          <a:bodyPr xmlns:a="http://schemas.openxmlformats.org/drawingml/2006/main" anchor="t"/>
           <a:lstStyle xmlns:a="http://schemas.openxmlformats.org/drawingml/2006/main"/>
           <a:p xmlns:a="http://schemas.openxmlformats.org/drawingml/2006/main">
             <a:pPr algn="l">
-              <a:lnSpc>
-                <a:spcPct val="100000"/>
-              </a:lnSpc>
-              <a:buNone/>
-              <a:defRPr sz="2400">
-                <a:solidFill>
-                  <a:srgbClr val="000000"/>
-                </a:solidFill>
-                <a:latin typeface="Helvetica Neue"/>
-                <a:ea typeface="Helvetica Neue"/>
-                <a:cs typeface="Helvetica Neue"/>
-              </a:defRPr>
-            </a:pPr>
-            <a:r>
-              <a:rPr sz="1950" b="1">
-                <a:solidFill>
-                  <a:srgbClr val="3D8DFF"/>
-                </a:solidFill>
-                <a:latin typeface="Arial"/>
-                <a:ea typeface="Arial"/>
-                <a:cs typeface="Arial"/>
-              </a:rPr>
-              <a:t>PawPal’s answer</a:t>
-            </a:r>
-          </a:p>
+              <a:defRPr sz="1800" b="1">
+                <a:solidFill>
+                  <a:srgbClr val="2F6B57"/>
+                </a:solidFill>
+                <a:latin typeface="Arial"/>
+                <a:ea typeface="Arial"/>
+                <a:cs typeface="Arial"/>
+              </a:defRPr>
+            </a:pPr>
+            <a:r>
+              <a:rPr sz="1800" b="1">
+                <a:solidFill>
+                  <a:srgbClr val="2F6B57"/>
+                </a:solidFill>
+                <a:latin typeface="Arial"/>
+                <a:ea typeface="Arial"/>
+                <a:cs typeface="Arial"/>
+              </a:rPr>
+              <a:t>PawPal keeps scheduling deterministic, then uses AI only to explain the real plan with retrieved care guidance.</a:t>
+            </a:r>
+          </a:p>
+        </p:txBody>
+      </p:sp>
+      <p:pic>
+        <p:nvPicPr>
+          <p:cNvPr id="14" name=""/>
+          <p:cNvPicPr>
+            <a:picLocks xmlns:a="http://schemas.openxmlformats.org/drawingml/2006/main" noChangeAspect="1"/>
+          </p:cNvPicPr>
+          <p:nvPr/>
+        </p:nvPicPr>
+        <p:blipFill>
+          <a:blip xmlns:r="http://schemas.openxmlformats.org/officeDocument/2006/relationships" xmlns:a="http://schemas.openxmlformats.org/drawingml/2006/main" r:embed="R6713c3ac172f42e7"/>
+          <a:srcRect xmlns:a="http://schemas.openxmlformats.org/drawingml/2006/main" l="830" t="0" r="830" b="0"/>
+          <a:stretch xmlns:a="http://schemas.openxmlformats.org/drawingml/2006/main">
+            <a:fillRect l="0" t="0" r="0" b="0"/>
+          </a:stretch>
+        </p:blipFill>
+        <p:spPr>
+          <a:xfrm xmlns:a="http://schemas.openxmlformats.org/drawingml/2006/main">
+            <a:off x="7239000" y="704850"/>
+            <a:ext cx="4000500" cy="5334000"/>
+          </a:xfrm>
+          <a:prstGeom xmlns:a="http://schemas.openxmlformats.org/drawingml/2006/main" prst="roundRect">
+            <a:avLst>
+              <a:gd name="adj" fmla="val 5238"/>
+            </a:avLst>
+          </a:prstGeom>
+        </p:spPr>
+      </p:pic>
+      <p:sp>
+        <p:nvSpPr>
+          <p:cNvPr id="7" name="footer-brand-2">
+            <a:extLst xmlns:a="http://schemas.openxmlformats.org/drawingml/2006/main">
+              <a:ext uri="{FF2B5EF4-FFF2-40B4-BE49-F238E27FC236}">
+                <a16:creationId xmlns:a16="http://schemas.microsoft.com/office/drawing/2014/main" id="{80EE2F08-994A-4D6A-846C-6A887FDCD593}"/>
+              </a:ext>
+            </a:extLst>
+          </p:cNvPr>
+          <p:cNvSpPr>
+            <a:spLocks xmlns:a="http://schemas.openxmlformats.org/drawingml/2006/main" noGrp="1"/>
+          </p:cNvSpPr>
+          <p:nvPr/>
+        </p:nvSpPr>
+        <p:spPr>
+          <a:xfrm xmlns:a="http://schemas.openxmlformats.org/drawingml/2006/main">
+            <a:off x="609600" y="6362700"/>
+            <a:ext cx="1524000" cy="266700"/>
+          </a:xfrm>
+          <a:prstGeom xmlns:a="http://schemas.openxmlformats.org/drawingml/2006/main" prst="rect">
+            <a:avLst/>
+          </a:prstGeom>
+          <a:noFill xmlns:a="http://schemas.openxmlformats.org/drawingml/2006/main"/>
+          <a:ln xmlns:a="http://schemas.openxmlformats.org/drawingml/2006/main" w="0">
+            <a:noFill/>
+            <a:prstDash val="solid"/>
+          </a:ln>
+        </p:spPr>
+        <p:txBody>
+          <a:bodyPr xmlns:a="http://schemas.openxmlformats.org/drawingml/2006/main" anchor="t"/>
+          <a:lstStyle xmlns:a="http://schemas.openxmlformats.org/drawingml/2006/main"/>
           <a:p xmlns:a="http://schemas.openxmlformats.org/drawingml/2006/main">
             <a:pPr algn="l">
-              <a:lnSpc>
-                <a:spcPct val="100000"/>
-              </a:lnSpc>
-              <a:buNone/>
-              <a:defRPr sz="2400">
-                <a:solidFill>
-                  <a:srgbClr val="000000"/>
-                </a:solidFill>
-                <a:latin typeface="Helvetica Neue"/>
-                <a:ea typeface="Helvetica Neue"/>
-                <a:cs typeface="Helvetica Neue"/>
-              </a:defRPr>
-            </a:pPr>
-            <a:r>
-              <a:rPr sz="1800" b="0">
-                <a:solidFill>
-                  <a:srgbClr val="000000"/>
-                </a:solidFill>
-                <a:latin typeface="Arial"/>
-                <a:ea typeface="Arial"/>
-                <a:cs typeface="Arial"/>
-              </a:rPr>
-              <a:t>Python builds the plan deterministically.</a:t>
-            </a:r>
-          </a:p>
-          <a:p xmlns:a="http://schemas.openxmlformats.org/drawingml/2006/main">
-            <a:pPr algn="l">
-              <a:lnSpc>
-                <a:spcPct val="100000"/>
-              </a:lnSpc>
-              <a:buNone/>
-              <a:defRPr sz="2400">
-                <a:solidFill>
-                  <a:srgbClr val="000000"/>
-                </a:solidFill>
-                <a:latin typeface="Helvetica Neue"/>
-                <a:ea typeface="Helvetica Neue"/>
-                <a:cs typeface="Helvetica Neue"/>
-              </a:defRPr>
-            </a:pPr>
-            <a:r>
-              <a:rPr sz="1800" b="0">
-                <a:solidFill>
-                  <a:srgbClr val="000000"/>
-                </a:solidFill>
-                <a:latin typeface="Arial"/>
-                <a:ea typeface="Arial"/>
-                <a:cs typeface="Arial"/>
-              </a:rPr>
-              <a:t>AI explains that plan using retrieved pet-care guidance.</a:t>
+              <a:defRPr sz="975" b="1">
+                <a:solidFill>
+                  <a:srgbClr val="6F527F"/>
+                </a:solidFill>
+                <a:latin typeface="Arial"/>
+                <a:ea typeface="Arial"/>
+                <a:cs typeface="Arial"/>
+              </a:defRPr>
+            </a:pPr>
+            <a:r>
+              <a:rPr sz="975" b="1">
+                <a:solidFill>
+                  <a:srgbClr val="6F527F"/>
+                </a:solidFill>
+                <a:latin typeface="Arial"/>
+                <a:ea typeface="Arial"/>
+                <a:cs typeface="Arial"/>
+              </a:rPr>
+              <a:t>PAWPAL+</a:t>
+            </a:r>
+          </a:p>
+        </p:txBody>
+      </p:sp>
+      <p:sp>
+        <p:nvSpPr>
+          <p:cNvPr id="8" name="footer-number-2">
+            <a:extLst xmlns:a="http://schemas.openxmlformats.org/drawingml/2006/main">
+              <a:ext uri="{FF2B5EF4-FFF2-40B4-BE49-F238E27FC236}">
+                <a16:creationId xmlns:a16="http://schemas.microsoft.com/office/drawing/2014/main" id="{1383799C-A89B-4F56-88D0-5B7F1224B107}"/>
+              </a:ext>
+            </a:extLst>
+          </p:cNvPr>
+          <p:cNvSpPr>
+            <a:spLocks xmlns:a="http://schemas.openxmlformats.org/drawingml/2006/main" noGrp="1"/>
+          </p:cNvSpPr>
+          <p:nvPr/>
+        </p:nvSpPr>
+        <p:spPr>
+          <a:xfrm xmlns:a="http://schemas.openxmlformats.org/drawingml/2006/main">
+            <a:off x="11334750" y="6362700"/>
+            <a:ext cx="266700" cy="228600"/>
+          </a:xfrm>
+          <a:prstGeom xmlns:a="http://schemas.openxmlformats.org/drawingml/2006/main" prst="rect">
+            <a:avLst/>
+          </a:prstGeom>
+          <a:noFill xmlns:a="http://schemas.openxmlformats.org/drawingml/2006/main"/>
+          <a:ln xmlns:a="http://schemas.openxmlformats.org/drawingml/2006/main" w="0">
+            <a:noFill/>
+            <a:prstDash val="solid"/>
+          </a:ln>
+        </p:spPr>
+        <p:txBody>
+          <a:bodyPr xmlns:a="http://schemas.openxmlformats.org/drawingml/2006/main" anchor="t"/>
+          <a:lstStyle xmlns:a="http://schemas.openxmlformats.org/drawingml/2006/main"/>
+          <a:p xmlns:a="http://schemas.openxmlformats.org/drawingml/2006/main">
+            <a:pPr algn="r">
+              <a:defRPr sz="975" b="1">
+                <a:solidFill>
+                  <a:srgbClr val="6F527F"/>
+                </a:solidFill>
+                <a:latin typeface="Arial"/>
+                <a:ea typeface="Arial"/>
+                <a:cs typeface="Arial"/>
+              </a:defRPr>
+            </a:pPr>
+            <a:r>
+              <a:rPr sz="975" b="1">
+                <a:solidFill>
+                  <a:srgbClr val="6F527F"/>
+                </a:solidFill>
+                <a:latin typeface="Arial"/>
+                <a:ea typeface="Arial"/>
+                <a:cs typeface="Arial"/>
+              </a:rPr>
+              <a:t>2</a:t>
             </a:r>
           </a:p>
         </p:txBody>
@@ -2122,7 +2289,7 @@
     </p:spTree>
     <p:extLst>
       <p:ext uri="{BB962C8B-B14F-4D97-AF65-F5344CB8AC3E}">
-        <p14:creationId xmlns:p14="http://schemas.microsoft.com/office/powerpoint/2010/main" val="1482668509"/>
+        <p14:creationId xmlns:p14="http://schemas.microsoft.com/office/powerpoint/2010/main" val="1838368495"/>
       </p:ext>
     </p:extLst>
   </p:cSld>
@@ -2132,6 +2299,13 @@
 <file path=ppt/slides/slide3.xml><?xml version="1.0" encoding="utf-8"?>
 <p:sld xmlns:p="http://schemas.openxmlformats.org/presentationml/2006/main">
   <p:cSld>
+    <p:bg>
+      <p:bgPr>
+        <a:solidFill xmlns:a="http://schemas.openxmlformats.org/drawingml/2006/main">
+          <a:srgbClr val="3B234D"/>
+        </a:solidFill>
+      </p:bgPr>
+    </p:bg>
     <p:spTree>
       <p:nvGrpSpPr>
         <p:cNvPr id="1" name=""/>
@@ -2143,10 +2317,10 @@
       </p:grpSpPr>
       <p:sp>
         <p:nvSpPr>
-          <p:cNvPr id="13" name="Slide-Number-Placeholder-3-2">
+          <p:cNvPr id="21" name="logic-kicker">
             <a:extLst xmlns:a="http://schemas.openxmlformats.org/drawingml/2006/main">
               <a:ext uri="{FF2B5EF4-FFF2-40B4-BE49-F238E27FC236}">
-                <a16:creationId xmlns:a16="http://schemas.microsoft.com/office/drawing/2014/main" id="{E8E8E656-F9E8-4E49-ACCC-F383F02F0E48}"/>
+                <a16:creationId xmlns:a16="http://schemas.microsoft.com/office/drawing/2014/main" id="{9480C20B-E138-48A5-BD0F-0EC6895E29FB}"/>
               </a:ext>
             </a:extLst>
           </p:cNvPr>
@@ -2157,39 +2331,52 @@
         </p:nvSpPr>
         <p:spPr>
           <a:xfrm xmlns:a="http://schemas.openxmlformats.org/drawingml/2006/main">
-            <a:off x="11279315" y="6279261"/>
-            <a:ext cx="518922" cy="241268"/>
-          </a:xfrm>
-          <a:prstGeom xmlns:a="http://schemas.openxmlformats.org/drawingml/2006/main" prst="rect">
-            <a:avLst/>
-          </a:prstGeom>
-        </p:spPr>
-        <p:txBody>
-          <a:bodyPr xmlns:a="http://schemas.openxmlformats.org/drawingml/2006/main" lIns="0" tIns="0" rIns="0" bIns="0" anchor="b"/>
-          <a:lstStyle xmlns:a="http://schemas.openxmlformats.org/drawingml/2006/main"/>
-          <a:p xmlns:a="http://schemas.openxmlformats.org/drawingml/2006/main">
-            <a:pPr algn="r">
-              <a:defRPr sz="1000">
-                <a:solidFill>
-                  <a:srgbClr val="000000"/>
-                </a:solidFill>
-                <a:latin typeface="Helvetica Neue"/>
-                <a:ea typeface="Helvetica Neue"/>
-                <a:cs typeface="Helvetica Neue"/>
-              </a:defRPr>
-            </a:pPr>
-            <a:r>
-              <a:t>3</a:t>
-            </a:r>
-          </a:p>
-        </p:txBody>
-      </p:sp>
-      <p:sp>
-        <p:nvSpPr>
-          <p:cNvPr id="2" name="Title-10-3">
+            <a:off x="628650" y="495300"/>
+            <a:ext cx="2286000" cy="323850"/>
+          </a:xfrm>
+          <a:prstGeom xmlns:a="http://schemas.openxmlformats.org/drawingml/2006/main" prst="rect">
+            <a:avLst/>
+          </a:prstGeom>
+          <a:noFill xmlns:a="http://schemas.openxmlformats.org/drawingml/2006/main"/>
+          <a:ln xmlns:a="http://schemas.openxmlformats.org/drawingml/2006/main" w="0">
+            <a:noFill/>
+            <a:prstDash val="solid"/>
+          </a:ln>
+        </p:spPr>
+        <p:txBody>
+          <a:bodyPr xmlns:a="http://schemas.openxmlformats.org/drawingml/2006/main" anchor="t"/>
+          <a:lstStyle xmlns:a="http://schemas.openxmlformats.org/drawingml/2006/main"/>
+          <a:p xmlns:a="http://schemas.openxmlformats.org/drawingml/2006/main">
+            <a:pPr algn="l">
+              <a:defRPr sz="1275" b="1">
+                <a:solidFill>
+                  <a:srgbClr val="E98777"/>
+                </a:solidFill>
+                <a:latin typeface="Arial"/>
+                <a:ea typeface="Arial"/>
+                <a:cs typeface="Arial"/>
+              </a:defRPr>
+            </a:pPr>
+            <a:r>
+              <a:rPr sz="1275" b="1">
+                <a:solidFill>
+                  <a:srgbClr val="E98777"/>
+                </a:solidFill>
+                <a:latin typeface="Arial"/>
+                <a:ea typeface="Arial"/>
+                <a:cs typeface="Arial"/>
+              </a:rPr>
+              <a:t>THE LOGIC</a:t>
+            </a:r>
+          </a:p>
+        </p:txBody>
+      </p:sp>
+      <p:sp>
+        <p:nvSpPr>
+          <p:cNvPr id="2" name="logic-title">
             <a:extLst xmlns:a="http://schemas.openxmlformats.org/drawingml/2006/main">
               <a:ext uri="{FF2B5EF4-FFF2-40B4-BE49-F238E27FC236}">
-                <a16:creationId xmlns:a16="http://schemas.microsoft.com/office/drawing/2014/main" id="{81468B51-52C8-44CE-BB0D-84CEB10314BA}"/>
+                <a16:creationId xmlns:a16="http://schemas.microsoft.com/office/drawing/2014/main" id="{2F457BB1-8E79-4361-8361-44B2630A6924}"/>
               </a:ext>
             </a:extLst>
           </p:cNvPr>
@@ -2200,75 +2387,96 @@
         </p:nvSpPr>
         <p:spPr>
           <a:xfrm xmlns:a="http://schemas.openxmlformats.org/drawingml/2006/main">
-            <a:off x="393668" y="344043"/>
-            <a:ext cx="11404568" cy="1047464"/>
-          </a:xfrm>
-          <a:prstGeom xmlns:a="http://schemas.openxmlformats.org/drawingml/2006/main" prst="rect">
-            <a:avLst/>
-          </a:prstGeom>
-        </p:spPr>
-        <p:txBody>
-          <a:bodyPr xmlns:a="http://schemas.openxmlformats.org/drawingml/2006/main" lIns="0" tIns="0" rIns="0" bIns="0" anchor="t">
-            <a:normAutofit fontScale="100000"/>
-          </a:bodyPr>
+            <a:off x="628650" y="981075"/>
+            <a:ext cx="7239000" cy="666750"/>
+          </a:xfrm>
+          <a:prstGeom xmlns:a="http://schemas.openxmlformats.org/drawingml/2006/main" prst="rect">
+            <a:avLst/>
+          </a:prstGeom>
+          <a:noFill xmlns:a="http://schemas.openxmlformats.org/drawingml/2006/main"/>
+          <a:ln xmlns:a="http://schemas.openxmlformats.org/drawingml/2006/main" w="0">
+            <a:noFill/>
+            <a:prstDash val="solid"/>
+          </a:ln>
+        </p:spPr>
+        <p:txBody>
+          <a:bodyPr xmlns:a="http://schemas.openxmlformats.org/drawingml/2006/main" anchor="t"/>
           <a:lstStyle xmlns:a="http://schemas.openxmlformats.org/drawingml/2006/main"/>
           <a:p xmlns:a="http://schemas.openxmlformats.org/drawingml/2006/main">
             <a:pPr algn="l">
-              <a:lnSpc>
-                <a:spcPct val="100000"/>
-              </a:lnSpc>
-              <a:buNone/>
-              <a:defRPr sz="2900">
-                <a:solidFill>
-                  <a:srgbClr val="000000"/>
-                </a:solidFill>
-                <a:latin typeface="Helvetica Neue"/>
-                <a:ea typeface="Helvetica Neue"/>
-                <a:cs typeface="Helvetica Neue"/>
-              </a:defRPr>
-            </a:pPr>
-            <a:r>
-              <a:rPr sz="2900" b="1">
-                <a:solidFill>
-                  <a:srgbClr val="000000"/>
-                </a:solidFill>
-                <a:latin typeface="Arial"/>
-                <a:ea typeface="Arial"/>
-                <a:cs typeface="Arial"/>
-              </a:rPr>
-              <a:t>The AI thinks in a fixed, inspectable RAG pipeline.</a:t>
+              <a:defRPr sz="3000" b="1">
+                <a:solidFill>
+                  <a:srgbClr val="FFFFFF"/>
+                </a:solidFill>
+                <a:latin typeface="Arial"/>
+                <a:ea typeface="Arial"/>
+                <a:cs typeface="Arial"/>
+              </a:defRPr>
+            </a:pPr>
+            <a:r>
+              <a:rPr sz="3000" b="1">
+                <a:solidFill>
+                  <a:srgbClr val="FFFFFF"/>
+                </a:solidFill>
+                <a:latin typeface="Arial"/>
+                <a:ea typeface="Arial"/>
+                <a:cs typeface="Arial"/>
+              </a:rPr>
+              <a:t>A fixed RAG pipeline keeps the AI inspectable.</a:t>
             </a:r>
           </a:p>
         </p:txBody>
       </p:sp>
       <p:cxnSp>
         <p:nvCxnSpPr>
-          <p:cNvPr id="15" name="Google-Shape-2259-p159-4"/>
+          <p:cNvPr id="23" name="logic-connector-1"/>
           <p:cNvCxnSpPr/>
           <p:nvPr/>
         </p:nvCxnSpPr>
         <p:spPr>
           <a:xfrm xmlns:a="http://schemas.openxmlformats.org/drawingml/2006/main">
-            <a:off x="337757" y="3373755"/>
-            <a:ext cx="12245435" cy="286"/>
+            <a:off x="1695450" y="3009900"/>
+            <a:ext cx="1885950" cy="95"/>
           </a:xfrm>
           <a:prstGeom xmlns:a="http://schemas.openxmlformats.org/drawingml/2006/main" prst="straightConnector1">
             <a:avLst/>
           </a:prstGeom>
-          <a:ln xmlns:a="http://schemas.openxmlformats.org/drawingml/2006/main" w="9525">
+          <a:ln xmlns:a="http://schemas.openxmlformats.org/drawingml/2006/main" w="38100">
             <a:solidFill>
-              <a:srgbClr val="000000"/>
+              <a:srgbClr val="D7C2E3"/>
             </a:solidFill>
             <a:prstDash val="solid"/>
           </a:ln>
         </p:spPr>
       </p:cxnSp>
-      <p:sp>
-        <p:nvSpPr>
-          <p:cNvPr id="4" name="Google-Shape-2260-p159-5">
+      <p:cxnSp>
+        <p:nvCxnSpPr>
+          <p:cNvPr id="24" name="logic-connector-2"/>
+          <p:cNvCxnSpPr/>
+          <p:nvPr/>
+        </p:nvCxnSpPr>
+        <p:spPr>
+          <a:xfrm xmlns:a="http://schemas.openxmlformats.org/drawingml/2006/main">
+            <a:off x="4095750" y="3009900"/>
+            <a:ext cx="1885950" cy="95"/>
+          </a:xfrm>
+          <a:prstGeom xmlns:a="http://schemas.openxmlformats.org/drawingml/2006/main" prst="straightConnector1">
+            <a:avLst/>
+          </a:prstGeom>
+          <a:ln xmlns:a="http://schemas.openxmlformats.org/drawingml/2006/main" w="38100">
+            <a:solidFill>
+              <a:srgbClr val="D7C2E3"/>
+            </a:solidFill>
+            <a:prstDash val="solid"/>
+          </a:ln>
+        </p:spPr>
+      </p:cxnSp>
+      <p:sp>
+        <p:nvSpPr>
+          <p:cNvPr id="5" name="logic-node-01">
             <a:extLst xmlns:a="http://schemas.openxmlformats.org/drawingml/2006/main">
               <a:ext uri="{FF2B5EF4-FFF2-40B4-BE49-F238E27FC236}">
-                <a16:creationId xmlns:a16="http://schemas.microsoft.com/office/drawing/2014/main" id="{1FC4819E-0B4F-40BE-8AC9-520FDC7BD9FA}"/>
+                <a16:creationId xmlns:a16="http://schemas.microsoft.com/office/drawing/2014/main" id="{0DC6F14E-51DE-4478-B6DB-91846F961879}"/>
               </a:ext>
             </a:extLst>
           </p:cNvPr>
@@ -2279,23 +2487,31 @@
         </p:nvSpPr>
         <p:spPr>
           <a:xfrm xmlns:a="http://schemas.openxmlformats.org/drawingml/2006/main">
-            <a:off x="337757" y="3320225"/>
-            <a:ext cx="107061" cy="107061"/>
-          </a:xfrm>
-          <a:prstGeom xmlns:a="http://schemas.openxmlformats.org/drawingml/2006/main" prst="ellipse">
-            <a:avLst/>
+            <a:off x="666750" y="2143125"/>
+            <a:ext cx="2057400" cy="2333625"/>
+          </a:xfrm>
+          <a:prstGeom xmlns:a="http://schemas.openxmlformats.org/drawingml/2006/main" prst="roundRect">
+            <a:avLst>
+              <a:gd name="adj" fmla="val 11111"/>
+            </a:avLst>
           </a:prstGeom>
           <a:solidFill xmlns:a="http://schemas.openxmlformats.org/drawingml/2006/main">
-            <a:srgbClr val="000000"/>
+            <a:srgbClr val="EFE5F4"/>
           </a:solidFill>
-        </p:spPr>
-      </p:sp>
-      <p:sp>
-        <p:nvSpPr>
-          <p:cNvPr id="5" name="Google-Shape-2261-p159-6">
+          <a:ln xmlns:a="http://schemas.openxmlformats.org/drawingml/2006/main" w="9525">
+            <a:solidFill>
+              <a:srgbClr val="D7C2E3"/>
+            </a:solidFill>
+            <a:prstDash val="solid"/>
+          </a:ln>
+        </p:spPr>
+      </p:sp>
+      <p:sp>
+        <p:nvSpPr>
+          <p:cNvPr id="6" name="logic-number-01">
             <a:extLst xmlns:a="http://schemas.openxmlformats.org/drawingml/2006/main">
               <a:ext uri="{FF2B5EF4-FFF2-40B4-BE49-F238E27FC236}">
-                <a16:creationId xmlns:a16="http://schemas.microsoft.com/office/drawing/2014/main" id="{7772779B-DF1E-4765-A8E2-DCF643BA00A7}"/>
+                <a16:creationId xmlns:a16="http://schemas.microsoft.com/office/drawing/2014/main" id="{14E43234-D0CC-4FF9-97FA-0899806560A1}"/>
               </a:ext>
             </a:extLst>
           </p:cNvPr>
@@ -2306,23 +2522,52 @@
         </p:nvSpPr>
         <p:spPr>
           <a:xfrm xmlns:a="http://schemas.openxmlformats.org/drawingml/2006/main">
-            <a:off x="4251770" y="3320225"/>
-            <a:ext cx="107061" cy="107061"/>
-          </a:xfrm>
-          <a:prstGeom xmlns:a="http://schemas.openxmlformats.org/drawingml/2006/main" prst="ellipse">
-            <a:avLst/>
-          </a:prstGeom>
-          <a:solidFill xmlns:a="http://schemas.openxmlformats.org/drawingml/2006/main">
-            <a:srgbClr val="000000"/>
-          </a:solidFill>
-        </p:spPr>
-      </p:sp>
-      <p:sp>
-        <p:nvSpPr>
-          <p:cNvPr id="6" name="Google-Shape-2262-p159-7">
+            <a:off x="895350" y="2362200"/>
+            <a:ext cx="571500" cy="381000"/>
+          </a:xfrm>
+          <a:prstGeom xmlns:a="http://schemas.openxmlformats.org/drawingml/2006/main" prst="rect">
+            <a:avLst/>
+          </a:prstGeom>
+          <a:noFill xmlns:a="http://schemas.openxmlformats.org/drawingml/2006/main"/>
+          <a:ln xmlns:a="http://schemas.openxmlformats.org/drawingml/2006/main" w="0">
+            <a:noFill/>
+            <a:prstDash val="solid"/>
+          </a:ln>
+        </p:spPr>
+        <p:txBody>
+          <a:bodyPr xmlns:a="http://schemas.openxmlformats.org/drawingml/2006/main" anchor="t"/>
+          <a:lstStyle xmlns:a="http://schemas.openxmlformats.org/drawingml/2006/main"/>
+          <a:p xmlns:a="http://schemas.openxmlformats.org/drawingml/2006/main">
+            <a:pPr algn="l">
+              <a:defRPr sz="1350" b="1">
+                <a:solidFill>
+                  <a:srgbClr val="E98777"/>
+                </a:solidFill>
+                <a:latin typeface="Arial"/>
+                <a:ea typeface="Arial"/>
+                <a:cs typeface="Arial"/>
+              </a:defRPr>
+            </a:pPr>
+            <a:r>
+              <a:rPr sz="1350" b="1">
+                <a:solidFill>
+                  <a:srgbClr val="E98777"/>
+                </a:solidFill>
+                <a:latin typeface="Arial"/>
+                <a:ea typeface="Arial"/>
+                <a:cs typeface="Arial"/>
+              </a:rPr>
+              <a:t>01</a:t>
+            </a:r>
+          </a:p>
+        </p:txBody>
+      </p:sp>
+      <p:sp>
+        <p:nvSpPr>
+          <p:cNvPr id="7" name="logic-node-title-01">
             <a:extLst xmlns:a="http://schemas.openxmlformats.org/drawingml/2006/main">
               <a:ext uri="{FF2B5EF4-FFF2-40B4-BE49-F238E27FC236}">
-                <a16:creationId xmlns:a16="http://schemas.microsoft.com/office/drawing/2014/main" id="{420E6998-0850-457F-9A74-AAD0003C6C5B}"/>
+                <a16:creationId xmlns:a16="http://schemas.microsoft.com/office/drawing/2014/main" id="{DFAA3492-9AD7-41D0-9574-335A09DFE3E4}"/>
               </a:ext>
             </a:extLst>
           </p:cNvPr>
@@ -2333,23 +2578,52 @@
         </p:nvSpPr>
         <p:spPr>
           <a:xfrm xmlns:a="http://schemas.openxmlformats.org/drawingml/2006/main">
-            <a:off x="8176070" y="3320225"/>
-            <a:ext cx="107061" cy="107061"/>
-          </a:xfrm>
-          <a:prstGeom xmlns:a="http://schemas.openxmlformats.org/drawingml/2006/main" prst="ellipse">
-            <a:avLst/>
-          </a:prstGeom>
-          <a:solidFill xmlns:a="http://schemas.openxmlformats.org/drawingml/2006/main">
-            <a:srgbClr val="000000"/>
-          </a:solidFill>
-        </p:spPr>
-      </p:sp>
-      <p:sp>
-        <p:nvSpPr>
-          <p:cNvPr id="7" name="Content-Placeholder-15-8">
+            <a:off x="895350" y="2781300"/>
+            <a:ext cx="1619250" cy="400050"/>
+          </a:xfrm>
+          <a:prstGeom xmlns:a="http://schemas.openxmlformats.org/drawingml/2006/main" prst="rect">
+            <a:avLst/>
+          </a:prstGeom>
+          <a:noFill xmlns:a="http://schemas.openxmlformats.org/drawingml/2006/main"/>
+          <a:ln xmlns:a="http://schemas.openxmlformats.org/drawingml/2006/main" w="0">
+            <a:noFill/>
+            <a:prstDash val="solid"/>
+          </a:ln>
+        </p:spPr>
+        <p:txBody>
+          <a:bodyPr xmlns:a="http://schemas.openxmlformats.org/drawingml/2006/main" anchor="t"/>
+          <a:lstStyle xmlns:a="http://schemas.openxmlformats.org/drawingml/2006/main"/>
+          <a:p xmlns:a="http://schemas.openxmlformats.org/drawingml/2006/main">
+            <a:pPr algn="l">
+              <a:defRPr sz="1800" b="1">
+                <a:solidFill>
+                  <a:srgbClr val="3B234D"/>
+                </a:solidFill>
+                <a:latin typeface="Arial"/>
+                <a:ea typeface="Arial"/>
+                <a:cs typeface="Arial"/>
+              </a:defRPr>
+            </a:pPr>
+            <a:r>
+              <a:rPr sz="1800" b="1">
+                <a:solidFill>
+                  <a:srgbClr val="3B234D"/>
+                </a:solidFill>
+                <a:latin typeface="Arial"/>
+                <a:ea typeface="Arial"/>
+                <a:cs typeface="Arial"/>
+              </a:rPr>
+              <a:t>PLAN</a:t>
+            </a:r>
+          </a:p>
+        </p:txBody>
+      </p:sp>
+      <p:sp>
+        <p:nvSpPr>
+          <p:cNvPr id="8" name="logic-node-body-01">
             <a:extLst xmlns:a="http://schemas.openxmlformats.org/drawingml/2006/main">
               <a:ext uri="{FF2B5EF4-FFF2-40B4-BE49-F238E27FC236}">
-                <a16:creationId xmlns:a16="http://schemas.microsoft.com/office/drawing/2014/main" id="{38C60123-87B7-4885-9AE5-59D9A42D8D9C}"/>
+                <a16:creationId xmlns:a16="http://schemas.microsoft.com/office/drawing/2014/main" id="{3D556C88-E764-4D5C-903A-DB84D93D0497}"/>
               </a:ext>
             </a:extLst>
           </p:cNvPr>
@@ -2360,53 +2634,52 @@
         </p:nvSpPr>
         <p:spPr>
           <a:xfrm xmlns:a="http://schemas.openxmlformats.org/drawingml/2006/main">
-            <a:off x="393668" y="2843308"/>
-            <a:ext cx="1612868" cy="262414"/>
-          </a:xfrm>
-          <a:prstGeom xmlns:a="http://schemas.openxmlformats.org/drawingml/2006/main" prst="rect">
-            <a:avLst/>
-          </a:prstGeom>
-        </p:spPr>
-        <p:txBody>
-          <a:bodyPr xmlns:a="http://schemas.openxmlformats.org/drawingml/2006/main" lIns="0" tIns="0" rIns="0" bIns="0">
-            <a:noAutofit/>
-          </a:bodyPr>
+            <a:off x="895350" y="3286125"/>
+            <a:ext cx="1619250" cy="933450"/>
+          </a:xfrm>
+          <a:prstGeom xmlns:a="http://schemas.openxmlformats.org/drawingml/2006/main" prst="rect">
+            <a:avLst/>
+          </a:prstGeom>
+          <a:noFill xmlns:a="http://schemas.openxmlformats.org/drawingml/2006/main"/>
+          <a:ln xmlns:a="http://schemas.openxmlformats.org/drawingml/2006/main" w="0">
+            <a:noFill/>
+            <a:prstDash val="solid"/>
+          </a:ln>
+        </p:spPr>
+        <p:txBody>
+          <a:bodyPr xmlns:a="http://schemas.openxmlformats.org/drawingml/2006/main" anchor="t"/>
           <a:lstStyle xmlns:a="http://schemas.openxmlformats.org/drawingml/2006/main"/>
           <a:p xmlns:a="http://schemas.openxmlformats.org/drawingml/2006/main">
             <a:pPr algn="l">
-              <a:lnSpc>
-                <a:spcPct val="100000"/>
-              </a:lnSpc>
-              <a:buNone/>
-              <a:defRPr sz="1600">
-                <a:solidFill>
-                  <a:srgbClr val="000000"/>
-                </a:solidFill>
-                <a:latin typeface="Helvetica Neue"/>
-                <a:ea typeface="Helvetica Neue"/>
-                <a:cs typeface="Helvetica Neue"/>
-              </a:defRPr>
-            </a:pPr>
-            <a:r>
-              <a:rPr sz="1600" b="1">
-                <a:solidFill>
-                  <a:srgbClr val="3D8DFF"/>
-                </a:solidFill>
-                <a:latin typeface="Arial"/>
-                <a:ea typeface="Arial"/>
-                <a:cs typeface="Arial"/>
-              </a:rPr>
-              <a:t>1 · PLAN</a:t>
-            </a:r>
-          </a:p>
-        </p:txBody>
-      </p:sp>
-      <p:sp>
-        <p:nvSpPr>
-          <p:cNvPr id="8" name="Content-Placeholder-15-9">
+              <a:defRPr sz="1275" b="0">
+                <a:solidFill>
+                  <a:srgbClr val="2B2630"/>
+                </a:solidFill>
+                <a:latin typeface="Arial"/>
+                <a:ea typeface="Arial"/>
+                <a:cs typeface="Arial"/>
+              </a:defRPr>
+            </a:pPr>
+            <a:r>
+              <a:rPr sz="1275" b="0">
+                <a:solidFill>
+                  <a:srgbClr val="2B2630"/>
+                </a:solidFill>
+                <a:latin typeface="Arial"/>
+                <a:ea typeface="Arial"/>
+                <a:cs typeface="Arial"/>
+              </a:rPr>
+              <a:t>Python sorts by priority and fits tasks into available time.</a:t>
+            </a:r>
+          </a:p>
+        </p:txBody>
+      </p:sp>
+      <p:sp>
+        <p:nvSpPr>
+          <p:cNvPr id="9" name="logic-node-02">
             <a:extLst xmlns:a="http://schemas.openxmlformats.org/drawingml/2006/main">
               <a:ext uri="{FF2B5EF4-FFF2-40B4-BE49-F238E27FC236}">
-                <a16:creationId xmlns:a16="http://schemas.microsoft.com/office/drawing/2014/main" id="{4B7667D6-F8C8-4B7C-A195-6BE7ACAB4D7A}"/>
+                <a16:creationId xmlns:a16="http://schemas.microsoft.com/office/drawing/2014/main" id="{EC82AAF9-AAAD-41BC-8BDE-B7635231E381}"/>
               </a:ext>
             </a:extLst>
           </p:cNvPr>
@@ -2417,53 +2690,31 @@
         </p:nvSpPr>
         <p:spPr>
           <a:xfrm xmlns:a="http://schemas.openxmlformats.org/drawingml/2006/main">
-            <a:off x="4294156" y="2843308"/>
-            <a:ext cx="1612868" cy="262414"/>
-          </a:xfrm>
-          <a:prstGeom xmlns:a="http://schemas.openxmlformats.org/drawingml/2006/main" prst="rect">
-            <a:avLst/>
-          </a:prstGeom>
-        </p:spPr>
-        <p:txBody>
-          <a:bodyPr xmlns:a="http://schemas.openxmlformats.org/drawingml/2006/main" lIns="0" tIns="0" rIns="0" bIns="0">
-            <a:noAutofit/>
-          </a:bodyPr>
-          <a:lstStyle xmlns:a="http://schemas.openxmlformats.org/drawingml/2006/main"/>
-          <a:p xmlns:a="http://schemas.openxmlformats.org/drawingml/2006/main">
-            <a:pPr algn="l">
-              <a:lnSpc>
-                <a:spcPct val="100000"/>
-              </a:lnSpc>
-              <a:buNone/>
-              <a:defRPr sz="1600">
-                <a:solidFill>
-                  <a:srgbClr val="000000"/>
-                </a:solidFill>
-                <a:latin typeface="Helvetica Neue"/>
-                <a:ea typeface="Helvetica Neue"/>
-                <a:cs typeface="Helvetica Neue"/>
-              </a:defRPr>
-            </a:pPr>
-            <a:r>
-              <a:rPr sz="1600" b="1">
-                <a:solidFill>
-                  <a:srgbClr val="3D8DFF"/>
-                </a:solidFill>
-                <a:latin typeface="Arial"/>
-                <a:ea typeface="Arial"/>
-                <a:cs typeface="Arial"/>
-              </a:rPr>
-              <a:t>2 · RETRIEVE</a:t>
-            </a:r>
-          </a:p>
-        </p:txBody>
-      </p:sp>
-      <p:sp>
-        <p:nvSpPr>
-          <p:cNvPr id="9" name="Content-Placeholder-15-10">
+            <a:off x="3067050" y="2143125"/>
+            <a:ext cx="2057400" cy="2333625"/>
+          </a:xfrm>
+          <a:prstGeom xmlns:a="http://schemas.openxmlformats.org/drawingml/2006/main" prst="roundRect">
+            <a:avLst>
+              <a:gd name="adj" fmla="val 11111"/>
+            </a:avLst>
+          </a:prstGeom>
+          <a:solidFill xmlns:a="http://schemas.openxmlformats.org/drawingml/2006/main">
+            <a:srgbClr val="EFE5F4"/>
+          </a:solidFill>
+          <a:ln xmlns:a="http://schemas.openxmlformats.org/drawingml/2006/main" w="9525">
+            <a:solidFill>
+              <a:srgbClr val="D7C2E3"/>
+            </a:solidFill>
+            <a:prstDash val="solid"/>
+          </a:ln>
+        </p:spPr>
+      </p:sp>
+      <p:sp>
+        <p:nvSpPr>
+          <p:cNvPr id="10" name="logic-number-02">
             <a:extLst xmlns:a="http://schemas.openxmlformats.org/drawingml/2006/main">
               <a:ext uri="{FF2B5EF4-FFF2-40B4-BE49-F238E27FC236}">
-                <a16:creationId xmlns:a16="http://schemas.microsoft.com/office/drawing/2014/main" id="{40EECAF0-BBE4-4FB1-B5A0-15453843F5FD}"/>
+                <a16:creationId xmlns:a16="http://schemas.microsoft.com/office/drawing/2014/main" id="{AB5786F3-15FE-4833-B065-416CF65ADE1D}"/>
               </a:ext>
             </a:extLst>
           </p:cNvPr>
@@ -2474,53 +2725,52 @@
         </p:nvSpPr>
         <p:spPr>
           <a:xfrm xmlns:a="http://schemas.openxmlformats.org/drawingml/2006/main">
-            <a:off x="8223218" y="2843308"/>
-            <a:ext cx="1612868" cy="262414"/>
-          </a:xfrm>
-          <a:prstGeom xmlns:a="http://schemas.openxmlformats.org/drawingml/2006/main" prst="rect">
-            <a:avLst/>
-          </a:prstGeom>
-        </p:spPr>
-        <p:txBody>
-          <a:bodyPr xmlns:a="http://schemas.openxmlformats.org/drawingml/2006/main" lIns="0" tIns="0" rIns="0" bIns="0">
-            <a:noAutofit/>
-          </a:bodyPr>
+            <a:off x="3295650" y="2362200"/>
+            <a:ext cx="571500" cy="381000"/>
+          </a:xfrm>
+          <a:prstGeom xmlns:a="http://schemas.openxmlformats.org/drawingml/2006/main" prst="rect">
+            <a:avLst/>
+          </a:prstGeom>
+          <a:noFill xmlns:a="http://schemas.openxmlformats.org/drawingml/2006/main"/>
+          <a:ln xmlns:a="http://schemas.openxmlformats.org/drawingml/2006/main" w="0">
+            <a:noFill/>
+            <a:prstDash val="solid"/>
+          </a:ln>
+        </p:spPr>
+        <p:txBody>
+          <a:bodyPr xmlns:a="http://schemas.openxmlformats.org/drawingml/2006/main" anchor="t"/>
           <a:lstStyle xmlns:a="http://schemas.openxmlformats.org/drawingml/2006/main"/>
           <a:p xmlns:a="http://schemas.openxmlformats.org/drawingml/2006/main">
             <a:pPr algn="l">
-              <a:lnSpc>
-                <a:spcPct val="100000"/>
-              </a:lnSpc>
-              <a:buNone/>
-              <a:defRPr sz="1600">
-                <a:solidFill>
-                  <a:srgbClr val="000000"/>
-                </a:solidFill>
-                <a:latin typeface="Helvetica Neue"/>
-                <a:ea typeface="Helvetica Neue"/>
-                <a:cs typeface="Helvetica Neue"/>
-              </a:defRPr>
-            </a:pPr>
-            <a:r>
-              <a:rPr sz="1600" b="1">
-                <a:solidFill>
-                  <a:srgbClr val="3D8DFF"/>
-                </a:solidFill>
-                <a:latin typeface="Arial"/>
-                <a:ea typeface="Arial"/>
-                <a:cs typeface="Arial"/>
-              </a:rPr>
-              <a:t>3 · EXPLAIN</a:t>
-            </a:r>
-          </a:p>
-        </p:txBody>
-      </p:sp>
-      <p:sp>
-        <p:nvSpPr>
-          <p:cNvPr id="10" name="Text-Placeholder-16-11">
+              <a:defRPr sz="1350" b="1">
+                <a:solidFill>
+                  <a:srgbClr val="E98777"/>
+                </a:solidFill>
+                <a:latin typeface="Arial"/>
+                <a:ea typeface="Arial"/>
+                <a:cs typeface="Arial"/>
+              </a:defRPr>
+            </a:pPr>
+            <a:r>
+              <a:rPr sz="1350" b="1">
+                <a:solidFill>
+                  <a:srgbClr val="E98777"/>
+                </a:solidFill>
+                <a:latin typeface="Arial"/>
+                <a:ea typeface="Arial"/>
+                <a:cs typeface="Arial"/>
+              </a:rPr>
+              <a:t>02</a:t>
+            </a:r>
+          </a:p>
+        </p:txBody>
+      </p:sp>
+      <p:sp>
+        <p:nvSpPr>
+          <p:cNvPr id="11" name="logic-node-title-02">
             <a:extLst xmlns:a="http://schemas.openxmlformats.org/drawingml/2006/main">
               <a:ext uri="{FF2B5EF4-FFF2-40B4-BE49-F238E27FC236}">
-                <a16:creationId xmlns:a16="http://schemas.microsoft.com/office/drawing/2014/main" id="{E40A8E4F-136F-4445-948B-110531E72969}"/>
+                <a16:creationId xmlns:a16="http://schemas.microsoft.com/office/drawing/2014/main" id="{BC9E7851-D496-4753-B050-A407048538B1}"/>
               </a:ext>
             </a:extLst>
           </p:cNvPr>
@@ -2531,80 +2781,52 @@
         </p:nvSpPr>
         <p:spPr>
           <a:xfrm xmlns:a="http://schemas.openxmlformats.org/drawingml/2006/main">
-            <a:off x="4317111" y="3822668"/>
-            <a:ext cx="3156109" cy="1586294"/>
-          </a:xfrm>
-          <a:prstGeom xmlns:a="http://schemas.openxmlformats.org/drawingml/2006/main" prst="rect">
-            <a:avLst/>
-          </a:prstGeom>
-        </p:spPr>
-        <p:txBody>
-          <a:bodyPr xmlns:a="http://schemas.openxmlformats.org/drawingml/2006/main" lIns="0" tIns="0" rIns="0" bIns="0">
-            <a:noAutofit/>
-          </a:bodyPr>
+            <a:off x="3295650" y="2781300"/>
+            <a:ext cx="1619250" cy="400050"/>
+          </a:xfrm>
+          <a:prstGeom xmlns:a="http://schemas.openxmlformats.org/drawingml/2006/main" prst="rect">
+            <a:avLst/>
+          </a:prstGeom>
+          <a:noFill xmlns:a="http://schemas.openxmlformats.org/drawingml/2006/main"/>
+          <a:ln xmlns:a="http://schemas.openxmlformats.org/drawingml/2006/main" w="0">
+            <a:noFill/>
+            <a:prstDash val="solid"/>
+          </a:ln>
+        </p:spPr>
+        <p:txBody>
+          <a:bodyPr xmlns:a="http://schemas.openxmlformats.org/drawingml/2006/main" anchor="t"/>
           <a:lstStyle xmlns:a="http://schemas.openxmlformats.org/drawingml/2006/main"/>
           <a:p xmlns:a="http://schemas.openxmlformats.org/drawingml/2006/main">
             <a:pPr algn="l">
-              <a:lnSpc>
-                <a:spcPct val="100000"/>
-              </a:lnSpc>
-              <a:buNone/>
-              <a:defRPr sz="2400">
-                <a:solidFill>
-                  <a:srgbClr val="000000"/>
-                </a:solidFill>
-                <a:latin typeface="Helvetica Neue"/>
-                <a:ea typeface="Helvetica Neue"/>
-                <a:cs typeface="Helvetica Neue"/>
-              </a:defRPr>
-            </a:pPr>
-            <a:r>
-              <a:rPr sz="1950" b="1">
-                <a:solidFill>
-                  <a:srgbClr val="000000"/>
-                </a:solidFill>
-                <a:latin typeface="Arial"/>
-                <a:ea typeface="Arial"/>
-                <a:cs typeface="Arial"/>
-              </a:rPr>
-              <a:t>Local care guide</a:t>
-            </a:r>
-          </a:p>
-          <a:p xmlns:a="http://schemas.openxmlformats.org/drawingml/2006/main">
-            <a:pPr algn="l">
-              <a:lnSpc>
-                <a:spcPct val="100000"/>
-              </a:lnSpc>
-              <a:buNone/>
-              <a:defRPr sz="2400">
-                <a:solidFill>
-                  <a:srgbClr val="000000"/>
-                </a:solidFill>
-                <a:latin typeface="Helvetica Neue"/>
-                <a:ea typeface="Helvetica Neue"/>
-                <a:cs typeface="Helvetica Neue"/>
-              </a:defRPr>
-            </a:pPr>
-            <a:r>
-              <a:rPr sz="1600" b="0">
-                <a:solidFill>
-                  <a:srgbClr val="000000"/>
-                </a:solidFill>
-                <a:latin typeface="Arial"/>
-                <a:ea typeface="Arial"/>
-                <a:cs typeface="Arial"/>
-              </a:rPr>
-              <a:t>Filters by species, ranks matches, and scores retrieval confidence.</a:t>
-            </a:r>
-          </a:p>
-        </p:txBody>
-      </p:sp>
-      <p:sp>
-        <p:nvSpPr>
-          <p:cNvPr id="11" name="Text-Placeholder-16-12">
+              <a:defRPr sz="1800" b="1">
+                <a:solidFill>
+                  <a:srgbClr val="3B234D"/>
+                </a:solidFill>
+                <a:latin typeface="Arial"/>
+                <a:ea typeface="Arial"/>
+                <a:cs typeface="Arial"/>
+              </a:defRPr>
+            </a:pPr>
+            <a:r>
+              <a:rPr sz="1800" b="1">
+                <a:solidFill>
+                  <a:srgbClr val="3B234D"/>
+                </a:solidFill>
+                <a:latin typeface="Arial"/>
+                <a:ea typeface="Arial"/>
+                <a:cs typeface="Arial"/>
+              </a:rPr>
+              <a:t>RETRIEVE</a:t>
+            </a:r>
+          </a:p>
+        </p:txBody>
+      </p:sp>
+      <p:sp>
+        <p:nvSpPr>
+          <p:cNvPr id="12" name="logic-node-body-02">
             <a:extLst xmlns:a="http://schemas.openxmlformats.org/drawingml/2006/main">
               <a:ext uri="{FF2B5EF4-FFF2-40B4-BE49-F238E27FC236}">
-                <a16:creationId xmlns:a16="http://schemas.microsoft.com/office/drawing/2014/main" id="{366FB1A6-8801-4BB0-8ADF-B017D5AC0CCD}"/>
+                <a16:creationId xmlns:a16="http://schemas.microsoft.com/office/drawing/2014/main" id="{ABF7C3D2-EA41-459B-A025-D9E72DEC719D}"/>
               </a:ext>
             </a:extLst>
           </p:cNvPr>
@@ -2615,80 +2837,52 @@
         </p:nvSpPr>
         <p:spPr>
           <a:xfrm xmlns:a="http://schemas.openxmlformats.org/drawingml/2006/main">
-            <a:off x="399859" y="3822668"/>
-            <a:ext cx="3156109" cy="1586294"/>
-          </a:xfrm>
-          <a:prstGeom xmlns:a="http://schemas.openxmlformats.org/drawingml/2006/main" prst="rect">
-            <a:avLst/>
-          </a:prstGeom>
-        </p:spPr>
-        <p:txBody>
-          <a:bodyPr xmlns:a="http://schemas.openxmlformats.org/drawingml/2006/main" lIns="0" tIns="0" rIns="0" bIns="0">
-            <a:noAutofit/>
-          </a:bodyPr>
+            <a:off x="3295650" y="3286125"/>
+            <a:ext cx="1619250" cy="933450"/>
+          </a:xfrm>
+          <a:prstGeom xmlns:a="http://schemas.openxmlformats.org/drawingml/2006/main" prst="rect">
+            <a:avLst/>
+          </a:prstGeom>
+          <a:noFill xmlns:a="http://schemas.openxmlformats.org/drawingml/2006/main"/>
+          <a:ln xmlns:a="http://schemas.openxmlformats.org/drawingml/2006/main" w="0">
+            <a:noFill/>
+            <a:prstDash val="solid"/>
+          </a:ln>
+        </p:spPr>
+        <p:txBody>
+          <a:bodyPr xmlns:a="http://schemas.openxmlformats.org/drawingml/2006/main" anchor="t"/>
           <a:lstStyle xmlns:a="http://schemas.openxmlformats.org/drawingml/2006/main"/>
           <a:p xmlns:a="http://schemas.openxmlformats.org/drawingml/2006/main">
             <a:pPr algn="l">
-              <a:lnSpc>
-                <a:spcPct val="100000"/>
-              </a:lnSpc>
-              <a:buNone/>
-              <a:defRPr sz="2400">
-                <a:solidFill>
-                  <a:srgbClr val="000000"/>
-                </a:solidFill>
-                <a:latin typeface="Helvetica Neue"/>
-                <a:ea typeface="Helvetica Neue"/>
-                <a:cs typeface="Helvetica Neue"/>
-              </a:defRPr>
-            </a:pPr>
-            <a:r>
-              <a:rPr sz="1950" b="1">
-                <a:solidFill>
-                  <a:srgbClr val="000000"/>
-                </a:solidFill>
-                <a:latin typeface="Arial"/>
-                <a:ea typeface="Arial"/>
-                <a:cs typeface="Arial"/>
-              </a:rPr>
-              <a:t>Python scheduler</a:t>
-            </a:r>
-          </a:p>
-          <a:p xmlns:a="http://schemas.openxmlformats.org/drawingml/2006/main">
-            <a:pPr algn="l">
-              <a:lnSpc>
-                <a:spcPct val="100000"/>
-              </a:lnSpc>
-              <a:buNone/>
-              <a:defRPr sz="2400">
-                <a:solidFill>
-                  <a:srgbClr val="000000"/>
-                </a:solidFill>
-                <a:latin typeface="Helvetica Neue"/>
-                <a:ea typeface="Helvetica Neue"/>
-                <a:cs typeface="Helvetica Neue"/>
-              </a:defRPr>
-            </a:pPr>
-            <a:r>
-              <a:rPr sz="1600" b="0">
-                <a:solidFill>
-                  <a:srgbClr val="000000"/>
-                </a:solidFill>
-                <a:latin typeface="Arial"/>
-                <a:ea typeface="Arial"/>
-                <a:cs typeface="Arial"/>
-              </a:rPr>
-              <a:t>Sorts by priority and fits tasks into available time.</a:t>
-            </a:r>
-          </a:p>
-        </p:txBody>
-      </p:sp>
-      <p:sp>
-        <p:nvSpPr>
-          <p:cNvPr id="12" name="Text-Placeholder-16-13">
+              <a:defRPr sz="1275" b="0">
+                <a:solidFill>
+                  <a:srgbClr val="2B2630"/>
+                </a:solidFill>
+                <a:latin typeface="Arial"/>
+                <a:ea typeface="Arial"/>
+                <a:cs typeface="Arial"/>
+              </a:defRPr>
+            </a:pPr>
+            <a:r>
+              <a:rPr sz="1275" b="0">
+                <a:solidFill>
+                  <a:srgbClr val="2B2630"/>
+                </a:solidFill>
+                <a:latin typeface="Arial"/>
+                <a:ea typeface="Arial"/>
+                <a:cs typeface="Arial"/>
+              </a:rPr>
+              <a:t>Local passages are filtered by species and ranked by relevance.</a:t>
+            </a:r>
+          </a:p>
+        </p:txBody>
+      </p:sp>
+      <p:sp>
+        <p:nvSpPr>
+          <p:cNvPr id="13" name="logic-node-03">
             <a:extLst xmlns:a="http://schemas.openxmlformats.org/drawingml/2006/main">
               <a:ext uri="{FF2B5EF4-FFF2-40B4-BE49-F238E27FC236}">
-                <a16:creationId xmlns:a16="http://schemas.microsoft.com/office/drawing/2014/main" id="{62FFC858-B535-4C54-BB0D-DA00DB88BABB}"/>
+                <a16:creationId xmlns:a16="http://schemas.microsoft.com/office/drawing/2014/main" id="{5053E106-DA2B-4432-AD58-861C77018B50}"/>
               </a:ext>
             </a:extLst>
           </p:cNvPr>
@@ -2699,70 +2893,384 @@
         </p:nvSpPr>
         <p:spPr>
           <a:xfrm xmlns:a="http://schemas.openxmlformats.org/drawingml/2006/main">
-            <a:off x="8177879" y="3822668"/>
-            <a:ext cx="3156109" cy="1586294"/>
-          </a:xfrm>
-          <a:prstGeom xmlns:a="http://schemas.openxmlformats.org/drawingml/2006/main" prst="rect">
-            <a:avLst/>
-          </a:prstGeom>
-        </p:spPr>
-        <p:txBody>
-          <a:bodyPr xmlns:a="http://schemas.openxmlformats.org/drawingml/2006/main" lIns="0" tIns="0" rIns="0" bIns="0">
-            <a:noAutofit/>
-          </a:bodyPr>
+            <a:off x="5467350" y="2143125"/>
+            <a:ext cx="2057400" cy="2333625"/>
+          </a:xfrm>
+          <a:prstGeom xmlns:a="http://schemas.openxmlformats.org/drawingml/2006/main" prst="roundRect">
+            <a:avLst>
+              <a:gd name="adj" fmla="val 11111"/>
+            </a:avLst>
+          </a:prstGeom>
+          <a:solidFill xmlns:a="http://schemas.openxmlformats.org/drawingml/2006/main">
+            <a:srgbClr val="EFE5F4"/>
+          </a:solidFill>
+          <a:ln xmlns:a="http://schemas.openxmlformats.org/drawingml/2006/main" w="9525">
+            <a:solidFill>
+              <a:srgbClr val="D7C2E3"/>
+            </a:solidFill>
+            <a:prstDash val="solid"/>
+          </a:ln>
+        </p:spPr>
+      </p:sp>
+      <p:sp>
+        <p:nvSpPr>
+          <p:cNvPr id="14" name="logic-number-03">
+            <a:extLst xmlns:a="http://schemas.openxmlformats.org/drawingml/2006/main">
+              <a:ext uri="{FF2B5EF4-FFF2-40B4-BE49-F238E27FC236}">
+                <a16:creationId xmlns:a16="http://schemas.microsoft.com/office/drawing/2014/main" id="{B63824E3-117B-4777-8216-5CBBB2ED8749}"/>
+              </a:ext>
+            </a:extLst>
+          </p:cNvPr>
+          <p:cNvSpPr>
+            <a:spLocks xmlns:a="http://schemas.openxmlformats.org/drawingml/2006/main" noGrp="1"/>
+          </p:cNvSpPr>
+          <p:nvPr/>
+        </p:nvSpPr>
+        <p:spPr>
+          <a:xfrm xmlns:a="http://schemas.openxmlformats.org/drawingml/2006/main">
+            <a:off x="5695950" y="2362200"/>
+            <a:ext cx="571500" cy="381000"/>
+          </a:xfrm>
+          <a:prstGeom xmlns:a="http://schemas.openxmlformats.org/drawingml/2006/main" prst="rect">
+            <a:avLst/>
+          </a:prstGeom>
+          <a:noFill xmlns:a="http://schemas.openxmlformats.org/drawingml/2006/main"/>
+          <a:ln xmlns:a="http://schemas.openxmlformats.org/drawingml/2006/main" w="0">
+            <a:noFill/>
+            <a:prstDash val="solid"/>
+          </a:ln>
+        </p:spPr>
+        <p:txBody>
+          <a:bodyPr xmlns:a="http://schemas.openxmlformats.org/drawingml/2006/main" anchor="t"/>
           <a:lstStyle xmlns:a="http://schemas.openxmlformats.org/drawingml/2006/main"/>
           <a:p xmlns:a="http://schemas.openxmlformats.org/drawingml/2006/main">
             <a:pPr algn="l">
-              <a:lnSpc>
-                <a:spcPct val="100000"/>
-              </a:lnSpc>
-              <a:buNone/>
-              <a:defRPr sz="2400">
-                <a:solidFill>
-                  <a:srgbClr val="000000"/>
-                </a:solidFill>
-                <a:latin typeface="Helvetica Neue"/>
-                <a:ea typeface="Helvetica Neue"/>
-                <a:cs typeface="Helvetica Neue"/>
-              </a:defRPr>
-            </a:pPr>
-            <a:r>
-              <a:rPr sz="1950" b="1">
-                <a:solidFill>
-                  <a:srgbClr val="000000"/>
-                </a:solidFill>
-                <a:latin typeface="Arial"/>
-                <a:ea typeface="Arial"/>
-                <a:cs typeface="Arial"/>
-              </a:rPr>
-              <a:t>Claude Haiku 4.5</a:t>
-            </a:r>
-          </a:p>
+              <a:defRPr sz="1350" b="1">
+                <a:solidFill>
+                  <a:srgbClr val="E98777"/>
+                </a:solidFill>
+                <a:latin typeface="Arial"/>
+                <a:ea typeface="Arial"/>
+                <a:cs typeface="Arial"/>
+              </a:defRPr>
+            </a:pPr>
+            <a:r>
+              <a:rPr sz="1350" b="1">
+                <a:solidFill>
+                  <a:srgbClr val="E98777"/>
+                </a:solidFill>
+                <a:latin typeface="Arial"/>
+                <a:ea typeface="Arial"/>
+                <a:cs typeface="Arial"/>
+              </a:rPr>
+              <a:t>03</a:t>
+            </a:r>
+          </a:p>
+        </p:txBody>
+      </p:sp>
+      <p:sp>
+        <p:nvSpPr>
+          <p:cNvPr id="15" name="logic-node-title-03">
+            <a:extLst xmlns:a="http://schemas.openxmlformats.org/drawingml/2006/main">
+              <a:ext uri="{FF2B5EF4-FFF2-40B4-BE49-F238E27FC236}">
+                <a16:creationId xmlns:a16="http://schemas.microsoft.com/office/drawing/2014/main" id="{83C38CA8-30AB-4187-8122-E6CA0451D5BB}"/>
+              </a:ext>
+            </a:extLst>
+          </p:cNvPr>
+          <p:cNvSpPr>
+            <a:spLocks xmlns:a="http://schemas.openxmlformats.org/drawingml/2006/main" noGrp="1"/>
+          </p:cNvSpPr>
+          <p:nvPr/>
+        </p:nvSpPr>
+        <p:spPr>
+          <a:xfrm xmlns:a="http://schemas.openxmlformats.org/drawingml/2006/main">
+            <a:off x="5695950" y="2781300"/>
+            <a:ext cx="1619250" cy="400050"/>
+          </a:xfrm>
+          <a:prstGeom xmlns:a="http://schemas.openxmlformats.org/drawingml/2006/main" prst="rect">
+            <a:avLst/>
+          </a:prstGeom>
+          <a:noFill xmlns:a="http://schemas.openxmlformats.org/drawingml/2006/main"/>
+          <a:ln xmlns:a="http://schemas.openxmlformats.org/drawingml/2006/main" w="0">
+            <a:noFill/>
+            <a:prstDash val="solid"/>
+          </a:ln>
+        </p:spPr>
+        <p:txBody>
+          <a:bodyPr xmlns:a="http://schemas.openxmlformats.org/drawingml/2006/main" anchor="t"/>
+          <a:lstStyle xmlns:a="http://schemas.openxmlformats.org/drawingml/2006/main"/>
           <a:p xmlns:a="http://schemas.openxmlformats.org/drawingml/2006/main">
             <a:pPr algn="l">
-              <a:lnSpc>
-                <a:spcPct val="100000"/>
-              </a:lnSpc>
-              <a:buNone/>
-              <a:defRPr sz="2400">
-                <a:solidFill>
-                  <a:srgbClr val="000000"/>
-                </a:solidFill>
-                <a:latin typeface="Helvetica Neue"/>
-                <a:ea typeface="Helvetica Neue"/>
-                <a:cs typeface="Helvetica Neue"/>
-              </a:defRPr>
-            </a:pPr>
-            <a:r>
-              <a:rPr sz="1600" b="0">
-                <a:solidFill>
-                  <a:srgbClr val="000000"/>
-                </a:solidFill>
-                <a:latin typeface="Arial"/>
-                <a:ea typeface="Arial"/>
-                <a:cs typeface="Arial"/>
-              </a:rPr>
-              <a:t>Uses the plan and sources to answer with citations.</a:t>
+              <a:defRPr sz="1800" b="1">
+                <a:solidFill>
+                  <a:srgbClr val="3B234D"/>
+                </a:solidFill>
+                <a:latin typeface="Arial"/>
+                <a:ea typeface="Arial"/>
+                <a:cs typeface="Arial"/>
+              </a:defRPr>
+            </a:pPr>
+            <a:r>
+              <a:rPr sz="1800" b="1">
+                <a:solidFill>
+                  <a:srgbClr val="3B234D"/>
+                </a:solidFill>
+                <a:latin typeface="Arial"/>
+                <a:ea typeface="Arial"/>
+                <a:cs typeface="Arial"/>
+              </a:rPr>
+              <a:t>EXPLAIN</a:t>
+            </a:r>
+          </a:p>
+        </p:txBody>
+      </p:sp>
+      <p:sp>
+        <p:nvSpPr>
+          <p:cNvPr id="16" name="logic-node-body-03">
+            <a:extLst xmlns:a="http://schemas.openxmlformats.org/drawingml/2006/main">
+              <a:ext uri="{FF2B5EF4-FFF2-40B4-BE49-F238E27FC236}">
+                <a16:creationId xmlns:a16="http://schemas.microsoft.com/office/drawing/2014/main" id="{09BDEBBE-E817-4E31-9859-48D7DE15502C}"/>
+              </a:ext>
+            </a:extLst>
+          </p:cNvPr>
+          <p:cNvSpPr>
+            <a:spLocks xmlns:a="http://schemas.openxmlformats.org/drawingml/2006/main" noGrp="1"/>
+          </p:cNvSpPr>
+          <p:nvPr/>
+        </p:nvSpPr>
+        <p:spPr>
+          <a:xfrm xmlns:a="http://schemas.openxmlformats.org/drawingml/2006/main">
+            <a:off x="5695950" y="3286125"/>
+            <a:ext cx="1619250" cy="933450"/>
+          </a:xfrm>
+          <a:prstGeom xmlns:a="http://schemas.openxmlformats.org/drawingml/2006/main" prst="rect">
+            <a:avLst/>
+          </a:prstGeom>
+          <a:noFill xmlns:a="http://schemas.openxmlformats.org/drawingml/2006/main"/>
+          <a:ln xmlns:a="http://schemas.openxmlformats.org/drawingml/2006/main" w="0">
+            <a:noFill/>
+            <a:prstDash val="solid"/>
+          </a:ln>
+        </p:spPr>
+        <p:txBody>
+          <a:bodyPr xmlns:a="http://schemas.openxmlformats.org/drawingml/2006/main" anchor="t"/>
+          <a:lstStyle xmlns:a="http://schemas.openxmlformats.org/drawingml/2006/main"/>
+          <a:p xmlns:a="http://schemas.openxmlformats.org/drawingml/2006/main">
+            <a:pPr algn="l">
+              <a:defRPr sz="1275" b="0">
+                <a:solidFill>
+                  <a:srgbClr val="2B2630"/>
+                </a:solidFill>
+                <a:latin typeface="Arial"/>
+                <a:ea typeface="Arial"/>
+                <a:cs typeface="Arial"/>
+              </a:defRPr>
+            </a:pPr>
+            <a:r>
+              <a:rPr sz="1275" b="0">
+                <a:solidFill>
+                  <a:srgbClr val="2B2630"/>
+                </a:solidFill>
+                <a:latin typeface="Arial"/>
+                <a:ea typeface="Arial"/>
+                <a:cs typeface="Arial"/>
+              </a:rPr>
+              <a:t>Claude receives the plan, question, and sources, then cites them.</a:t>
+            </a:r>
+          </a:p>
+        </p:txBody>
+      </p:sp>
+      <p:sp>
+        <p:nvSpPr>
+          <p:cNvPr id="17" name="logic-safety">
+            <a:extLst xmlns:a="http://schemas.openxmlformats.org/drawingml/2006/main">
+              <a:ext uri="{FF2B5EF4-FFF2-40B4-BE49-F238E27FC236}">
+                <a16:creationId xmlns:a16="http://schemas.microsoft.com/office/drawing/2014/main" id="{846E3902-2922-4B57-9F4D-399BDB05F7BF}"/>
+              </a:ext>
+            </a:extLst>
+          </p:cNvPr>
+          <p:cNvSpPr>
+            <a:spLocks xmlns:a="http://schemas.openxmlformats.org/drawingml/2006/main" noGrp="1"/>
+          </p:cNvSpPr>
+          <p:nvPr/>
+        </p:nvSpPr>
+        <p:spPr>
+          <a:xfrm xmlns:a="http://schemas.openxmlformats.org/drawingml/2006/main">
+            <a:off x="800100" y="4953000"/>
+            <a:ext cx="6667500" cy="781050"/>
+          </a:xfrm>
+          <a:prstGeom xmlns:a="http://schemas.openxmlformats.org/drawingml/2006/main" prst="rect">
+            <a:avLst/>
+          </a:prstGeom>
+          <a:noFill xmlns:a="http://schemas.openxmlformats.org/drawingml/2006/main"/>
+          <a:ln xmlns:a="http://schemas.openxmlformats.org/drawingml/2006/main" w="0">
+            <a:noFill/>
+            <a:prstDash val="solid"/>
+          </a:ln>
+        </p:spPr>
+        <p:txBody>
+          <a:bodyPr xmlns:a="http://schemas.openxmlformats.org/drawingml/2006/main" anchor="t"/>
+          <a:lstStyle xmlns:a="http://schemas.openxmlformats.org/drawingml/2006/main"/>
+          <a:p xmlns:a="http://schemas.openxmlformats.org/drawingml/2006/main">
+            <a:pPr algn="l">
+              <a:defRPr sz="1575" b="1">
+                <a:solidFill>
+                  <a:srgbClr val="DDF3E7"/>
+                </a:solidFill>
+                <a:latin typeface="Arial"/>
+                <a:ea typeface="Arial"/>
+                <a:cs typeface="Arial"/>
+              </a:defRPr>
+            </a:pPr>
+            <a:r>
+              <a:rPr sz="1575" b="1">
+                <a:solidFill>
+                  <a:srgbClr val="DDF3E7"/>
+                </a:solidFill>
+                <a:latin typeface="Arial"/>
+                <a:ea typeface="Arial"/>
+                <a:cs typeface="Arial"/>
+              </a:rPr>
+              <a:t>Emergency language is checked first. If triggered, PawPal skips Claude and recommends veterinary help.</a:t>
+            </a:r>
+          </a:p>
+        </p:txBody>
+      </p:sp>
+      <p:pic>
+        <p:nvPicPr>
+          <p:cNvPr id="38" name=""/>
+          <p:cNvPicPr>
+            <a:picLocks xmlns:a="http://schemas.openxmlformats.org/drawingml/2006/main" noChangeAspect="1"/>
+          </p:cNvPicPr>
+          <p:nvPr/>
+        </p:nvPicPr>
+        <p:blipFill>
+          <a:blip xmlns:r="http://schemas.openxmlformats.org/officeDocument/2006/relationships" xmlns:a="http://schemas.openxmlformats.org/drawingml/2006/main" r:embed="R3e0acc5e40e045fc"/>
+          <a:srcRect xmlns:a="http://schemas.openxmlformats.org/drawingml/2006/main" l="73" t="0" r="73" b="0"/>
+          <a:stretch xmlns:a="http://schemas.openxmlformats.org/drawingml/2006/main">
+            <a:fillRect l="0" t="0" r="0" b="0"/>
+          </a:stretch>
+        </p:blipFill>
+        <p:spPr>
+          <a:xfrm xmlns:a="http://schemas.openxmlformats.org/drawingml/2006/main">
+            <a:off x="7810500" y="876300"/>
+            <a:ext cx="3771900" cy="4953000"/>
+          </a:xfrm>
+          <a:prstGeom xmlns:a="http://schemas.openxmlformats.org/drawingml/2006/main" prst="roundRect">
+            <a:avLst>
+              <a:gd name="adj" fmla="val 5556"/>
+            </a:avLst>
+          </a:prstGeom>
+        </p:spPr>
+      </p:pic>
+      <p:sp>
+        <p:nvSpPr>
+          <p:cNvPr id="19" name="footer-brand-3">
+            <a:extLst xmlns:a="http://schemas.openxmlformats.org/drawingml/2006/main">
+              <a:ext uri="{FF2B5EF4-FFF2-40B4-BE49-F238E27FC236}">
+                <a16:creationId xmlns:a16="http://schemas.microsoft.com/office/drawing/2014/main" id="{5483E211-C961-4D1E-B808-A9349491CF34}"/>
+              </a:ext>
+            </a:extLst>
+          </p:cNvPr>
+          <p:cNvSpPr>
+            <a:spLocks xmlns:a="http://schemas.openxmlformats.org/drawingml/2006/main" noGrp="1"/>
+          </p:cNvSpPr>
+          <p:nvPr/>
+        </p:nvSpPr>
+        <p:spPr>
+          <a:xfrm xmlns:a="http://schemas.openxmlformats.org/drawingml/2006/main">
+            <a:off x="609600" y="6362700"/>
+            <a:ext cx="1524000" cy="266700"/>
+          </a:xfrm>
+          <a:prstGeom xmlns:a="http://schemas.openxmlformats.org/drawingml/2006/main" prst="rect">
+            <a:avLst/>
+          </a:prstGeom>
+          <a:noFill xmlns:a="http://schemas.openxmlformats.org/drawingml/2006/main"/>
+          <a:ln xmlns:a="http://schemas.openxmlformats.org/drawingml/2006/main" w="0">
+            <a:noFill/>
+            <a:prstDash val="solid"/>
+          </a:ln>
+        </p:spPr>
+        <p:txBody>
+          <a:bodyPr xmlns:a="http://schemas.openxmlformats.org/drawingml/2006/main" anchor="t"/>
+          <a:lstStyle xmlns:a="http://schemas.openxmlformats.org/drawingml/2006/main"/>
+          <a:p xmlns:a="http://schemas.openxmlformats.org/drawingml/2006/main">
+            <a:pPr algn="l">
+              <a:defRPr sz="975" b="1">
+                <a:solidFill>
+                  <a:srgbClr val="D7C2E3"/>
+                </a:solidFill>
+                <a:latin typeface="Arial"/>
+                <a:ea typeface="Arial"/>
+                <a:cs typeface="Arial"/>
+              </a:defRPr>
+            </a:pPr>
+            <a:r>
+              <a:rPr sz="975" b="1">
+                <a:solidFill>
+                  <a:srgbClr val="D7C2E3"/>
+                </a:solidFill>
+                <a:latin typeface="Arial"/>
+                <a:ea typeface="Arial"/>
+                <a:cs typeface="Arial"/>
+              </a:rPr>
+              <a:t>PAWPAL+</a:t>
+            </a:r>
+          </a:p>
+        </p:txBody>
+      </p:sp>
+      <p:sp>
+        <p:nvSpPr>
+          <p:cNvPr id="20" name="footer-number-3">
+            <a:extLst xmlns:a="http://schemas.openxmlformats.org/drawingml/2006/main">
+              <a:ext uri="{FF2B5EF4-FFF2-40B4-BE49-F238E27FC236}">
+                <a16:creationId xmlns:a16="http://schemas.microsoft.com/office/drawing/2014/main" id="{2A788599-CB6A-4716-AF82-6B1EE98B7C2C}"/>
+              </a:ext>
+            </a:extLst>
+          </p:cNvPr>
+          <p:cNvSpPr>
+            <a:spLocks xmlns:a="http://schemas.openxmlformats.org/drawingml/2006/main" noGrp="1"/>
+          </p:cNvSpPr>
+          <p:nvPr/>
+        </p:nvSpPr>
+        <p:spPr>
+          <a:xfrm xmlns:a="http://schemas.openxmlformats.org/drawingml/2006/main">
+            <a:off x="11334750" y="6362700"/>
+            <a:ext cx="266700" cy="228600"/>
+          </a:xfrm>
+          <a:prstGeom xmlns:a="http://schemas.openxmlformats.org/drawingml/2006/main" prst="rect">
+            <a:avLst/>
+          </a:prstGeom>
+          <a:noFill xmlns:a="http://schemas.openxmlformats.org/drawingml/2006/main"/>
+          <a:ln xmlns:a="http://schemas.openxmlformats.org/drawingml/2006/main" w="0">
+            <a:noFill/>
+            <a:prstDash val="solid"/>
+          </a:ln>
+        </p:spPr>
+        <p:txBody>
+          <a:bodyPr xmlns:a="http://schemas.openxmlformats.org/drawingml/2006/main" anchor="t"/>
+          <a:lstStyle xmlns:a="http://schemas.openxmlformats.org/drawingml/2006/main"/>
+          <a:p xmlns:a="http://schemas.openxmlformats.org/drawingml/2006/main">
+            <a:pPr algn="r">
+              <a:defRPr sz="975" b="1">
+                <a:solidFill>
+                  <a:srgbClr val="D7C2E3"/>
+                </a:solidFill>
+                <a:latin typeface="Arial"/>
+                <a:ea typeface="Arial"/>
+                <a:cs typeface="Arial"/>
+              </a:defRPr>
+            </a:pPr>
+            <a:r>
+              <a:rPr sz="975" b="1">
+                <a:solidFill>
+                  <a:srgbClr val="D7C2E3"/>
+                </a:solidFill>
+                <a:latin typeface="Arial"/>
+                <a:ea typeface="Arial"/>
+                <a:cs typeface="Arial"/>
+              </a:rPr>
+              <a:t>3</a:t>
             </a:r>
           </a:p>
         </p:txBody>
@@ -2770,7 +3278,7 @@
     </p:spTree>
     <p:extLst>
       <p:ext uri="{BB962C8B-B14F-4D97-AF65-F5344CB8AC3E}">
-        <p14:creationId xmlns:p14="http://schemas.microsoft.com/office/powerpoint/2010/main" val="1751362522"/>
+        <p14:creationId xmlns:p14="http://schemas.microsoft.com/office/powerpoint/2010/main" val="1732547829"/>
       </p:ext>
     </p:extLst>
   </p:cSld>
@@ -2780,6 +3288,13 @@
 <file path=ppt/slides/slide4.xml><?xml version="1.0" encoding="utf-8"?>
 <p:sld xmlns:p="http://schemas.openxmlformats.org/presentationml/2006/main">
   <p:cSld>
+    <p:bg>
+      <p:bgPr>
+        <a:solidFill xmlns:a="http://schemas.openxmlformats.org/drawingml/2006/main">
+          <a:srgbClr val="DDF3E7"/>
+        </a:solidFill>
+      </p:bgPr>
+    </p:bg>
     <p:spTree>
       <p:nvGrpSpPr>
         <p:cNvPr id="1" name=""/>
@@ -2791,10 +3306,10 @@
       </p:grpSpPr>
       <p:sp>
         <p:nvSpPr>
-          <p:cNvPr id="13" name="Rounded-Rectangle-5-1">
+          <p:cNvPr id="14" name="reliability-kicker">
             <a:extLst xmlns:a="http://schemas.openxmlformats.org/drawingml/2006/main">
               <a:ext uri="{FF2B5EF4-FFF2-40B4-BE49-F238E27FC236}">
-                <a16:creationId xmlns:a16="http://schemas.microsoft.com/office/drawing/2014/main" id="{AE0F553A-A5F6-4798-961B-D10DF1561764}"/>
+                <a16:creationId xmlns:a16="http://schemas.microsoft.com/office/drawing/2014/main" id="{B86896DB-819D-49D0-ABFF-B3632F2E62B9}"/>
               </a:ext>
             </a:extLst>
           </p:cNvPr>
@@ -2805,25 +3320,52 @@
         </p:nvSpPr>
         <p:spPr>
           <a:xfrm xmlns:a="http://schemas.openxmlformats.org/drawingml/2006/main">
-            <a:off x="393668" y="3022568"/>
-            <a:ext cx="3568732" cy="2971800"/>
-          </a:xfrm>
-          <a:prstGeom xmlns:a="http://schemas.openxmlformats.org/drawingml/2006/main" prst="roundRect">
-            <a:avLst>
-              <a:gd name="adj" fmla="val 2564"/>
-            </a:avLst>
-          </a:prstGeom>
-          <a:solidFill xmlns:a="http://schemas.openxmlformats.org/drawingml/2006/main">
-            <a:srgbClr val="F2F2F2"/>
-          </a:solidFill>
-        </p:spPr>
-      </p:sp>
-      <p:sp>
-        <p:nvSpPr>
-          <p:cNvPr id="2" name="Rounded-Rectangle-6-2">
+            <a:off x="628650" y="495300"/>
+            <a:ext cx="2857500" cy="323850"/>
+          </a:xfrm>
+          <a:prstGeom xmlns:a="http://schemas.openxmlformats.org/drawingml/2006/main" prst="rect">
+            <a:avLst/>
+          </a:prstGeom>
+          <a:noFill xmlns:a="http://schemas.openxmlformats.org/drawingml/2006/main"/>
+          <a:ln xmlns:a="http://schemas.openxmlformats.org/drawingml/2006/main" w="0">
+            <a:noFill/>
+            <a:prstDash val="solid"/>
+          </a:ln>
+        </p:spPr>
+        <p:txBody>
+          <a:bodyPr xmlns:a="http://schemas.openxmlformats.org/drawingml/2006/main" anchor="t"/>
+          <a:lstStyle xmlns:a="http://schemas.openxmlformats.org/drawingml/2006/main"/>
+          <a:p xmlns:a="http://schemas.openxmlformats.org/drawingml/2006/main">
+            <a:pPr algn="l">
+              <a:defRPr sz="1275" b="1">
+                <a:solidFill>
+                  <a:srgbClr val="2F6B57"/>
+                </a:solidFill>
+                <a:latin typeface="Arial"/>
+                <a:ea typeface="Arial"/>
+                <a:cs typeface="Arial"/>
+              </a:defRPr>
+            </a:pPr>
+            <a:r>
+              <a:rPr sz="1275" b="1">
+                <a:solidFill>
+                  <a:srgbClr val="2F6B57"/>
+                </a:solidFill>
+                <a:latin typeface="Arial"/>
+                <a:ea typeface="Arial"/>
+                <a:cs typeface="Arial"/>
+              </a:rPr>
+              <a:t>THE RELIABILITY</a:t>
+            </a:r>
+          </a:p>
+        </p:txBody>
+      </p:sp>
+      <p:sp>
+        <p:nvSpPr>
+          <p:cNvPr id="2" name="reliability-title">
             <a:extLst xmlns:a="http://schemas.openxmlformats.org/drawingml/2006/main">
               <a:ext uri="{FF2B5EF4-FFF2-40B4-BE49-F238E27FC236}">
-                <a16:creationId xmlns:a16="http://schemas.microsoft.com/office/drawing/2014/main" id="{F58A4F41-E8D6-4C84-B059-1350119772C4}"/>
+                <a16:creationId xmlns:a16="http://schemas.microsoft.com/office/drawing/2014/main" id="{588CB2C5-BD3C-48F8-821C-3D38F5046EE1}"/>
               </a:ext>
             </a:extLst>
           </p:cNvPr>
@@ -2834,25 +3376,52 @@
         </p:nvSpPr>
         <p:spPr>
           <a:xfrm xmlns:a="http://schemas.openxmlformats.org/drawingml/2006/main">
-            <a:off x="4311682" y="3022568"/>
-            <a:ext cx="3568732" cy="2971800"/>
-          </a:xfrm>
-          <a:prstGeom xmlns:a="http://schemas.openxmlformats.org/drawingml/2006/main" prst="roundRect">
-            <a:avLst>
-              <a:gd name="adj" fmla="val 2564"/>
-            </a:avLst>
-          </a:prstGeom>
-          <a:solidFill xmlns:a="http://schemas.openxmlformats.org/drawingml/2006/main">
-            <a:srgbClr val="F2F2F2"/>
-          </a:solidFill>
-        </p:spPr>
-      </p:sp>
-      <p:sp>
-        <p:nvSpPr>
-          <p:cNvPr id="3" name="Rounded-Rectangle-7-3">
+            <a:off x="628650" y="971550"/>
+            <a:ext cx="7524750" cy="723900"/>
+          </a:xfrm>
+          <a:prstGeom xmlns:a="http://schemas.openxmlformats.org/drawingml/2006/main" prst="rect">
+            <a:avLst/>
+          </a:prstGeom>
+          <a:noFill xmlns:a="http://schemas.openxmlformats.org/drawingml/2006/main"/>
+          <a:ln xmlns:a="http://schemas.openxmlformats.org/drawingml/2006/main" w="0">
+            <a:noFill/>
+            <a:prstDash val="solid"/>
+          </a:ln>
+        </p:spPr>
+        <p:txBody>
+          <a:bodyPr xmlns:a="http://schemas.openxmlformats.org/drawingml/2006/main" anchor="t"/>
+          <a:lstStyle xmlns:a="http://schemas.openxmlformats.org/drawingml/2006/main"/>
+          <a:p xmlns:a="http://schemas.openxmlformats.org/drawingml/2006/main">
+            <a:pPr algn="l">
+              <a:defRPr sz="3000" b="1">
+                <a:solidFill>
+                  <a:srgbClr val="3B234D"/>
+                </a:solidFill>
+                <a:latin typeface="Arial"/>
+                <a:ea typeface="Arial"/>
+                <a:cs typeface="Arial"/>
+              </a:defRPr>
+            </a:pPr>
+            <a:r>
+              <a:rPr sz="3000" b="1">
+                <a:solidFill>
+                  <a:srgbClr val="3B234D"/>
+                </a:solidFill>
+                <a:latin typeface="Arial"/>
+                <a:ea typeface="Arial"/>
+                <a:cs typeface="Arial"/>
+              </a:rPr>
+              <a:t>I measured the system instead of trusting the demo.</a:t>
+            </a:r>
+          </a:p>
+        </p:txBody>
+      </p:sp>
+      <p:sp>
+        <p:nvSpPr>
+          <p:cNvPr id="3" name="metric-48">
             <a:extLst xmlns:a="http://schemas.openxmlformats.org/drawingml/2006/main">
               <a:ext uri="{FF2B5EF4-FFF2-40B4-BE49-F238E27FC236}">
-                <a16:creationId xmlns:a16="http://schemas.microsoft.com/office/drawing/2014/main" id="{67CC1B81-E335-4470-B190-270C593D6678}"/>
+                <a16:creationId xmlns:a16="http://schemas.microsoft.com/office/drawing/2014/main" id="{269FE0F0-89DC-49E4-A8FA-950685ECC854}"/>
               </a:ext>
             </a:extLst>
           </p:cNvPr>
@@ -2863,25 +3432,52 @@
         </p:nvSpPr>
         <p:spPr>
           <a:xfrm xmlns:a="http://schemas.openxmlformats.org/drawingml/2006/main">
-            <a:off x="8232267" y="3022568"/>
-            <a:ext cx="3568732" cy="2971800"/>
-          </a:xfrm>
-          <a:prstGeom xmlns:a="http://schemas.openxmlformats.org/drawingml/2006/main" prst="roundRect">
-            <a:avLst>
-              <a:gd name="adj" fmla="val 2564"/>
-            </a:avLst>
-          </a:prstGeom>
-          <a:solidFill xmlns:a="http://schemas.openxmlformats.org/drawingml/2006/main">
-            <a:srgbClr val="F2F2F2"/>
-          </a:solidFill>
-        </p:spPr>
-      </p:sp>
-      <p:sp>
-        <p:nvSpPr>
-          <p:cNvPr id="4" name="Slide-Number-Placeholder-1-4">
+            <a:off x="685800" y="2190750"/>
+            <a:ext cx="1619250" cy="876300"/>
+          </a:xfrm>
+          <a:prstGeom xmlns:a="http://schemas.openxmlformats.org/drawingml/2006/main" prst="rect">
+            <a:avLst/>
+          </a:prstGeom>
+          <a:noFill xmlns:a="http://schemas.openxmlformats.org/drawingml/2006/main"/>
+          <a:ln xmlns:a="http://schemas.openxmlformats.org/drawingml/2006/main" w="0">
+            <a:noFill/>
+            <a:prstDash val="solid"/>
+          </a:ln>
+        </p:spPr>
+        <p:txBody>
+          <a:bodyPr xmlns:a="http://schemas.openxmlformats.org/drawingml/2006/main" anchor="t"/>
+          <a:lstStyle xmlns:a="http://schemas.openxmlformats.org/drawingml/2006/main"/>
+          <a:p xmlns:a="http://schemas.openxmlformats.org/drawingml/2006/main">
+            <a:pPr algn="l">
+              <a:defRPr sz="5100" b="1">
+                <a:solidFill>
+                  <a:srgbClr val="3B234D"/>
+                </a:solidFill>
+                <a:latin typeface="Arial"/>
+                <a:ea typeface="Arial"/>
+                <a:cs typeface="Arial"/>
+              </a:defRPr>
+            </a:pPr>
+            <a:r>
+              <a:rPr sz="5100" b="1">
+                <a:solidFill>
+                  <a:srgbClr val="3B234D"/>
+                </a:solidFill>
+                <a:latin typeface="Arial"/>
+                <a:ea typeface="Arial"/>
+                <a:cs typeface="Arial"/>
+              </a:rPr>
+              <a:t>48</a:t>
+            </a:r>
+          </a:p>
+        </p:txBody>
+      </p:sp>
+      <p:sp>
+        <p:nvSpPr>
+          <p:cNvPr id="4" name="metric-48-label">
             <a:extLst xmlns:a="http://schemas.openxmlformats.org/drawingml/2006/main">
               <a:ext uri="{FF2B5EF4-FFF2-40B4-BE49-F238E27FC236}">
-                <a16:creationId xmlns:a16="http://schemas.microsoft.com/office/drawing/2014/main" id="{7B75A4D2-DAD1-4028-AA25-EE4D62DBE711}"/>
+                <a16:creationId xmlns:a16="http://schemas.microsoft.com/office/drawing/2014/main" id="{90D9BF1D-F2E8-4831-9E06-404941D49CC2}"/>
               </a:ext>
             </a:extLst>
           </p:cNvPr>
@@ -2892,39 +3488,74 @@
         </p:nvSpPr>
         <p:spPr>
           <a:xfrm xmlns:a="http://schemas.openxmlformats.org/drawingml/2006/main">
-            <a:off x="11279315" y="6279261"/>
-            <a:ext cx="518922" cy="241268"/>
-          </a:xfrm>
-          <a:prstGeom xmlns:a="http://schemas.openxmlformats.org/drawingml/2006/main" prst="rect">
-            <a:avLst/>
-          </a:prstGeom>
-        </p:spPr>
-        <p:txBody>
-          <a:bodyPr xmlns:a="http://schemas.openxmlformats.org/drawingml/2006/main" lIns="0" tIns="0" rIns="0" bIns="0" anchor="b"/>
-          <a:lstStyle xmlns:a="http://schemas.openxmlformats.org/drawingml/2006/main"/>
-          <a:p xmlns:a="http://schemas.openxmlformats.org/drawingml/2006/main">
-            <a:pPr algn="r">
-              <a:defRPr sz="1000">
-                <a:solidFill>
-                  <a:srgbClr val="000000"/>
-                </a:solidFill>
-                <a:latin typeface="Helvetica Neue"/>
-                <a:ea typeface="Helvetica Neue"/>
-                <a:cs typeface="Helvetica Neue"/>
-              </a:defRPr>
-            </a:pPr>
-            <a:r>
-              <a:t>4</a:t>
-            </a:r>
-          </a:p>
-        </p:txBody>
-      </p:sp>
-      <p:sp>
-        <p:nvSpPr>
-          <p:cNvPr id="5" name="Title-2-5">
+            <a:off x="723900" y="3048000"/>
+            <a:ext cx="2286000" cy="419100"/>
+          </a:xfrm>
+          <a:prstGeom xmlns:a="http://schemas.openxmlformats.org/drawingml/2006/main" prst="rect">
+            <a:avLst/>
+          </a:prstGeom>
+          <a:noFill xmlns:a="http://schemas.openxmlformats.org/drawingml/2006/main"/>
+          <a:ln xmlns:a="http://schemas.openxmlformats.org/drawingml/2006/main" w="0">
+            <a:noFill/>
+            <a:prstDash val="solid"/>
+          </a:ln>
+        </p:spPr>
+        <p:txBody>
+          <a:bodyPr xmlns:a="http://schemas.openxmlformats.org/drawingml/2006/main" anchor="t"/>
+          <a:lstStyle xmlns:a="http://schemas.openxmlformats.org/drawingml/2006/main"/>
+          <a:p xmlns:a="http://schemas.openxmlformats.org/drawingml/2006/main">
+            <a:pPr algn="l">
+              <a:defRPr sz="1500" b="1">
+                <a:solidFill>
+                  <a:srgbClr val="2B2630"/>
+                </a:solidFill>
+                <a:latin typeface="Arial"/>
+                <a:ea typeface="Arial"/>
+                <a:cs typeface="Arial"/>
+              </a:defRPr>
+            </a:pPr>
+            <a:r>
+              <a:rPr sz="1500" b="1">
+                <a:solidFill>
+                  <a:srgbClr val="2B2630"/>
+                </a:solidFill>
+                <a:latin typeface="Arial"/>
+                <a:ea typeface="Arial"/>
+                <a:cs typeface="Arial"/>
+              </a:rPr>
+              <a:t>Pytest cases passed</a:t>
+            </a:r>
+          </a:p>
+        </p:txBody>
+      </p:sp>
+      <p:cxnSp>
+        <p:nvCxnSpPr>
+          <p:cNvPr id="18" name="metric-rule-1"/>
+          <p:cNvCxnSpPr/>
+          <p:nvPr/>
+        </p:nvCxnSpPr>
+        <p:spPr>
+          <a:xfrm xmlns:a="http://schemas.openxmlformats.org/drawingml/2006/main">
+            <a:off x="723900" y="3714750"/>
+            <a:ext cx="4572000" cy="95"/>
+          </a:xfrm>
+          <a:prstGeom xmlns:a="http://schemas.openxmlformats.org/drawingml/2006/main" prst="straightConnector1">
+            <a:avLst/>
+          </a:prstGeom>
+          <a:ln xmlns:a="http://schemas.openxmlformats.org/drawingml/2006/main" w="19050">
+            <a:solidFill>
+              <a:srgbClr val="2F6B57"/>
+            </a:solidFill>
+            <a:prstDash val="solid"/>
+          </a:ln>
+        </p:spPr>
+      </p:cxnSp>
+      <p:sp>
+        <p:nvSpPr>
+          <p:cNvPr id="6" name="metric-7">
             <a:extLst xmlns:a="http://schemas.openxmlformats.org/drawingml/2006/main">
               <a:ext uri="{FF2B5EF4-FFF2-40B4-BE49-F238E27FC236}">
-                <a16:creationId xmlns:a16="http://schemas.microsoft.com/office/drawing/2014/main" id="{C9AECF69-CDF3-45C3-9722-3A84AE439469}"/>
+                <a16:creationId xmlns:a16="http://schemas.microsoft.com/office/drawing/2014/main" id="{1906AB87-AB9C-4408-B132-242E65F7F91B}"/>
               </a:ext>
             </a:extLst>
           </p:cNvPr>
@@ -2935,53 +3566,52 @@
         </p:nvSpPr>
         <p:spPr>
           <a:xfrm xmlns:a="http://schemas.openxmlformats.org/drawingml/2006/main">
-            <a:off x="393668" y="344043"/>
-            <a:ext cx="11404568" cy="1047464"/>
-          </a:xfrm>
-          <a:prstGeom xmlns:a="http://schemas.openxmlformats.org/drawingml/2006/main" prst="rect">
-            <a:avLst/>
-          </a:prstGeom>
-        </p:spPr>
-        <p:txBody>
-          <a:bodyPr xmlns:a="http://schemas.openxmlformats.org/drawingml/2006/main" lIns="0" tIns="0" rIns="0" bIns="0" anchor="t">
-            <a:normAutofit fontScale="100000"/>
-          </a:bodyPr>
+            <a:off x="685800" y="3981450"/>
+            <a:ext cx="1809750" cy="876300"/>
+          </a:xfrm>
+          <a:prstGeom xmlns:a="http://schemas.openxmlformats.org/drawingml/2006/main" prst="rect">
+            <a:avLst/>
+          </a:prstGeom>
+          <a:noFill xmlns:a="http://schemas.openxmlformats.org/drawingml/2006/main"/>
+          <a:ln xmlns:a="http://schemas.openxmlformats.org/drawingml/2006/main" w="0">
+            <a:noFill/>
+            <a:prstDash val="solid"/>
+          </a:ln>
+        </p:spPr>
+        <p:txBody>
+          <a:bodyPr xmlns:a="http://schemas.openxmlformats.org/drawingml/2006/main" anchor="t"/>
           <a:lstStyle xmlns:a="http://schemas.openxmlformats.org/drawingml/2006/main"/>
           <a:p xmlns:a="http://schemas.openxmlformats.org/drawingml/2006/main">
             <a:pPr algn="l">
-              <a:lnSpc>
-                <a:spcPct val="100000"/>
-              </a:lnSpc>
-              <a:buNone/>
-              <a:defRPr sz="2900">
-                <a:solidFill>
-                  <a:srgbClr val="000000"/>
-                </a:solidFill>
-                <a:latin typeface="Helvetica Neue"/>
-                <a:ea typeface="Helvetica Neue"/>
-                <a:cs typeface="Helvetica Neue"/>
-              </a:defRPr>
-            </a:pPr>
-            <a:r>
-              <a:rPr sz="2900" b="1">
-                <a:solidFill>
-                  <a:srgbClr val="000000"/>
-                </a:solidFill>
-                <a:latin typeface="Arial"/>
-                <a:ea typeface="Arial"/>
-                <a:cs typeface="Arial"/>
-              </a:rPr>
-              <a:t>Reliability is measured, not assumed.</a:t>
-            </a:r>
-          </a:p>
-        </p:txBody>
-      </p:sp>
-      <p:sp>
-        <p:nvSpPr>
-          <p:cNvPr id="6" name="Content-Placeholder-9-6">
+              <a:defRPr sz="4800" b="1">
+                <a:solidFill>
+                  <a:srgbClr val="3B234D"/>
+                </a:solidFill>
+                <a:latin typeface="Arial"/>
+                <a:ea typeface="Arial"/>
+                <a:cs typeface="Arial"/>
+              </a:defRPr>
+            </a:pPr>
+            <a:r>
+              <a:rPr sz="4800" b="1">
+                <a:solidFill>
+                  <a:srgbClr val="3B234D"/>
+                </a:solidFill>
+                <a:latin typeface="Arial"/>
+                <a:ea typeface="Arial"/>
+                <a:cs typeface="Arial"/>
+              </a:rPr>
+              <a:t>7/7</a:t>
+            </a:r>
+          </a:p>
+        </p:txBody>
+      </p:sp>
+      <p:sp>
+        <p:nvSpPr>
+          <p:cNvPr id="7" name="metric-7-label">
             <a:extLst xmlns:a="http://schemas.openxmlformats.org/drawingml/2006/main">
               <a:ext uri="{FF2B5EF4-FFF2-40B4-BE49-F238E27FC236}">
-                <a16:creationId xmlns:a16="http://schemas.microsoft.com/office/drawing/2014/main" id="{4132E949-E098-4EA6-8309-985699E675A1}"/>
+                <a16:creationId xmlns:a16="http://schemas.microsoft.com/office/drawing/2014/main" id="{1C44FCF4-2C6C-43F2-8212-6A1D45CC2CC5}"/>
               </a:ext>
             </a:extLst>
           </p:cNvPr>
@@ -2992,53 +3622,52 @@
         </p:nvSpPr>
         <p:spPr>
           <a:xfrm xmlns:a="http://schemas.openxmlformats.org/drawingml/2006/main">
-            <a:off x="702374" y="4900613"/>
-            <a:ext cx="2949607" cy="819150"/>
-          </a:xfrm>
-          <a:prstGeom xmlns:a="http://schemas.openxmlformats.org/drawingml/2006/main" prst="rect">
-            <a:avLst/>
-          </a:prstGeom>
-        </p:spPr>
-        <p:txBody>
-          <a:bodyPr xmlns:a="http://schemas.openxmlformats.org/drawingml/2006/main" lIns="91440" tIns="45720" rIns="91440" bIns="45720">
-            <a:normAutofit fontScale="100000"/>
-          </a:bodyPr>
+            <a:off x="723900" y="4838700"/>
+            <a:ext cx="2952750" cy="419100"/>
+          </a:xfrm>
+          <a:prstGeom xmlns:a="http://schemas.openxmlformats.org/drawingml/2006/main" prst="rect">
+            <a:avLst/>
+          </a:prstGeom>
+          <a:noFill xmlns:a="http://schemas.openxmlformats.org/drawingml/2006/main"/>
+          <a:ln xmlns:a="http://schemas.openxmlformats.org/drawingml/2006/main" w="0">
+            <a:noFill/>
+            <a:prstDash val="solid"/>
+          </a:ln>
+        </p:spPr>
+        <p:txBody>
+          <a:bodyPr xmlns:a="http://schemas.openxmlformats.org/drawingml/2006/main" anchor="t"/>
           <a:lstStyle xmlns:a="http://schemas.openxmlformats.org/drawingml/2006/main"/>
           <a:p xmlns:a="http://schemas.openxmlformats.org/drawingml/2006/main">
             <a:pPr algn="l">
-              <a:lnSpc>
-                <a:spcPct val="100000"/>
-              </a:lnSpc>
-              <a:buNone/>
-              <a:defRPr sz="2400">
-                <a:solidFill>
-                  <a:srgbClr val="000000"/>
-                </a:solidFill>
-                <a:latin typeface="Helvetica Neue"/>
-                <a:ea typeface="Helvetica Neue"/>
-                <a:cs typeface="Helvetica Neue"/>
-              </a:defRPr>
-            </a:pPr>
-            <a:r>
-              <a:rPr sz="1800" b="1">
-                <a:solidFill>
-                  <a:srgbClr val="000000"/>
-                </a:solidFill>
-                <a:latin typeface="Arial"/>
-                <a:ea typeface="Arial"/>
-                <a:cs typeface="Arial"/>
-              </a:rPr>
-              <a:t>Pytest cases passed</a:t>
-            </a:r>
-          </a:p>
-        </p:txBody>
-      </p:sp>
-      <p:sp>
-        <p:nvSpPr>
-          <p:cNvPr id="7" name="Content-Placeholder-10-7">
+              <a:defRPr sz="1500" b="1">
+                <a:solidFill>
+                  <a:srgbClr val="2B2630"/>
+                </a:solidFill>
+                <a:latin typeface="Arial"/>
+                <a:ea typeface="Arial"/>
+                <a:cs typeface="Arial"/>
+              </a:defRPr>
+            </a:pPr>
+            <a:r>
+              <a:rPr sz="1500" b="1">
+                <a:solidFill>
+                  <a:srgbClr val="2B2630"/>
+                </a:solidFill>
+                <a:latin typeface="Arial"/>
+                <a:ea typeface="Arial"/>
+                <a:cs typeface="Arial"/>
+              </a:rPr>
+              <a:t>Evaluation scenarios passed</a:t>
+            </a:r>
+          </a:p>
+        </p:txBody>
+      </p:sp>
+      <p:sp>
+        <p:nvSpPr>
+          <p:cNvPr id="8" name="metric-confidence">
             <a:extLst xmlns:a="http://schemas.openxmlformats.org/drawingml/2006/main">
               <a:ext uri="{FF2B5EF4-FFF2-40B4-BE49-F238E27FC236}">
-                <a16:creationId xmlns:a16="http://schemas.microsoft.com/office/drawing/2014/main" id="{ABA73426-9537-4AD7-9AD3-C9E3CC339915}"/>
+                <a16:creationId xmlns:a16="http://schemas.microsoft.com/office/drawing/2014/main" id="{8FDDF2AC-9233-4BB0-9C11-953A344A056F}"/>
               </a:ext>
             </a:extLst>
           </p:cNvPr>
@@ -3049,53 +3678,52 @@
         </p:nvSpPr>
         <p:spPr>
           <a:xfrm xmlns:a="http://schemas.openxmlformats.org/drawingml/2006/main">
-            <a:off x="8541830" y="4900613"/>
-            <a:ext cx="2949607" cy="819150"/>
-          </a:xfrm>
-          <a:prstGeom xmlns:a="http://schemas.openxmlformats.org/drawingml/2006/main" prst="rect">
-            <a:avLst/>
-          </a:prstGeom>
-        </p:spPr>
-        <p:txBody>
-          <a:bodyPr xmlns:a="http://schemas.openxmlformats.org/drawingml/2006/main" lIns="91440" tIns="45720" rIns="91440" bIns="45720">
-            <a:normAutofit fontScale="100000"/>
-          </a:bodyPr>
+            <a:off x="3543300" y="2190750"/>
+            <a:ext cx="1905000" cy="876300"/>
+          </a:xfrm>
+          <a:prstGeom xmlns:a="http://schemas.openxmlformats.org/drawingml/2006/main" prst="rect">
+            <a:avLst/>
+          </a:prstGeom>
+          <a:noFill xmlns:a="http://schemas.openxmlformats.org/drawingml/2006/main"/>
+          <a:ln xmlns:a="http://schemas.openxmlformats.org/drawingml/2006/main" w="0">
+            <a:noFill/>
+            <a:prstDash val="solid"/>
+          </a:ln>
+        </p:spPr>
+        <p:txBody>
+          <a:bodyPr xmlns:a="http://schemas.openxmlformats.org/drawingml/2006/main" anchor="t"/>
           <a:lstStyle xmlns:a="http://schemas.openxmlformats.org/drawingml/2006/main"/>
           <a:p xmlns:a="http://schemas.openxmlformats.org/drawingml/2006/main">
             <a:pPr algn="l">
-              <a:lnSpc>
-                <a:spcPct val="100000"/>
-              </a:lnSpc>
-              <a:buNone/>
-              <a:defRPr sz="2400">
-                <a:solidFill>
-                  <a:srgbClr val="000000"/>
-                </a:solidFill>
-                <a:latin typeface="Helvetica Neue"/>
-                <a:ea typeface="Helvetica Neue"/>
-                <a:cs typeface="Helvetica Neue"/>
-              </a:defRPr>
-            </a:pPr>
-            <a:r>
-              <a:rPr sz="1800" b="1">
-                <a:solidFill>
-                  <a:srgbClr val="000000"/>
-                </a:solidFill>
-                <a:latin typeface="Arial"/>
-                <a:ea typeface="Arial"/>
-                <a:cs typeface="Arial"/>
-              </a:rPr>
-              <a:t>Retrieval confidence in demo</a:t>
-            </a:r>
-          </a:p>
-        </p:txBody>
-      </p:sp>
-      <p:sp>
-        <p:nvSpPr>
-          <p:cNvPr id="8" name="Content-Placeholder-11-8">
+              <a:defRPr sz="4800" b="1">
+                <a:solidFill>
+                  <a:srgbClr val="E98777"/>
+                </a:solidFill>
+                <a:latin typeface="Arial"/>
+                <a:ea typeface="Arial"/>
+                <a:cs typeface="Arial"/>
+              </a:defRPr>
+            </a:pPr>
+            <a:r>
+              <a:rPr sz="4800" b="1">
+                <a:solidFill>
+                  <a:srgbClr val="E98777"/>
+                </a:solidFill>
+                <a:latin typeface="Arial"/>
+                <a:ea typeface="Arial"/>
+                <a:cs typeface="Arial"/>
+              </a:rPr>
+              <a:t>95%</a:t>
+            </a:r>
+          </a:p>
+        </p:txBody>
+      </p:sp>
+      <p:sp>
+        <p:nvSpPr>
+          <p:cNvPr id="9" name="metric-confidence-label">
             <a:extLst xmlns:a="http://schemas.openxmlformats.org/drawingml/2006/main">
               <a:ext uri="{FF2B5EF4-FFF2-40B4-BE49-F238E27FC236}">
-                <a16:creationId xmlns:a16="http://schemas.microsoft.com/office/drawing/2014/main" id="{A129DA7B-41BA-42C4-85B0-A8D6CEE7943B}"/>
+                <a16:creationId xmlns:a16="http://schemas.microsoft.com/office/drawing/2014/main" id="{B0F3EA4F-57C1-444D-9A13-FBB50D430A4D}"/>
               </a:ext>
             </a:extLst>
           </p:cNvPr>
@@ -3106,53 +3734,75 @@
         </p:nvSpPr>
         <p:spPr>
           <a:xfrm xmlns:a="http://schemas.openxmlformats.org/drawingml/2006/main">
-            <a:off x="4621244" y="4900613"/>
-            <a:ext cx="2949607" cy="819150"/>
-          </a:xfrm>
-          <a:prstGeom xmlns:a="http://schemas.openxmlformats.org/drawingml/2006/main" prst="rect">
-            <a:avLst/>
-          </a:prstGeom>
-        </p:spPr>
-        <p:txBody>
-          <a:bodyPr xmlns:a="http://schemas.openxmlformats.org/drawingml/2006/main" lIns="91440" tIns="45720" rIns="91440" bIns="45720">
-            <a:normAutofit fontScale="100000"/>
-          </a:bodyPr>
+            <a:off x="3581400" y="3048000"/>
+            <a:ext cx="2381250" cy="666750"/>
+          </a:xfrm>
+          <a:prstGeom xmlns:a="http://schemas.openxmlformats.org/drawingml/2006/main" prst="rect">
+            <a:avLst/>
+          </a:prstGeom>
+          <a:noFill xmlns:a="http://schemas.openxmlformats.org/drawingml/2006/main"/>
+          <a:ln xmlns:a="http://schemas.openxmlformats.org/drawingml/2006/main" w="0">
+            <a:noFill/>
+            <a:prstDash val="solid"/>
+          </a:ln>
+        </p:spPr>
+        <p:txBody>
+          <a:bodyPr xmlns:a="http://schemas.openxmlformats.org/drawingml/2006/main" anchor="t"/>
           <a:lstStyle xmlns:a="http://schemas.openxmlformats.org/drawingml/2006/main"/>
           <a:p xmlns:a="http://schemas.openxmlformats.org/drawingml/2006/main">
             <a:pPr algn="l">
-              <a:lnSpc>
-                <a:spcPct val="100000"/>
-              </a:lnSpc>
-              <a:buNone/>
-              <a:defRPr sz="2400">
-                <a:solidFill>
-                  <a:srgbClr val="000000"/>
-                </a:solidFill>
-                <a:latin typeface="Helvetica Neue"/>
-                <a:ea typeface="Helvetica Neue"/>
-                <a:cs typeface="Helvetica Neue"/>
-              </a:defRPr>
-            </a:pPr>
-            <a:r>
-              <a:rPr sz="1800" b="1">
-                <a:solidFill>
-                  <a:srgbClr val="000000"/>
-                </a:solidFill>
-                <a:latin typeface="Arial"/>
-                <a:ea typeface="Arial"/>
-                <a:cs typeface="Arial"/>
-              </a:rPr>
-              <a:t>Evaluation scenarios passed</a:t>
-            </a:r>
-          </a:p>
-        </p:txBody>
-      </p:sp>
-      <p:sp>
-        <p:nvSpPr>
-          <p:cNvPr id="9" name="Content-Placeholder-9-9">
+              <a:defRPr sz="1500" b="1">
+                <a:solidFill>
+                  <a:srgbClr val="2B2630"/>
+                </a:solidFill>
+                <a:latin typeface="Arial"/>
+                <a:ea typeface="Arial"/>
+                <a:cs typeface="Arial"/>
+              </a:defRPr>
+            </a:pPr>
+            <a:r>
+              <a:rPr sz="1500" b="1">
+                <a:solidFill>
+                  <a:srgbClr val="2B2630"/>
+                </a:solidFill>
+                <a:latin typeface="Arial"/>
+                <a:ea typeface="Arial"/>
+                <a:cs typeface="Arial"/>
+              </a:rPr>
+              <a:t>Retrieval confidence</a:t>
+            </a:r>
+          </a:p>
+          <a:p xmlns:a="http://schemas.openxmlformats.org/drawingml/2006/main">
+            <a:pPr algn="l">
+              <a:defRPr sz="1500" b="1">
+                <a:solidFill>
+                  <a:srgbClr val="2B2630"/>
+                </a:solidFill>
+                <a:latin typeface="Arial"/>
+                <a:ea typeface="Arial"/>
+                <a:cs typeface="Arial"/>
+              </a:defRPr>
+            </a:pPr>
+            <a:r>
+              <a:rPr sz="1500" b="1">
+                <a:solidFill>
+                  <a:srgbClr val="2B2630"/>
+                </a:solidFill>
+                <a:latin typeface="Arial"/>
+                <a:ea typeface="Arial"/>
+                <a:cs typeface="Arial"/>
+              </a:rPr>
+              <a:t>in the live demo</a:t>
+            </a:r>
+          </a:p>
+        </p:txBody>
+      </p:sp>
+      <p:sp>
+        <p:nvSpPr>
+          <p:cNvPr id="10" name="confidence-note">
             <a:extLst xmlns:a="http://schemas.openxmlformats.org/drawingml/2006/main">
               <a:ext uri="{FF2B5EF4-FFF2-40B4-BE49-F238E27FC236}">
-                <a16:creationId xmlns:a16="http://schemas.microsoft.com/office/drawing/2014/main" id="{8E364739-87EC-48CD-9F12-222D4F26BBA7}"/>
+                <a16:creationId xmlns:a16="http://schemas.microsoft.com/office/drawing/2014/main" id="{CAFE4CD4-2C2E-4C2C-AA17-5912CDAEE564}"/>
               </a:ext>
             </a:extLst>
           </p:cNvPr>
@@ -3163,53 +3813,79 @@
         </p:nvSpPr>
         <p:spPr>
           <a:xfrm xmlns:a="http://schemas.openxmlformats.org/drawingml/2006/main">
-            <a:off x="702374" y="3429000"/>
-            <a:ext cx="2940082" cy="1359313"/>
-          </a:xfrm>
-          <a:prstGeom xmlns:a="http://schemas.openxmlformats.org/drawingml/2006/main" prst="rect">
-            <a:avLst/>
-          </a:prstGeom>
-        </p:spPr>
-        <p:txBody>
-          <a:bodyPr xmlns:a="http://schemas.openxmlformats.org/drawingml/2006/main" lIns="0" tIns="0" rIns="0" bIns="0" anchor="b">
-            <a:normAutofit fontScale="100000"/>
-          </a:bodyPr>
+            <a:off x="3524250" y="4267200"/>
+            <a:ext cx="2857500" cy="762000"/>
+          </a:xfrm>
+          <a:prstGeom xmlns:a="http://schemas.openxmlformats.org/drawingml/2006/main" prst="rect">
+            <a:avLst/>
+          </a:prstGeom>
+          <a:noFill xmlns:a="http://schemas.openxmlformats.org/drawingml/2006/main"/>
+          <a:ln xmlns:a="http://schemas.openxmlformats.org/drawingml/2006/main" w="0">
+            <a:noFill/>
+            <a:prstDash val="solid"/>
+          </a:ln>
+        </p:spPr>
+        <p:txBody>
+          <a:bodyPr xmlns:a="http://schemas.openxmlformats.org/drawingml/2006/main" anchor="t"/>
           <a:lstStyle xmlns:a="http://schemas.openxmlformats.org/drawingml/2006/main"/>
           <a:p xmlns:a="http://schemas.openxmlformats.org/drawingml/2006/main">
             <a:pPr algn="l">
-              <a:lnSpc>
-                <a:spcPct val="100000"/>
-              </a:lnSpc>
-              <a:buNone/>
-              <a:defRPr sz="2400">
-                <a:solidFill>
-                  <a:srgbClr val="000000"/>
-                </a:solidFill>
-                <a:latin typeface="Helvetica Neue"/>
-                <a:ea typeface="Helvetica Neue"/>
-                <a:cs typeface="Helvetica Neue"/>
-              </a:defRPr>
-            </a:pPr>
-            <a:r>
-              <a:rPr sz="5400" b="1">
-                <a:solidFill>
-                  <a:srgbClr val="3D8DFF"/>
-                </a:solidFill>
-                <a:latin typeface="Arial"/>
-                <a:ea typeface="Arial"/>
-                <a:cs typeface="Arial"/>
-              </a:rPr>
-              <a:t>48</a:t>
-            </a:r>
-          </a:p>
-        </p:txBody>
-      </p:sp>
-      <p:sp>
-        <p:nvSpPr>
-          <p:cNvPr id="10" name="Content-Placeholder-9-10">
+              <a:defRPr sz="1425" b="1">
+                <a:solidFill>
+                  <a:srgbClr val="2F6B57"/>
+                </a:solidFill>
+                <a:latin typeface="Arial"/>
+                <a:ea typeface="Arial"/>
+                <a:cs typeface="Arial"/>
+              </a:defRPr>
+            </a:pPr>
+            <a:r>
+              <a:rPr sz="1425" b="1">
+                <a:solidFill>
+                  <a:srgbClr val="2F6B57"/>
+                </a:solidFill>
+                <a:latin typeface="Arial"/>
+                <a:ea typeface="Arial"/>
+                <a:cs typeface="Arial"/>
+              </a:rPr>
+              <a:t>Confidence measures retrieval strength—not medical certainty.</a:t>
+            </a:r>
+          </a:p>
+        </p:txBody>
+      </p:sp>
+      <p:pic>
+        <p:nvPicPr>
+          <p:cNvPr id="24" name=""/>
+          <p:cNvPicPr>
+            <a:picLocks xmlns:a="http://schemas.openxmlformats.org/drawingml/2006/main" noChangeAspect="1"/>
+          </p:cNvPicPr>
+          <p:nvPr/>
+        </p:nvPicPr>
+        <p:blipFill>
+          <a:blip xmlns:r="http://schemas.openxmlformats.org/officeDocument/2006/relationships" xmlns:a="http://schemas.openxmlformats.org/drawingml/2006/main" r:embed="R907a7d6f62dc4cfd"/>
+          <a:srcRect xmlns:a="http://schemas.openxmlformats.org/drawingml/2006/main" l="0" t="20" r="0" b="20"/>
+          <a:stretch xmlns:a="http://schemas.openxmlformats.org/drawingml/2006/main">
+            <a:fillRect l="0" t="0" r="0" b="0"/>
+          </a:stretch>
+        </p:blipFill>
+        <p:spPr>
+          <a:xfrm xmlns:a="http://schemas.openxmlformats.org/drawingml/2006/main">
+            <a:off x="7524750" y="819150"/>
+            <a:ext cx="3924300" cy="5143500"/>
+          </a:xfrm>
+          <a:prstGeom xmlns:a="http://schemas.openxmlformats.org/drawingml/2006/main" prst="roundRect">
+            <a:avLst>
+              <a:gd name="adj" fmla="val 5340"/>
+            </a:avLst>
+          </a:prstGeom>
+        </p:spPr>
+      </p:pic>
+      <p:sp>
+        <p:nvSpPr>
+          <p:cNvPr id="12" name="footer-brand-4">
             <a:extLst xmlns:a="http://schemas.openxmlformats.org/drawingml/2006/main">
               <a:ext uri="{FF2B5EF4-FFF2-40B4-BE49-F238E27FC236}">
-                <a16:creationId xmlns:a16="http://schemas.microsoft.com/office/drawing/2014/main" id="{F039171E-E05D-42ED-8B4D-8C93E757EE54}"/>
+                <a16:creationId xmlns:a16="http://schemas.microsoft.com/office/drawing/2014/main" id="{F640D943-7647-4010-898A-E04419EB25CD}"/>
               </a:ext>
             </a:extLst>
           </p:cNvPr>
@@ -3220,53 +3896,52 @@
         </p:nvSpPr>
         <p:spPr>
           <a:xfrm xmlns:a="http://schemas.openxmlformats.org/drawingml/2006/main">
-            <a:off x="4612958" y="3429000"/>
-            <a:ext cx="2940082" cy="1359313"/>
-          </a:xfrm>
-          <a:prstGeom xmlns:a="http://schemas.openxmlformats.org/drawingml/2006/main" prst="rect">
-            <a:avLst/>
-          </a:prstGeom>
-        </p:spPr>
-        <p:txBody>
-          <a:bodyPr xmlns:a="http://schemas.openxmlformats.org/drawingml/2006/main" lIns="0" tIns="0" rIns="0" bIns="0" anchor="b">
-            <a:normAutofit fontScale="100000"/>
-          </a:bodyPr>
+            <a:off x="609600" y="6362700"/>
+            <a:ext cx="1524000" cy="266700"/>
+          </a:xfrm>
+          <a:prstGeom xmlns:a="http://schemas.openxmlformats.org/drawingml/2006/main" prst="rect">
+            <a:avLst/>
+          </a:prstGeom>
+          <a:noFill xmlns:a="http://schemas.openxmlformats.org/drawingml/2006/main"/>
+          <a:ln xmlns:a="http://schemas.openxmlformats.org/drawingml/2006/main" w="0">
+            <a:noFill/>
+            <a:prstDash val="solid"/>
+          </a:ln>
+        </p:spPr>
+        <p:txBody>
+          <a:bodyPr xmlns:a="http://schemas.openxmlformats.org/drawingml/2006/main" anchor="t"/>
           <a:lstStyle xmlns:a="http://schemas.openxmlformats.org/drawingml/2006/main"/>
           <a:p xmlns:a="http://schemas.openxmlformats.org/drawingml/2006/main">
             <a:pPr algn="l">
-              <a:lnSpc>
-                <a:spcPct val="100000"/>
-              </a:lnSpc>
-              <a:buNone/>
-              <a:defRPr sz="2400">
-                <a:solidFill>
-                  <a:srgbClr val="000000"/>
-                </a:solidFill>
-                <a:latin typeface="Helvetica Neue"/>
-                <a:ea typeface="Helvetica Neue"/>
-                <a:cs typeface="Helvetica Neue"/>
-              </a:defRPr>
-            </a:pPr>
-            <a:r>
-              <a:rPr sz="5400" b="1">
-                <a:solidFill>
-                  <a:srgbClr val="3D8DFF"/>
-                </a:solidFill>
-                <a:latin typeface="Arial"/>
-                <a:ea typeface="Arial"/>
-                <a:cs typeface="Arial"/>
-              </a:rPr>
-              <a:t>7/7</a:t>
-            </a:r>
-          </a:p>
-        </p:txBody>
-      </p:sp>
-      <p:sp>
-        <p:nvSpPr>
-          <p:cNvPr id="11" name="Content-Placeholder-9-11">
+              <a:defRPr sz="975" b="1">
+                <a:solidFill>
+                  <a:srgbClr val="2F6B57"/>
+                </a:solidFill>
+                <a:latin typeface="Arial"/>
+                <a:ea typeface="Arial"/>
+                <a:cs typeface="Arial"/>
+              </a:defRPr>
+            </a:pPr>
+            <a:r>
+              <a:rPr sz="975" b="1">
+                <a:solidFill>
+                  <a:srgbClr val="2F6B57"/>
+                </a:solidFill>
+                <a:latin typeface="Arial"/>
+                <a:ea typeface="Arial"/>
+                <a:cs typeface="Arial"/>
+              </a:rPr>
+              <a:t>PAWPAL+</a:t>
+            </a:r>
+          </a:p>
+        </p:txBody>
+      </p:sp>
+      <p:sp>
+        <p:nvSpPr>
+          <p:cNvPr id="13" name="footer-number-4">
             <a:extLst xmlns:a="http://schemas.openxmlformats.org/drawingml/2006/main">
               <a:ext uri="{FF2B5EF4-FFF2-40B4-BE49-F238E27FC236}">
-                <a16:creationId xmlns:a16="http://schemas.microsoft.com/office/drawing/2014/main" id="{587D762C-3444-496A-8BF9-FF56ADFCD9F7}"/>
+                <a16:creationId xmlns:a16="http://schemas.microsoft.com/office/drawing/2014/main" id="{087C1D10-379C-48C5-B6FA-A49F330FD126}"/>
               </a:ext>
             </a:extLst>
           </p:cNvPr>
@@ -3277,127 +3952,42 @@
         </p:nvSpPr>
         <p:spPr>
           <a:xfrm xmlns:a="http://schemas.openxmlformats.org/drawingml/2006/main">
-            <a:off x="8562404" y="3429000"/>
-            <a:ext cx="2940082" cy="1359313"/>
-          </a:xfrm>
-          <a:prstGeom xmlns:a="http://schemas.openxmlformats.org/drawingml/2006/main" prst="rect">
-            <a:avLst/>
-          </a:prstGeom>
-        </p:spPr>
-        <p:txBody>
-          <a:bodyPr xmlns:a="http://schemas.openxmlformats.org/drawingml/2006/main" lIns="0" tIns="0" rIns="0" bIns="0" anchor="b">
-            <a:normAutofit fontScale="100000"/>
-          </a:bodyPr>
-          <a:lstStyle xmlns:a="http://schemas.openxmlformats.org/drawingml/2006/main"/>
-          <a:p xmlns:a="http://schemas.openxmlformats.org/drawingml/2006/main">
-            <a:pPr algn="l">
-              <a:lnSpc>
-                <a:spcPct val="100000"/>
-              </a:lnSpc>
-              <a:buNone/>
-              <a:defRPr sz="2400">
-                <a:solidFill>
-                  <a:srgbClr val="000000"/>
-                </a:solidFill>
-                <a:latin typeface="Helvetica Neue"/>
-                <a:ea typeface="Helvetica Neue"/>
-                <a:cs typeface="Helvetica Neue"/>
-              </a:defRPr>
-            </a:pPr>
-            <a:r>
-              <a:rPr sz="5400" b="1">
-                <a:solidFill>
-                  <a:srgbClr val="3D8DFF"/>
-                </a:solidFill>
-                <a:latin typeface="Arial"/>
-                <a:ea typeface="Arial"/>
-                <a:cs typeface="Arial"/>
-              </a:rPr>
-              <a:t>95%</a:t>
-            </a:r>
-          </a:p>
-        </p:txBody>
-      </p:sp>
-      <p:sp>
-        <p:nvSpPr>
-          <p:cNvPr id="12" name="Content-Placeholder-15-12">
-            <a:extLst xmlns:a="http://schemas.openxmlformats.org/drawingml/2006/main">
-              <a:ext uri="{FF2B5EF4-FFF2-40B4-BE49-F238E27FC236}">
-                <a16:creationId xmlns:a16="http://schemas.microsoft.com/office/drawing/2014/main" id="{CB6ACD50-B475-4FE3-905D-53C5ABE5A340}"/>
-              </a:ext>
-            </a:extLst>
-          </p:cNvPr>
-          <p:cNvSpPr>
-            <a:spLocks xmlns:a="http://schemas.openxmlformats.org/drawingml/2006/main" noGrp="1"/>
-          </p:cNvSpPr>
-          <p:nvPr/>
-        </p:nvSpPr>
-        <p:spPr>
-          <a:xfrm xmlns:a="http://schemas.openxmlformats.org/drawingml/2006/main">
-            <a:off x="393668" y="1138333"/>
-            <a:ext cx="11404568" cy="1599438"/>
-          </a:xfrm>
-          <a:prstGeom xmlns:a="http://schemas.openxmlformats.org/drawingml/2006/main" prst="rect">
-            <a:avLst/>
-          </a:prstGeom>
-        </p:spPr>
-        <p:txBody>
-          <a:bodyPr xmlns:a="http://schemas.openxmlformats.org/drawingml/2006/main" lIns="0" tIns="0" rIns="0" bIns="0">
-            <a:noAutofit/>
-          </a:bodyPr>
-          <a:lstStyle xmlns:a="http://schemas.openxmlformats.org/drawingml/2006/main"/>
-          <a:p xmlns:a="http://schemas.openxmlformats.org/drawingml/2006/main">
-            <a:pPr algn="l">
-              <a:lnSpc>
-                <a:spcPct val="100000"/>
-              </a:lnSpc>
-              <a:buNone/>
-              <a:defRPr sz="1600">
-                <a:solidFill>
-                  <a:srgbClr val="000000"/>
-                </a:solidFill>
-                <a:latin typeface="Helvetica Neue"/>
-                <a:ea typeface="Helvetica Neue"/>
-                <a:cs typeface="Helvetica Neue"/>
-              </a:defRPr>
-            </a:pPr>
-            <a:r>
-              <a:rPr sz="1800" b="1">
-                <a:solidFill>
-                  <a:srgbClr val="3D8DFF"/>
-                </a:solidFill>
-                <a:latin typeface="Arial"/>
-                <a:ea typeface="Arial"/>
-                <a:cs typeface="Arial"/>
-              </a:rPr>
-              <a:t>Three layers of evidence</a:t>
-            </a:r>
-          </a:p>
-          <a:p xmlns:a="http://schemas.openxmlformats.org/drawingml/2006/main">
-            <a:pPr algn="l">
-              <a:lnSpc>
-                <a:spcPct val="100000"/>
-              </a:lnSpc>
-              <a:buNone/>
-              <a:defRPr sz="1600">
-                <a:solidFill>
-                  <a:srgbClr val="000000"/>
-                </a:solidFill>
-                <a:latin typeface="Helvetica Neue"/>
-                <a:ea typeface="Helvetica Neue"/>
-                <a:cs typeface="Helvetica Neue"/>
-              </a:defRPr>
-            </a:pPr>
-            <a:r>
-              <a:rPr sz="1600" b="0">
-                <a:solidFill>
-                  <a:srgbClr val="000000"/>
-                </a:solidFill>
-                <a:latin typeface="Arial"/>
-                <a:ea typeface="Arial"/>
-                <a:cs typeface="Arial"/>
-              </a:rPr>
-              <a:t>Tests cover deterministic logic, retrieval quality, model boundaries, and emergency behavior.</a:t>
+            <a:off x="11334750" y="6362700"/>
+            <a:ext cx="266700" cy="228600"/>
+          </a:xfrm>
+          <a:prstGeom xmlns:a="http://schemas.openxmlformats.org/drawingml/2006/main" prst="rect">
+            <a:avLst/>
+          </a:prstGeom>
+          <a:noFill xmlns:a="http://schemas.openxmlformats.org/drawingml/2006/main"/>
+          <a:ln xmlns:a="http://schemas.openxmlformats.org/drawingml/2006/main" w="0">
+            <a:noFill/>
+            <a:prstDash val="solid"/>
+          </a:ln>
+        </p:spPr>
+        <p:txBody>
+          <a:bodyPr xmlns:a="http://schemas.openxmlformats.org/drawingml/2006/main" anchor="t"/>
+          <a:lstStyle xmlns:a="http://schemas.openxmlformats.org/drawingml/2006/main"/>
+          <a:p xmlns:a="http://schemas.openxmlformats.org/drawingml/2006/main">
+            <a:pPr algn="r">
+              <a:defRPr sz="975" b="1">
+                <a:solidFill>
+                  <a:srgbClr val="2F6B57"/>
+                </a:solidFill>
+                <a:latin typeface="Arial"/>
+                <a:ea typeface="Arial"/>
+                <a:cs typeface="Arial"/>
+              </a:defRPr>
+            </a:pPr>
+            <a:r>
+              <a:rPr sz="975" b="1">
+                <a:solidFill>
+                  <a:srgbClr val="2F6B57"/>
+                </a:solidFill>
+                <a:latin typeface="Arial"/>
+                <a:ea typeface="Arial"/>
+                <a:cs typeface="Arial"/>
+              </a:rPr>
+              <a:t>4</a:t>
             </a:r>
           </a:p>
         </p:txBody>
@@ -3405,7 +3995,7 @@
     </p:spTree>
     <p:extLst>
       <p:ext uri="{BB962C8B-B14F-4D97-AF65-F5344CB8AC3E}">
-        <p14:creationId xmlns:p14="http://schemas.microsoft.com/office/powerpoint/2010/main" val="1183707372"/>
+        <p14:creationId xmlns:p14="http://schemas.microsoft.com/office/powerpoint/2010/main" val="1847445704"/>
       </p:ext>
     </p:extLst>
   </p:cSld>
@@ -3415,6 +4005,13 @@
 <file path=ppt/slides/slide5.xml><?xml version="1.0" encoding="utf-8"?>
 <p:sld xmlns:p="http://schemas.openxmlformats.org/presentationml/2006/main">
   <p:cSld>
+    <p:bg>
+      <p:bgPr>
+        <a:solidFill xmlns:a="http://schemas.openxmlformats.org/drawingml/2006/main">
+          <a:srgbClr val="EFE5F4"/>
+        </a:solidFill>
+      </p:bgPr>
+    </p:bg>
     <p:spTree>
       <p:nvGrpSpPr>
         <p:cNvPr id="1" name=""/>
@@ -3426,10 +4023,10 @@
       </p:grpSpPr>
       <p:sp>
         <p:nvSpPr>
-          <p:cNvPr id="10" name="Google-Shape-532-p58-2">
+          <p:cNvPr id="12" name="reflection-kicker">
             <a:extLst xmlns:a="http://schemas.openxmlformats.org/drawingml/2006/main">
               <a:ext uri="{FF2B5EF4-FFF2-40B4-BE49-F238E27FC236}">
-                <a16:creationId xmlns:a16="http://schemas.microsoft.com/office/drawing/2014/main" id="{2683AD17-796C-489E-B70B-40337C165153}"/>
+                <a16:creationId xmlns:a16="http://schemas.microsoft.com/office/drawing/2014/main" id="{23B72DEA-EDA9-4B6D-B356-3782DBC94175}"/>
               </a:ext>
             </a:extLst>
           </p:cNvPr>
@@ -3440,41 +4037,52 @@
         </p:nvSpPr>
         <p:spPr>
           <a:xfrm xmlns:a="http://schemas.openxmlformats.org/drawingml/2006/main">
-            <a:off x="11279315" y="6279261"/>
-            <a:ext cx="518922" cy="241268"/>
-          </a:xfrm>
-          <a:prstGeom xmlns:a="http://schemas.openxmlformats.org/drawingml/2006/main" prst="rect">
-            <a:avLst/>
-          </a:prstGeom>
-        </p:spPr>
-        <p:txBody>
-          <a:bodyPr xmlns:a="http://schemas.openxmlformats.org/drawingml/2006/main" wrap="square" lIns="0" tIns="0" rIns="0" bIns="0" anchor="b">
-            <a:noAutofit/>
-          </a:bodyPr>
-          <a:lstStyle xmlns:a="http://schemas.openxmlformats.org/drawingml/2006/main"/>
-          <a:p xmlns:a="http://schemas.openxmlformats.org/drawingml/2006/main">
-            <a:pPr algn="r">
-              <a:defRPr sz="1000">
-                <a:solidFill>
-                  <a:srgbClr val="000000"/>
-                </a:solidFill>
-                <a:latin typeface="Helvetica Neue"/>
-                <a:ea typeface="Helvetica Neue"/>
-                <a:cs typeface="Helvetica Neue"/>
-              </a:defRPr>
-            </a:pPr>
-            <a:r>
-              <a:t>5</a:t>
-            </a:r>
-          </a:p>
-        </p:txBody>
-      </p:sp>
-      <p:sp>
-        <p:nvSpPr>
-          <p:cNvPr id="2" name="Google-Shape-533-p58-3">
+            <a:off x="628650" y="495300"/>
+            <a:ext cx="2667000" cy="323850"/>
+          </a:xfrm>
+          <a:prstGeom xmlns:a="http://schemas.openxmlformats.org/drawingml/2006/main" prst="rect">
+            <a:avLst/>
+          </a:prstGeom>
+          <a:noFill xmlns:a="http://schemas.openxmlformats.org/drawingml/2006/main"/>
+          <a:ln xmlns:a="http://schemas.openxmlformats.org/drawingml/2006/main" w="0">
+            <a:noFill/>
+            <a:prstDash val="solid"/>
+          </a:ln>
+        </p:spPr>
+        <p:txBody>
+          <a:bodyPr xmlns:a="http://schemas.openxmlformats.org/drawingml/2006/main" anchor="t"/>
+          <a:lstStyle xmlns:a="http://schemas.openxmlformats.org/drawingml/2006/main"/>
+          <a:p xmlns:a="http://schemas.openxmlformats.org/drawingml/2006/main">
+            <a:pPr algn="l">
+              <a:defRPr sz="1275" b="1">
+                <a:solidFill>
+                  <a:srgbClr val="E98777"/>
+                </a:solidFill>
+                <a:latin typeface="Arial"/>
+                <a:ea typeface="Arial"/>
+                <a:cs typeface="Arial"/>
+              </a:defRPr>
+            </a:pPr>
+            <a:r>
+              <a:rPr sz="1275" b="1">
+                <a:solidFill>
+                  <a:srgbClr val="E98777"/>
+                </a:solidFill>
+                <a:latin typeface="Arial"/>
+                <a:ea typeface="Arial"/>
+                <a:cs typeface="Arial"/>
+              </a:rPr>
+              <a:t>THE REFLECTION</a:t>
+            </a:r>
+          </a:p>
+        </p:txBody>
+      </p:sp>
+      <p:sp>
+        <p:nvSpPr>
+          <p:cNvPr id="2" name="reflection-title">
             <a:extLst xmlns:a="http://schemas.openxmlformats.org/drawingml/2006/main">
               <a:ext uri="{FF2B5EF4-FFF2-40B4-BE49-F238E27FC236}">
-                <a16:creationId xmlns:a16="http://schemas.microsoft.com/office/drawing/2014/main" id="{07D5337D-3CC0-4E18-B337-0C4ACFACB256}"/>
+                <a16:creationId xmlns:a16="http://schemas.microsoft.com/office/drawing/2014/main" id="{0171AAA2-7B5E-4AC7-91F5-850DFB79E5D8}"/>
               </a:ext>
             </a:extLst>
           </p:cNvPr>
@@ -3485,37 +4093,36 @@
         </p:nvSpPr>
         <p:spPr>
           <a:xfrm xmlns:a="http://schemas.openxmlformats.org/drawingml/2006/main">
-            <a:off x="393668" y="344519"/>
-            <a:ext cx="11404568" cy="644271"/>
-          </a:xfrm>
-          <a:prstGeom xmlns:a="http://schemas.openxmlformats.org/drawingml/2006/main" prst="rect">
-            <a:avLst/>
-          </a:prstGeom>
-        </p:spPr>
-        <p:txBody>
-          <a:bodyPr xmlns:a="http://schemas.openxmlformats.org/drawingml/2006/main" wrap="square" lIns="0" tIns="0" rIns="0" bIns="0" anchor="t">
-            <a:noAutofit/>
-          </a:bodyPr>
+            <a:off x="628650" y="1000125"/>
+            <a:ext cx="9144000" cy="723900"/>
+          </a:xfrm>
+          <a:prstGeom xmlns:a="http://schemas.openxmlformats.org/drawingml/2006/main" prst="rect">
+            <a:avLst/>
+          </a:prstGeom>
+          <a:noFill xmlns:a="http://schemas.openxmlformats.org/drawingml/2006/main"/>
+          <a:ln xmlns:a="http://schemas.openxmlformats.org/drawingml/2006/main" w="0">
+            <a:noFill/>
+            <a:prstDash val="solid"/>
+          </a:ln>
+        </p:spPr>
+        <p:txBody>
+          <a:bodyPr xmlns:a="http://schemas.openxmlformats.org/drawingml/2006/main" anchor="t"/>
           <a:lstStyle xmlns:a="http://schemas.openxmlformats.org/drawingml/2006/main"/>
           <a:p xmlns:a="http://schemas.openxmlformats.org/drawingml/2006/main">
             <a:pPr algn="l">
-              <a:lnSpc>
-                <a:spcPct val="100000"/>
-              </a:lnSpc>
-              <a:buNone/>
-              <a:defRPr sz="2900">
-                <a:solidFill>
-                  <a:srgbClr val="000000"/>
-                </a:solidFill>
-                <a:latin typeface="Helvetica Neue"/>
-                <a:ea typeface="Helvetica Neue"/>
-                <a:cs typeface="Helvetica Neue"/>
-              </a:defRPr>
-            </a:pPr>
-            <a:r>
-              <a:rPr sz="2900" b="1">
-                <a:solidFill>
-                  <a:srgbClr val="000000"/>
+              <a:defRPr sz="3000" b="1">
+                <a:solidFill>
+                  <a:srgbClr val="3B234D"/>
+                </a:solidFill>
+                <a:latin typeface="Arial"/>
+                <a:ea typeface="Arial"/>
+                <a:cs typeface="Arial"/>
+              </a:defRPr>
+            </a:pPr>
+            <a:r>
+              <a:rPr sz="3000" b="1">
+                <a:solidFill>
+                  <a:srgbClr val="3B234D"/>
                 </a:solidFill>
                 <a:latin typeface="Arial"/>
                 <a:ea typeface="Arial"/>
@@ -3528,10 +4135,10 @@
       </p:sp>
       <p:sp>
         <p:nvSpPr>
-          <p:cNvPr id="3" name="Rounded-Rectangle-1-4">
+          <p:cNvPr id="3" name="reflection-expected-label">
             <a:extLst xmlns:a="http://schemas.openxmlformats.org/drawingml/2006/main">
               <a:ext uri="{FF2B5EF4-FFF2-40B4-BE49-F238E27FC236}">
-                <a16:creationId xmlns:a16="http://schemas.microsoft.com/office/drawing/2014/main" id="{8E372ECC-EADC-47BE-8258-D568A24BEA18}"/>
+                <a16:creationId xmlns:a16="http://schemas.microsoft.com/office/drawing/2014/main" id="{A1856D40-7DF6-4448-887B-60CBADE443C6}"/>
               </a:ext>
             </a:extLst>
           </p:cNvPr>
@@ -3542,25 +4149,52 @@
         </p:nvSpPr>
         <p:spPr>
           <a:xfrm xmlns:a="http://schemas.openxmlformats.org/drawingml/2006/main">
-            <a:off x="397002" y="3339084"/>
-            <a:ext cx="5533930" cy="1320832"/>
-          </a:xfrm>
-          <a:prstGeom xmlns:a="http://schemas.openxmlformats.org/drawingml/2006/main" prst="roundRect">
-            <a:avLst>
-              <a:gd name="adj" fmla="val 5769"/>
-            </a:avLst>
-          </a:prstGeom>
-          <a:solidFill xmlns:a="http://schemas.openxmlformats.org/drawingml/2006/main">
-            <a:srgbClr val="F2F2F2"/>
-          </a:solidFill>
-        </p:spPr>
-      </p:sp>
-      <p:sp>
-        <p:nvSpPr>
-          <p:cNvPr id="4" name="Content-Placeholder-10-5">
+            <a:off x="685800" y="2381250"/>
+            <a:ext cx="2857500" cy="342900"/>
+          </a:xfrm>
+          <a:prstGeom xmlns:a="http://schemas.openxmlformats.org/drawingml/2006/main" prst="rect">
+            <a:avLst/>
+          </a:prstGeom>
+          <a:noFill xmlns:a="http://schemas.openxmlformats.org/drawingml/2006/main"/>
+          <a:ln xmlns:a="http://schemas.openxmlformats.org/drawingml/2006/main" w="0">
+            <a:noFill/>
+            <a:prstDash val="solid"/>
+          </a:ln>
+        </p:spPr>
+        <p:txBody>
+          <a:bodyPr xmlns:a="http://schemas.openxmlformats.org/drawingml/2006/main" anchor="t"/>
+          <a:lstStyle xmlns:a="http://schemas.openxmlformats.org/drawingml/2006/main"/>
+          <a:p xmlns:a="http://schemas.openxmlformats.org/drawingml/2006/main">
+            <a:pPr algn="l">
+              <a:defRPr sz="1350" b="1">
+                <a:solidFill>
+                  <a:srgbClr val="2F6B57"/>
+                </a:solidFill>
+                <a:latin typeface="Arial"/>
+                <a:ea typeface="Arial"/>
+                <a:cs typeface="Arial"/>
+              </a:defRPr>
+            </a:pPr>
+            <a:r>
+              <a:rPr sz="1350" b="1">
+                <a:solidFill>
+                  <a:srgbClr val="2F6B57"/>
+                </a:solidFill>
+                <a:latin typeface="Arial"/>
+                <a:ea typeface="Arial"/>
+                <a:cs typeface="Arial"/>
+              </a:rPr>
+              <a:t>WHAT HELPED</a:t>
+            </a:r>
+          </a:p>
+        </p:txBody>
+      </p:sp>
+      <p:sp>
+        <p:nvSpPr>
+          <p:cNvPr id="4" name="reflection-expected">
             <a:extLst xmlns:a="http://schemas.openxmlformats.org/drawingml/2006/main">
               <a:ext uri="{FF2B5EF4-FFF2-40B4-BE49-F238E27FC236}">
-                <a16:creationId xmlns:a16="http://schemas.microsoft.com/office/drawing/2014/main" id="{55A73031-3BDA-444F-85D5-7FE7BF7D93E1}"/>
+                <a16:creationId xmlns:a16="http://schemas.microsoft.com/office/drawing/2014/main" id="{366751DE-F938-4A4B-A111-036FBDB39186}"/>
               </a:ext>
             </a:extLst>
           </p:cNvPr>
@@ -3571,53 +4205,142 @@
         </p:nvSpPr>
         <p:spPr>
           <a:xfrm xmlns:a="http://schemas.openxmlformats.org/drawingml/2006/main">
-            <a:off x="694277" y="3587972"/>
-            <a:ext cx="4986909" cy="877824"/>
-          </a:xfrm>
-          <a:prstGeom xmlns:a="http://schemas.openxmlformats.org/drawingml/2006/main" prst="rect">
-            <a:avLst/>
-          </a:prstGeom>
-        </p:spPr>
-        <p:txBody>
-          <a:bodyPr xmlns:a="http://schemas.openxmlformats.org/drawingml/2006/main" lIns="0" tIns="0" rIns="0" bIns="0">
-            <a:noAutofit/>
-          </a:bodyPr>
+            <a:off x="685800" y="2905125"/>
+            <a:ext cx="4667250" cy="1571625"/>
+          </a:xfrm>
+          <a:prstGeom xmlns:a="http://schemas.openxmlformats.org/drawingml/2006/main" prst="rect">
+            <a:avLst/>
+          </a:prstGeom>
+          <a:noFill xmlns:a="http://schemas.openxmlformats.org/drawingml/2006/main"/>
+          <a:ln xmlns:a="http://schemas.openxmlformats.org/drawingml/2006/main" w="0">
+            <a:noFill/>
+            <a:prstDash val="solid"/>
+          </a:ln>
+        </p:spPr>
+        <p:txBody>
+          <a:bodyPr xmlns:a="http://schemas.openxmlformats.org/drawingml/2006/main" anchor="t"/>
           <a:lstStyle xmlns:a="http://schemas.openxmlformats.org/drawingml/2006/main"/>
           <a:p xmlns:a="http://schemas.openxmlformats.org/drawingml/2006/main">
             <a:pPr algn="l">
-              <a:lnSpc>
-                <a:spcPct val="100000"/>
-              </a:lnSpc>
-              <a:buNone/>
-              <a:defRPr sz="2400">
-                <a:solidFill>
-                  <a:srgbClr val="000000"/>
-                </a:solidFill>
-                <a:latin typeface="Helvetica Neue"/>
-                <a:ea typeface="Helvetica Neue"/>
-                <a:cs typeface="Helvetica Neue"/>
-              </a:defRPr>
-            </a:pPr>
-            <a:r>
-              <a:rPr sz="2100" b="1">
-                <a:solidFill>
-                  <a:srgbClr val="000000"/>
-                </a:solidFill>
-                <a:latin typeface="Arial"/>
-                <a:ea typeface="Arial"/>
-                <a:cs typeface="Arial"/>
-              </a:rPr>
-              <a:t>Helpful AI suggestion</a:t>
-            </a:r>
-          </a:p>
-        </p:txBody>
-      </p:sp>
-      <p:sp>
-        <p:nvSpPr>
-          <p:cNvPr id="5" name="Content-Placeholder-15-6">
+              <a:defRPr sz="1800" b="1">
+                <a:solidFill>
+                  <a:srgbClr val="2B2630"/>
+                </a:solidFill>
+                <a:latin typeface="Arial"/>
+                <a:ea typeface="Arial"/>
+                <a:cs typeface="Arial"/>
+              </a:defRPr>
+            </a:pPr>
+            <a:r>
+              <a:rPr sz="1800" b="1">
+                <a:solidFill>
+                  <a:srgbClr val="2B2630"/>
+                </a:solidFill>
+                <a:latin typeface="Arial"/>
+                <a:ea typeface="Arial"/>
+                <a:cs typeface="Arial"/>
+              </a:rPr>
+              <a:t>Keep scheduling deterministic.</a:t>
+            </a:r>
+          </a:p>
+          <a:p xmlns:a="http://schemas.openxmlformats.org/drawingml/2006/main">
+            <a:pPr algn="l">
+              <a:defRPr sz="1800" b="1">
+                <a:solidFill>
+                  <a:srgbClr val="2B2630"/>
+                </a:solidFill>
+                <a:latin typeface="Arial"/>
+                <a:ea typeface="Arial"/>
+                <a:cs typeface="Arial"/>
+              </a:defRPr>
+            </a:pPr>
+            <a:r>
+              <a:rPr sz="1800" b="1">
+                <a:solidFill>
+                  <a:srgbClr val="2B2630"/>
+                </a:solidFill>
+                <a:latin typeface="Arial"/>
+                <a:ea typeface="Arial"/>
+                <a:cs typeface="Arial"/>
+              </a:rPr>
+              <a:t>Use Claude only for grounded explanation.</a:t>
+            </a:r>
+          </a:p>
+          <a:p xmlns:a="http://schemas.openxmlformats.org/drawingml/2006/main">
+            <a:pPr algn="l">
+              <a:defRPr sz="1800" b="1">
+                <a:solidFill>
+                  <a:srgbClr val="2B2630"/>
+                </a:solidFill>
+                <a:latin typeface="Arial"/>
+                <a:ea typeface="Arial"/>
+                <a:cs typeface="Arial"/>
+              </a:defRPr>
+            </a:pPr>
+            <a:r>
+              <a:rPr sz="1800" b="1">
+                <a:solidFill>
+                  <a:srgbClr val="2B2630"/>
+                </a:solidFill>
+                <a:latin typeface="Arial"/>
+                <a:ea typeface="Arial"/>
+                <a:cs typeface="Arial"/>
+              </a:rPr>
+              <a:t>Test each system boundary separately.</a:t>
+            </a:r>
+          </a:p>
+        </p:txBody>
+      </p:sp>
+      <p:cxnSp>
+        <p:nvCxnSpPr>
+          <p:cNvPr id="16" name="reflection-divider"/>
+          <p:cNvCxnSpPr/>
+          <p:nvPr/>
+        </p:nvCxnSpPr>
+        <p:spPr>
+          <a:xfrm xmlns:a="http://schemas.openxmlformats.org/drawingml/2006/main">
+            <a:off x="6000750" y="2190750"/>
+            <a:ext cx="95" cy="95"/>
+          </a:xfrm>
+          <a:prstGeom xmlns:a="http://schemas.openxmlformats.org/drawingml/2006/main" prst="straightConnector1">
+            <a:avLst/>
+          </a:prstGeom>
+          <a:ln xmlns:a="http://schemas.openxmlformats.org/drawingml/2006/main" w="19050">
+            <a:solidFill>
+              <a:srgbClr val="6F527F"/>
+            </a:solidFill>
+            <a:prstDash val="solid"/>
+          </a:ln>
+        </p:spPr>
+      </p:cxnSp>
+      <p:cxnSp>
+        <p:nvCxnSpPr>
+          <p:cNvPr id="17" name="reflection-vertical-divider"/>
+          <p:cNvCxnSpPr/>
+          <p:nvPr/>
+        </p:nvCxnSpPr>
+        <p:spPr>
+          <a:xfrm xmlns:a="http://schemas.openxmlformats.org/drawingml/2006/main">
+            <a:off x="6000750" y="2190750"/>
+            <a:ext cx="95" cy="2952750"/>
+          </a:xfrm>
+          <a:prstGeom xmlns:a="http://schemas.openxmlformats.org/drawingml/2006/main" prst="straightConnector1">
+            <a:avLst/>
+          </a:prstGeom>
+          <a:ln xmlns:a="http://schemas.openxmlformats.org/drawingml/2006/main" w="28575">
+            <a:solidFill>
+              <a:srgbClr val="D7C2E3"/>
+            </a:solidFill>
+            <a:prstDash val="solid"/>
+          </a:ln>
+        </p:spPr>
+      </p:cxnSp>
+      <p:sp>
+        <p:nvSpPr>
+          <p:cNvPr id="7" name="reflection-flawed-label">
             <a:extLst xmlns:a="http://schemas.openxmlformats.org/drawingml/2006/main">
               <a:ext uri="{FF2B5EF4-FFF2-40B4-BE49-F238E27FC236}">
-                <a16:creationId xmlns:a16="http://schemas.microsoft.com/office/drawing/2014/main" id="{530E3B19-EB98-4519-A431-7A0C990A51D7}"/>
+                <a16:creationId xmlns:a16="http://schemas.microsoft.com/office/drawing/2014/main" id="{C659DF04-BE3E-4CF9-9BBF-470A8E4280AF}"/>
               </a:ext>
             </a:extLst>
           </p:cNvPr>
@@ -3628,107 +4351,52 @@
         </p:nvSpPr>
         <p:spPr>
           <a:xfrm xmlns:a="http://schemas.openxmlformats.org/drawingml/2006/main">
-            <a:off x="694277" y="4828604"/>
-            <a:ext cx="5236655" cy="977932"/>
-          </a:xfrm>
-          <a:prstGeom xmlns:a="http://schemas.openxmlformats.org/drawingml/2006/main" prst="rect">
-            <a:avLst/>
-          </a:prstGeom>
-        </p:spPr>
-        <p:txBody>
-          <a:bodyPr xmlns:a="http://schemas.openxmlformats.org/drawingml/2006/main" lIns="0" tIns="0" rIns="0" bIns="0">
-            <a:noAutofit/>
-          </a:bodyPr>
+            <a:off x="6667500" y="2381250"/>
+            <a:ext cx="2857500" cy="342900"/>
+          </a:xfrm>
+          <a:prstGeom xmlns:a="http://schemas.openxmlformats.org/drawingml/2006/main" prst="rect">
+            <a:avLst/>
+          </a:prstGeom>
+          <a:noFill xmlns:a="http://schemas.openxmlformats.org/drawingml/2006/main"/>
+          <a:ln xmlns:a="http://schemas.openxmlformats.org/drawingml/2006/main" w="0">
+            <a:noFill/>
+            <a:prstDash val="solid"/>
+          </a:ln>
+        </p:spPr>
+        <p:txBody>
+          <a:bodyPr xmlns:a="http://schemas.openxmlformats.org/drawingml/2006/main" anchor="t"/>
           <a:lstStyle xmlns:a="http://schemas.openxmlformats.org/drawingml/2006/main"/>
           <a:p xmlns:a="http://schemas.openxmlformats.org/drawingml/2006/main">
             <a:pPr algn="l">
-              <a:lnSpc>
-                <a:spcPct val="100000"/>
-              </a:lnSpc>
-              <a:buNone/>
-              <a:defRPr sz="1600">
-                <a:solidFill>
-                  <a:srgbClr val="000000"/>
-                </a:solidFill>
-                <a:latin typeface="Helvetica Neue"/>
-                <a:ea typeface="Helvetica Neue"/>
-                <a:cs typeface="Helvetica Neue"/>
-              </a:defRPr>
-            </a:pPr>
-            <a:r>
-              <a:rPr sz="1400" b="0">
-                <a:solidFill>
-                  <a:srgbClr val="000000"/>
-                </a:solidFill>
-                <a:latin typeface="Arial"/>
-                <a:ea typeface="Arial"/>
-                <a:cs typeface="Arial"/>
-              </a:rPr>
-              <a:t>Keep scheduling deterministic</a:t>
-            </a:r>
-          </a:p>
-          <a:p xmlns:a="http://schemas.openxmlformats.org/drawingml/2006/main">
-            <a:pPr algn="l">
-              <a:lnSpc>
-                <a:spcPct val="100000"/>
-              </a:lnSpc>
-              <a:buNone/>
-              <a:defRPr sz="1600">
-                <a:solidFill>
-                  <a:srgbClr val="000000"/>
-                </a:solidFill>
-                <a:latin typeface="Helvetica Neue"/>
-                <a:ea typeface="Helvetica Neue"/>
-                <a:cs typeface="Helvetica Neue"/>
-              </a:defRPr>
-            </a:pPr>
-            <a:r>
-              <a:rPr sz="1400" b="0">
-                <a:solidFill>
-                  <a:srgbClr val="000000"/>
-                </a:solidFill>
-                <a:latin typeface="Arial"/>
-                <a:ea typeface="Arial"/>
-                <a:cs typeface="Arial"/>
-              </a:rPr>
-              <a:t>Use Claude only for grounded explanations</a:t>
-            </a:r>
-          </a:p>
-          <a:p xmlns:a="http://schemas.openxmlformats.org/drawingml/2006/main">
-            <a:pPr algn="l">
-              <a:lnSpc>
-                <a:spcPct val="100000"/>
-              </a:lnSpc>
-              <a:buNone/>
-              <a:defRPr sz="1600">
-                <a:solidFill>
-                  <a:srgbClr val="000000"/>
-                </a:solidFill>
-                <a:latin typeface="Helvetica Neue"/>
-                <a:ea typeface="Helvetica Neue"/>
-                <a:cs typeface="Helvetica Neue"/>
-              </a:defRPr>
-            </a:pPr>
-            <a:r>
-              <a:rPr sz="1400" b="0">
-                <a:solidFill>
-                  <a:srgbClr val="000000"/>
-                </a:solidFill>
-                <a:latin typeface="Arial"/>
-                <a:ea typeface="Arial"/>
-                <a:cs typeface="Arial"/>
-              </a:rPr>
-              <a:t>Separate logic, retrieval, and model tests</a:t>
-            </a:r>
-          </a:p>
-        </p:txBody>
-      </p:sp>
-      <p:sp>
-        <p:nvSpPr>
-          <p:cNvPr id="6" name="Rounded-Rectangle-7-7">
+              <a:defRPr sz="1350" b="1">
+                <a:solidFill>
+                  <a:srgbClr val="E98777"/>
+                </a:solidFill>
+                <a:latin typeface="Arial"/>
+                <a:ea typeface="Arial"/>
+                <a:cs typeface="Arial"/>
+              </a:defRPr>
+            </a:pPr>
+            <a:r>
+              <a:rPr sz="1350" b="1">
+                <a:solidFill>
+                  <a:srgbClr val="E98777"/>
+                </a:solidFill>
+                <a:latin typeface="Arial"/>
+                <a:ea typeface="Arial"/>
+                <a:cs typeface="Arial"/>
+              </a:rPr>
+              <a:t>WHAT FAILED</a:t>
+            </a:r>
+          </a:p>
+        </p:txBody>
+      </p:sp>
+      <p:sp>
+        <p:nvSpPr>
+          <p:cNvPr id="8" name="reflection-flawed">
             <a:extLst xmlns:a="http://schemas.openxmlformats.org/drawingml/2006/main">
               <a:ext uri="{FF2B5EF4-FFF2-40B4-BE49-F238E27FC236}">
-                <a16:creationId xmlns:a16="http://schemas.microsoft.com/office/drawing/2014/main" id="{35DE5E7A-8FE9-428D-8546-10B37586DAD1}"/>
+                <a16:creationId xmlns:a16="http://schemas.microsoft.com/office/drawing/2014/main" id="{1D172AF3-583E-4998-B522-261F4B5C0D7A}"/>
               </a:ext>
             </a:extLst>
           </p:cNvPr>
@@ -3739,25 +4407,98 @@
         </p:nvSpPr>
         <p:spPr>
           <a:xfrm xmlns:a="http://schemas.openxmlformats.org/drawingml/2006/main">
-            <a:off x="6260783" y="3339084"/>
-            <a:ext cx="5533930" cy="1320832"/>
-          </a:xfrm>
-          <a:prstGeom xmlns:a="http://schemas.openxmlformats.org/drawingml/2006/main" prst="roundRect">
-            <a:avLst>
-              <a:gd name="adj" fmla="val 5769"/>
-            </a:avLst>
-          </a:prstGeom>
-          <a:solidFill xmlns:a="http://schemas.openxmlformats.org/drawingml/2006/main">
-            <a:srgbClr val="F2F2F2"/>
-          </a:solidFill>
-        </p:spPr>
-      </p:sp>
-      <p:sp>
-        <p:nvSpPr>
-          <p:cNvPr id="7" name="Content-Placeholder-10-8">
+            <a:off x="6667500" y="2905125"/>
+            <a:ext cx="4762500" cy="1571625"/>
+          </a:xfrm>
+          <a:prstGeom xmlns:a="http://schemas.openxmlformats.org/drawingml/2006/main" prst="rect">
+            <a:avLst/>
+          </a:prstGeom>
+          <a:noFill xmlns:a="http://schemas.openxmlformats.org/drawingml/2006/main"/>
+          <a:ln xmlns:a="http://schemas.openxmlformats.org/drawingml/2006/main" w="0">
+            <a:noFill/>
+            <a:prstDash val="solid"/>
+          </a:ln>
+        </p:spPr>
+        <p:txBody>
+          <a:bodyPr xmlns:a="http://schemas.openxmlformats.org/drawingml/2006/main" anchor="t"/>
+          <a:lstStyle xmlns:a="http://schemas.openxmlformats.org/drawingml/2006/main"/>
+          <a:p xmlns:a="http://schemas.openxmlformats.org/drawingml/2006/main">
+            <a:pPr algn="l">
+              <a:defRPr sz="1800" b="1">
+                <a:solidFill>
+                  <a:srgbClr val="2B2630"/>
+                </a:solidFill>
+                <a:latin typeface="Arial"/>
+                <a:ea typeface="Arial"/>
+                <a:cs typeface="Arial"/>
+              </a:defRPr>
+            </a:pPr>
+            <a:r>
+              <a:rPr sz="1800" b="1">
+                <a:solidFill>
+                  <a:srgbClr val="2B2630"/>
+                </a:solidFill>
+                <a:latin typeface="Arial"/>
+                <a:ea typeface="Arial"/>
+                <a:cs typeface="Arial"/>
+              </a:rPr>
+              <a:t>Wrong-species passages slipped through.</a:t>
+            </a:r>
+          </a:p>
+          <a:p xmlns:a="http://schemas.openxmlformats.org/drawingml/2006/main">
+            <a:pPr algn="l">
+              <a:defRPr sz="1800" b="1">
+                <a:solidFill>
+                  <a:srgbClr val="2B2630"/>
+                </a:solidFill>
+                <a:latin typeface="Arial"/>
+                <a:ea typeface="Arial"/>
+                <a:cs typeface="Arial"/>
+              </a:defRPr>
+            </a:pPr>
+            <a:r>
+              <a:rPr sz="1800" b="1">
+                <a:solidFill>
+                  <a:srgbClr val="2B2630"/>
+                </a:solidFill>
+                <a:latin typeface="Arial"/>
+                <a:ea typeface="Arial"/>
+                <a:cs typeface="Arial"/>
+              </a:rPr>
+              <a:t>The generic word “can” caused a false match.</a:t>
+            </a:r>
+          </a:p>
+          <a:p xmlns:a="http://schemas.openxmlformats.org/drawingml/2006/main">
+            <a:pPr algn="l">
+              <a:defRPr sz="1800" b="1">
+                <a:solidFill>
+                  <a:srgbClr val="2B2630"/>
+                </a:solidFill>
+                <a:latin typeface="Arial"/>
+                <a:ea typeface="Arial"/>
+                <a:cs typeface="Arial"/>
+              </a:defRPr>
+            </a:pPr>
+            <a:r>
+              <a:rPr sz="1800" b="1">
+                <a:solidFill>
+                  <a:srgbClr val="2B2630"/>
+                </a:solidFill>
+                <a:latin typeface="Arial"/>
+                <a:ea typeface="Arial"/>
+                <a:cs typeface="Arial"/>
+              </a:rPr>
+              <a:t>Weak assertions still produced green tests.</a:t>
+            </a:r>
+          </a:p>
+        </p:txBody>
+      </p:sp>
+      <p:sp>
+        <p:nvSpPr>
+          <p:cNvPr id="9" name="reflection-lesson">
             <a:extLst xmlns:a="http://schemas.openxmlformats.org/drawingml/2006/main">
               <a:ext uri="{FF2B5EF4-FFF2-40B4-BE49-F238E27FC236}">
-                <a16:creationId xmlns:a16="http://schemas.microsoft.com/office/drawing/2014/main" id="{4EBD088E-0D54-48AC-84A3-C31FDE91B85C}"/>
+                <a16:creationId xmlns:a16="http://schemas.microsoft.com/office/drawing/2014/main" id="{36C5E74F-CF24-49B7-B559-EC902F455CC5}"/>
               </a:ext>
             </a:extLst>
           </p:cNvPr>
@@ -3768,53 +4509,52 @@
         </p:nvSpPr>
         <p:spPr>
           <a:xfrm xmlns:a="http://schemas.openxmlformats.org/drawingml/2006/main">
-            <a:off x="6558058" y="3587972"/>
-            <a:ext cx="4986909" cy="877824"/>
-          </a:xfrm>
-          <a:prstGeom xmlns:a="http://schemas.openxmlformats.org/drawingml/2006/main" prst="rect">
-            <a:avLst/>
-          </a:prstGeom>
-        </p:spPr>
-        <p:txBody>
-          <a:bodyPr xmlns:a="http://schemas.openxmlformats.org/drawingml/2006/main" lIns="0" tIns="0" rIns="0" bIns="0">
-            <a:noAutofit/>
-          </a:bodyPr>
-          <a:lstStyle xmlns:a="http://schemas.openxmlformats.org/drawingml/2006/main"/>
-          <a:p xmlns:a="http://schemas.openxmlformats.org/drawingml/2006/main">
-            <a:pPr algn="l">
-              <a:lnSpc>
-                <a:spcPct val="100000"/>
-              </a:lnSpc>
-              <a:buNone/>
-              <a:defRPr sz="2400">
-                <a:solidFill>
-                  <a:srgbClr val="000000"/>
-                </a:solidFill>
-                <a:latin typeface="Helvetica Neue"/>
-                <a:ea typeface="Helvetica Neue"/>
-                <a:cs typeface="Helvetica Neue"/>
+            <a:off x="1809750" y="5476875"/>
+            <a:ext cx="8572500" cy="523875"/>
+          </a:xfrm>
+          <a:prstGeom xmlns:a="http://schemas.openxmlformats.org/drawingml/2006/main" prst="rect">
+            <a:avLst/>
+          </a:prstGeom>
+          <a:noFill xmlns:a="http://schemas.openxmlformats.org/drawingml/2006/main"/>
+          <a:ln xmlns:a="http://schemas.openxmlformats.org/drawingml/2006/main" w="0">
+            <a:noFill/>
+            <a:prstDash val="solid"/>
+          </a:ln>
+        </p:spPr>
+        <p:txBody>
+          <a:bodyPr xmlns:a="http://schemas.openxmlformats.org/drawingml/2006/main" anchor="t"/>
+          <a:lstStyle xmlns:a="http://schemas.openxmlformats.org/drawingml/2006/main"/>
+          <a:p xmlns:a="http://schemas.openxmlformats.org/drawingml/2006/main">
+            <a:pPr algn="ctr">
+              <a:defRPr sz="2100" b="1">
+                <a:solidFill>
+                  <a:srgbClr val="3B234D"/>
+                </a:solidFill>
+                <a:latin typeface="Arial"/>
+                <a:ea typeface="Arial"/>
+                <a:cs typeface="Arial"/>
               </a:defRPr>
             </a:pPr>
             <a:r>
               <a:rPr sz="2100" b="1">
                 <a:solidFill>
-                  <a:srgbClr val="000000"/>
-                </a:solidFill>
-                <a:latin typeface="Arial"/>
-                <a:ea typeface="Arial"/>
-                <a:cs typeface="Arial"/>
-              </a:rPr>
-              <a:t>Flawed AI suggestion</a:t>
-            </a:r>
-          </a:p>
-        </p:txBody>
-      </p:sp>
-      <p:sp>
-        <p:nvSpPr>
-          <p:cNvPr id="8" name="Content-Placeholder-15-9">
+                  <a:srgbClr val="3B234D"/>
+                </a:solidFill>
+                <a:latin typeface="Arial"/>
+                <a:ea typeface="Arial"/>
+                <a:cs typeface="Arial"/>
+              </a:rPr>
+              <a:t>My biggest lesson: inspect the output, not only the pass total.</a:t>
+            </a:r>
+          </a:p>
+        </p:txBody>
+      </p:sp>
+      <p:sp>
+        <p:nvSpPr>
+          <p:cNvPr id="10" name="footer-brand-5">
             <a:extLst xmlns:a="http://schemas.openxmlformats.org/drawingml/2006/main">
               <a:ext uri="{FF2B5EF4-FFF2-40B4-BE49-F238E27FC236}">
-                <a16:creationId xmlns:a16="http://schemas.microsoft.com/office/drawing/2014/main" id="{5716679F-2E4B-449C-AD66-C88EA735DBD6}"/>
+                <a16:creationId xmlns:a16="http://schemas.microsoft.com/office/drawing/2014/main" id="{47BCF9C8-B48F-4810-B40F-CFE6E5A93E86}"/>
               </a:ext>
             </a:extLst>
           </p:cNvPr>
@@ -3825,107 +4565,52 @@
         </p:nvSpPr>
         <p:spPr>
           <a:xfrm xmlns:a="http://schemas.openxmlformats.org/drawingml/2006/main">
-            <a:off x="6558058" y="4828604"/>
-            <a:ext cx="5236655" cy="977932"/>
-          </a:xfrm>
-          <a:prstGeom xmlns:a="http://schemas.openxmlformats.org/drawingml/2006/main" prst="rect">
-            <a:avLst/>
-          </a:prstGeom>
-        </p:spPr>
-        <p:txBody>
-          <a:bodyPr xmlns:a="http://schemas.openxmlformats.org/drawingml/2006/main" lIns="0" tIns="0" rIns="0" bIns="0">
-            <a:noAutofit/>
-          </a:bodyPr>
+            <a:off x="609600" y="6362700"/>
+            <a:ext cx="1524000" cy="266700"/>
+          </a:xfrm>
+          <a:prstGeom xmlns:a="http://schemas.openxmlformats.org/drawingml/2006/main" prst="rect">
+            <a:avLst/>
+          </a:prstGeom>
+          <a:noFill xmlns:a="http://schemas.openxmlformats.org/drawingml/2006/main"/>
+          <a:ln xmlns:a="http://schemas.openxmlformats.org/drawingml/2006/main" w="0">
+            <a:noFill/>
+            <a:prstDash val="solid"/>
+          </a:ln>
+        </p:spPr>
+        <p:txBody>
+          <a:bodyPr xmlns:a="http://schemas.openxmlformats.org/drawingml/2006/main" anchor="t"/>
           <a:lstStyle xmlns:a="http://schemas.openxmlformats.org/drawingml/2006/main"/>
           <a:p xmlns:a="http://schemas.openxmlformats.org/drawingml/2006/main">
             <a:pPr algn="l">
-              <a:lnSpc>
-                <a:spcPct val="100000"/>
-              </a:lnSpc>
-              <a:buNone/>
-              <a:defRPr sz="1600">
-                <a:solidFill>
-                  <a:srgbClr val="000000"/>
-                </a:solidFill>
-                <a:latin typeface="Helvetica Neue"/>
-                <a:ea typeface="Helvetica Neue"/>
-                <a:cs typeface="Helvetica Neue"/>
-              </a:defRPr>
-            </a:pPr>
-            <a:r>
-              <a:rPr sz="1400" b="0">
-                <a:solidFill>
-                  <a:srgbClr val="000000"/>
-                </a:solidFill>
-                <a:latin typeface="Arial"/>
-                <a:ea typeface="Arial"/>
-                <a:cs typeface="Arial"/>
-              </a:rPr>
-              <a:t>Species match was only a bonus</a:t>
-            </a:r>
-          </a:p>
-          <a:p xmlns:a="http://schemas.openxmlformats.org/drawingml/2006/main">
-            <a:pPr algn="l">
-              <a:lnSpc>
-                <a:spcPct val="100000"/>
-              </a:lnSpc>
-              <a:buNone/>
-              <a:defRPr sz="1600">
-                <a:solidFill>
-                  <a:srgbClr val="000000"/>
-                </a:solidFill>
-                <a:latin typeface="Helvetica Neue"/>
-                <a:ea typeface="Helvetica Neue"/>
-                <a:cs typeface="Helvetica Neue"/>
-              </a:defRPr>
-            </a:pPr>
-            <a:r>
-              <a:rPr sz="1400" b="0">
-                <a:solidFill>
-                  <a:srgbClr val="000000"/>
-                </a:solidFill>
-                <a:latin typeface="Arial"/>
-                <a:ea typeface="Arial"/>
-                <a:cs typeface="Arial"/>
-              </a:rPr>
-              <a:t>Wrong-species passages slipped through</a:t>
-            </a:r>
-          </a:p>
-          <a:p xmlns:a="http://schemas.openxmlformats.org/drawingml/2006/main">
-            <a:pPr algn="l">
-              <a:lnSpc>
-                <a:spcPct val="100000"/>
-              </a:lnSpc>
-              <a:buNone/>
-              <a:defRPr sz="1600">
-                <a:solidFill>
-                  <a:srgbClr val="000000"/>
-                </a:solidFill>
-                <a:latin typeface="Helvetica Neue"/>
-                <a:ea typeface="Helvetica Neue"/>
-                <a:cs typeface="Helvetica Neue"/>
-              </a:defRPr>
-            </a:pPr>
-            <a:r>
-              <a:rPr sz="1400" b="0">
-                <a:solidFill>
-                  <a:srgbClr val="000000"/>
-                </a:solidFill>
-                <a:latin typeface="Arial"/>
-                <a:ea typeface="Arial"/>
-                <a:cs typeface="Arial"/>
-              </a:rPr>
-              <a:t>Generic word “can” caused a false match</a:t>
-            </a:r>
-          </a:p>
-        </p:txBody>
-      </p:sp>
-      <p:sp>
-        <p:nvSpPr>
-          <p:cNvPr id="9" name="Content-Placeholder-15-10">
+              <a:defRPr sz="975" b="1">
+                <a:solidFill>
+                  <a:srgbClr val="6F527F"/>
+                </a:solidFill>
+                <a:latin typeface="Arial"/>
+                <a:ea typeface="Arial"/>
+                <a:cs typeface="Arial"/>
+              </a:defRPr>
+            </a:pPr>
+            <a:r>
+              <a:rPr sz="975" b="1">
+                <a:solidFill>
+                  <a:srgbClr val="6F527F"/>
+                </a:solidFill>
+                <a:latin typeface="Arial"/>
+                <a:ea typeface="Arial"/>
+                <a:cs typeface="Arial"/>
+              </a:rPr>
+              <a:t>PAWPAL+</a:t>
+            </a:r>
+          </a:p>
+        </p:txBody>
+      </p:sp>
+      <p:sp>
+        <p:nvSpPr>
+          <p:cNvPr id="11" name="footer-number-5">
             <a:extLst xmlns:a="http://schemas.openxmlformats.org/drawingml/2006/main">
               <a:ext uri="{FF2B5EF4-FFF2-40B4-BE49-F238E27FC236}">
-                <a16:creationId xmlns:a16="http://schemas.microsoft.com/office/drawing/2014/main" id="{8816FDA6-1E93-42C2-A982-8E844CCE3B0C}"/>
+                <a16:creationId xmlns:a16="http://schemas.microsoft.com/office/drawing/2014/main" id="{FF19B26A-CB69-41E2-A945-EB6D921CE057}"/>
               </a:ext>
             </a:extLst>
           </p:cNvPr>
@@ -3936,97 +4621,42 @@
         </p:nvSpPr>
         <p:spPr>
           <a:xfrm xmlns:a="http://schemas.openxmlformats.org/drawingml/2006/main">
-            <a:off x="400907" y="1157478"/>
-            <a:ext cx="11404568" cy="1629251"/>
-          </a:xfrm>
-          <a:prstGeom xmlns:a="http://schemas.openxmlformats.org/drawingml/2006/main" prst="rect">
-            <a:avLst/>
-          </a:prstGeom>
-        </p:spPr>
-        <p:txBody>
-          <a:bodyPr xmlns:a="http://schemas.openxmlformats.org/drawingml/2006/main" lIns="0" tIns="0" rIns="0" bIns="0">
-            <a:noAutofit/>
-          </a:bodyPr>
-          <a:lstStyle xmlns:a="http://schemas.openxmlformats.org/drawingml/2006/main"/>
-          <a:p xmlns:a="http://schemas.openxmlformats.org/drawingml/2006/main">
-            <a:pPr algn="l">
-              <a:lnSpc>
-                <a:spcPct val="100000"/>
-              </a:lnSpc>
-              <a:buNone/>
-              <a:defRPr sz="1600">
-                <a:solidFill>
-                  <a:srgbClr val="000000"/>
-                </a:solidFill>
-                <a:latin typeface="Helvetica Neue"/>
-                <a:ea typeface="Helvetica Neue"/>
-                <a:cs typeface="Helvetica Neue"/>
-              </a:defRPr>
-            </a:pPr>
-            <a:r>
-              <a:rPr sz="1800" b="1">
-                <a:solidFill>
-                  <a:srgbClr val="3D8DFF"/>
-                </a:solidFill>
-                <a:latin typeface="Arial"/>
-                <a:ea typeface="Arial"/>
-                <a:cs typeface="Arial"/>
-              </a:rPr>
-              <a:t>Testing taught me to inspect outputs, not only pass totals.</a:t>
-            </a:r>
-          </a:p>
-          <a:p xmlns:a="http://schemas.openxmlformats.org/drawingml/2006/main">
-            <a:pPr algn="l">
-              <a:lnSpc>
-                <a:spcPct val="100000"/>
-              </a:lnSpc>
-              <a:buNone/>
-              <a:defRPr sz="1600">
-                <a:solidFill>
-                  <a:srgbClr val="000000"/>
-                </a:solidFill>
-                <a:latin typeface="Helvetica Neue"/>
-                <a:ea typeface="Helvetica Neue"/>
-                <a:cs typeface="Helvetica Neue"/>
-              </a:defRPr>
-            </a:pPr>
-            <a:r>
-              <a:rPr sz="1600" b="0">
-                <a:solidFill>
-                  <a:srgbClr val="000000"/>
-                </a:solidFill>
-                <a:latin typeface="Arial"/>
-                <a:ea typeface="Arial"/>
-                <a:cs typeface="Arial"/>
-              </a:rPr>
-              <a:t>A test can pass while irrelevant sources still appear.</a:t>
-            </a:r>
-          </a:p>
-          <a:p xmlns:a="http://schemas.openxmlformats.org/drawingml/2006/main">
-            <a:pPr algn="l">
-              <a:lnSpc>
-                <a:spcPct val="100000"/>
-              </a:lnSpc>
-              <a:buNone/>
-              <a:defRPr sz="1600">
-                <a:solidFill>
-                  <a:srgbClr val="000000"/>
-                </a:solidFill>
-                <a:latin typeface="Helvetica Neue"/>
-                <a:ea typeface="Helvetica Neue"/>
-                <a:cs typeface="Helvetica Neue"/>
-              </a:defRPr>
-            </a:pPr>
-            <a:r>
-              <a:rPr sz="1600" b="0">
-                <a:solidFill>
-                  <a:srgbClr val="000000"/>
-                </a:solidFill>
-                <a:latin typeface="Arial"/>
-                <a:ea typeface="Arial"/>
-                <a:cs typeface="Arial"/>
-              </a:rPr>
-              <a:t>The fix was stronger retrieval rules and stronger assertions.</a:t>
+            <a:off x="11334750" y="6362700"/>
+            <a:ext cx="266700" cy="228600"/>
+          </a:xfrm>
+          <a:prstGeom xmlns:a="http://schemas.openxmlformats.org/drawingml/2006/main" prst="rect">
+            <a:avLst/>
+          </a:prstGeom>
+          <a:noFill xmlns:a="http://schemas.openxmlformats.org/drawingml/2006/main"/>
+          <a:ln xmlns:a="http://schemas.openxmlformats.org/drawingml/2006/main" w="0">
+            <a:noFill/>
+            <a:prstDash val="solid"/>
+          </a:ln>
+        </p:spPr>
+        <p:txBody>
+          <a:bodyPr xmlns:a="http://schemas.openxmlformats.org/drawingml/2006/main" anchor="t"/>
+          <a:lstStyle xmlns:a="http://schemas.openxmlformats.org/drawingml/2006/main"/>
+          <a:p xmlns:a="http://schemas.openxmlformats.org/drawingml/2006/main">
+            <a:pPr algn="r">
+              <a:defRPr sz="975" b="1">
+                <a:solidFill>
+                  <a:srgbClr val="6F527F"/>
+                </a:solidFill>
+                <a:latin typeface="Arial"/>
+                <a:ea typeface="Arial"/>
+                <a:cs typeface="Arial"/>
+              </a:defRPr>
+            </a:pPr>
+            <a:r>
+              <a:rPr sz="975" b="1">
+                <a:solidFill>
+                  <a:srgbClr val="6F527F"/>
+                </a:solidFill>
+                <a:latin typeface="Arial"/>
+                <a:ea typeface="Arial"/>
+                <a:cs typeface="Arial"/>
+              </a:rPr>
+              <a:t>5</a:t>
             </a:r>
           </a:p>
         </p:txBody>
@@ -4034,7 +4664,7 @@
     </p:spTree>
     <p:extLst>
       <p:ext uri="{BB962C8B-B14F-4D97-AF65-F5344CB8AC3E}">
-        <p14:creationId xmlns:p14="http://schemas.microsoft.com/office/powerpoint/2010/main" val="1464813810"/>
+        <p14:creationId xmlns:p14="http://schemas.microsoft.com/office/powerpoint/2010/main" val="346519611"/>
       </p:ext>
     </p:extLst>
   </p:cSld>
@@ -4044,6 +4674,13 @@
 <file path=ppt/slides/slide6.xml><?xml version="1.0" encoding="utf-8"?>
 <p:sld xmlns:p="http://schemas.openxmlformats.org/presentationml/2006/main">
   <p:cSld>
+    <p:bg>
+      <p:bgPr>
+        <a:solidFill xmlns:a="http://schemas.openxmlformats.org/drawingml/2006/main">
+          <a:srgbClr val="3B234D"/>
+        </a:solidFill>
+      </p:bgPr>
+    </p:bg>
     <p:spTree>
       <p:nvGrpSpPr>
         <p:cNvPr id="1" name=""/>
@@ -4055,10 +4692,10 @@
       </p:grpSpPr>
       <p:sp>
         <p:nvSpPr>
-          <p:cNvPr id="4" name="Title-3-1">
+          <p:cNvPr id="7" name="close-kicker">
             <a:extLst xmlns:a="http://schemas.openxmlformats.org/drawingml/2006/main">
               <a:ext uri="{FF2B5EF4-FFF2-40B4-BE49-F238E27FC236}">
-                <a16:creationId xmlns:a16="http://schemas.microsoft.com/office/drawing/2014/main" id="{42B4E951-D263-40B6-AEEB-DDB72D5FB945}"/>
+                <a16:creationId xmlns:a16="http://schemas.microsoft.com/office/drawing/2014/main" id="{D0F97DD8-8D4C-4BCF-BE05-0029A1E32C37}"/>
               </a:ext>
             </a:extLst>
           </p:cNvPr>
@@ -4069,53 +4706,52 @@
         </p:nvSpPr>
         <p:spPr>
           <a:xfrm xmlns:a="http://schemas.openxmlformats.org/drawingml/2006/main">
-            <a:off x="393668" y="1738789"/>
-            <a:ext cx="9448800" cy="2491454"/>
-          </a:xfrm>
-          <a:prstGeom xmlns:a="http://schemas.openxmlformats.org/drawingml/2006/main" prst="rect">
-            <a:avLst/>
-          </a:prstGeom>
-        </p:spPr>
-        <p:txBody>
-          <a:bodyPr xmlns:a="http://schemas.openxmlformats.org/drawingml/2006/main" lIns="0" tIns="0" rIns="0" bIns="0" anchor="b">
-            <a:noAutofit/>
-          </a:bodyPr>
+            <a:off x="628650" y="552450"/>
+            <a:ext cx="2381250" cy="400050"/>
+          </a:xfrm>
+          <a:prstGeom xmlns:a="http://schemas.openxmlformats.org/drawingml/2006/main" prst="rect">
+            <a:avLst/>
+          </a:prstGeom>
+          <a:noFill xmlns:a="http://schemas.openxmlformats.org/drawingml/2006/main"/>
+          <a:ln xmlns:a="http://schemas.openxmlformats.org/drawingml/2006/main" w="0">
+            <a:noFill/>
+            <a:prstDash val="solid"/>
+          </a:ln>
+        </p:spPr>
+        <p:txBody>
+          <a:bodyPr xmlns:a="http://schemas.openxmlformats.org/drawingml/2006/main" anchor="t"/>
           <a:lstStyle xmlns:a="http://schemas.openxmlformats.org/drawingml/2006/main"/>
           <a:p xmlns:a="http://schemas.openxmlformats.org/drawingml/2006/main">
             <a:pPr algn="l">
-              <a:lnSpc>
-                <a:spcPct val="100000"/>
-              </a:lnSpc>
-              <a:buNone/>
-              <a:defRPr sz="6000">
-                <a:solidFill>
-                  <a:srgbClr val="000000"/>
-                </a:solidFill>
-                <a:latin typeface="Helvetica Neue"/>
-                <a:ea typeface="Helvetica Neue"/>
-                <a:cs typeface="Helvetica Neue"/>
-              </a:defRPr>
-            </a:pPr>
-            <a:r>
-              <a:rPr sz="5400" b="1">
-                <a:solidFill>
-                  <a:srgbClr val="000000"/>
-                </a:solidFill>
-                <a:latin typeface="Arial"/>
-                <a:ea typeface="Arial"/>
-                <a:cs typeface="Arial"/>
-              </a:rPr>
-              <a:t>Useful AI is designed around its limits.</a:t>
-            </a:r>
-          </a:p>
-        </p:txBody>
-      </p:sp>
-      <p:sp>
-        <p:nvSpPr>
-          <p:cNvPr id="2" name="Subtitle-4-2">
+              <a:defRPr sz="1500" b="1">
+                <a:solidFill>
+                  <a:srgbClr val="E98777"/>
+                </a:solidFill>
+                <a:latin typeface="Arial"/>
+                <a:ea typeface="Arial"/>
+                <a:cs typeface="Arial"/>
+              </a:defRPr>
+            </a:pPr>
+            <a:r>
+              <a:rPr sz="1500" b="1">
+                <a:solidFill>
+                  <a:srgbClr val="E98777"/>
+                </a:solidFill>
+                <a:latin typeface="Arial"/>
+                <a:ea typeface="Arial"/>
+                <a:cs typeface="Arial"/>
+              </a:rPr>
+              <a:t>PAWPAL+</a:t>
+            </a:r>
+          </a:p>
+        </p:txBody>
+      </p:sp>
+      <p:sp>
+        <p:nvSpPr>
+          <p:cNvPr id="2" name="close-title">
             <a:extLst xmlns:a="http://schemas.openxmlformats.org/drawingml/2006/main">
               <a:ext uri="{FF2B5EF4-FFF2-40B4-BE49-F238E27FC236}">
-                <a16:creationId xmlns:a16="http://schemas.microsoft.com/office/drawing/2014/main" id="{576C03DB-ACA8-4DAE-8CBF-3C6FE3343868}"/>
+                <a16:creationId xmlns:a16="http://schemas.microsoft.com/office/drawing/2014/main" id="{924E1700-56C0-4378-A615-2ED0E9157ADD}"/>
               </a:ext>
             </a:extLst>
           </p:cNvPr>
@@ -4126,107 +4762,75 @@
         </p:nvSpPr>
         <p:spPr>
           <a:xfrm xmlns:a="http://schemas.openxmlformats.org/drawingml/2006/main">
-            <a:off x="393668" y="4973288"/>
-            <a:ext cx="3568732" cy="1080230"/>
-          </a:xfrm>
-          <a:prstGeom xmlns:a="http://schemas.openxmlformats.org/drawingml/2006/main" prst="rect">
-            <a:avLst/>
-          </a:prstGeom>
-        </p:spPr>
-        <p:txBody>
-          <a:bodyPr xmlns:a="http://schemas.openxmlformats.org/drawingml/2006/main" lIns="0" tIns="0" rIns="0" bIns="0">
-            <a:noAutofit/>
-          </a:bodyPr>
+            <a:off x="628650" y="1619250"/>
+            <a:ext cx="8572500" cy="1809750"/>
+          </a:xfrm>
+          <a:prstGeom xmlns:a="http://schemas.openxmlformats.org/drawingml/2006/main" prst="rect">
+            <a:avLst/>
+          </a:prstGeom>
+          <a:noFill xmlns:a="http://schemas.openxmlformats.org/drawingml/2006/main"/>
+          <a:ln xmlns:a="http://schemas.openxmlformats.org/drawingml/2006/main" w="0">
+            <a:noFill/>
+            <a:prstDash val="solid"/>
+          </a:ln>
+        </p:spPr>
+        <p:txBody>
+          <a:bodyPr xmlns:a="http://schemas.openxmlformats.org/drawingml/2006/main" anchor="t"/>
           <a:lstStyle xmlns:a="http://schemas.openxmlformats.org/drawingml/2006/main"/>
           <a:p xmlns:a="http://schemas.openxmlformats.org/drawingml/2006/main">
             <a:pPr algn="l">
-              <a:lnSpc>
-                <a:spcPct val="100000"/>
-              </a:lnSpc>
-              <a:buNone/>
-              <a:defRPr sz="2400">
-                <a:solidFill>
-                  <a:srgbClr val="000000"/>
-                </a:solidFill>
-                <a:latin typeface="Helvetica Neue"/>
-                <a:ea typeface="Helvetica Neue"/>
-                <a:cs typeface="Helvetica Neue"/>
-              </a:defRPr>
-            </a:pPr>
-            <a:r>
-              <a:rPr sz="2000" b="1">
-                <a:solidFill>
-                  <a:srgbClr val="000000"/>
-                </a:solidFill>
-                <a:latin typeface="Arial"/>
-                <a:ea typeface="Arial"/>
-                <a:cs typeface="Arial"/>
-              </a:rPr>
-              <a:t>Predictable by design</a:t>
+              <a:defRPr sz="4350" b="1">
+                <a:solidFill>
+                  <a:srgbClr val="FFFFFF"/>
+                </a:solidFill>
+                <a:latin typeface="Arial"/>
+                <a:ea typeface="Arial"/>
+                <a:cs typeface="Arial"/>
+              </a:defRPr>
+            </a:pPr>
+            <a:r>
+              <a:rPr sz="4350" b="1">
+                <a:solidFill>
+                  <a:srgbClr val="FFFFFF"/>
+                </a:solidFill>
+                <a:latin typeface="Arial"/>
+                <a:ea typeface="Arial"/>
+                <a:cs typeface="Arial"/>
+              </a:rPr>
+              <a:t>Useful AI is designed</a:t>
             </a:r>
           </a:p>
           <a:p xmlns:a="http://schemas.openxmlformats.org/drawingml/2006/main">
             <a:pPr algn="l">
-              <a:lnSpc>
-                <a:spcPct val="100000"/>
-              </a:lnSpc>
-              <a:buNone/>
-              <a:defRPr sz="2400">
-                <a:solidFill>
-                  <a:srgbClr val="000000"/>
-                </a:solidFill>
-                <a:latin typeface="Helvetica Neue"/>
-                <a:ea typeface="Helvetica Neue"/>
-                <a:cs typeface="Helvetica Neue"/>
-              </a:defRPr>
-            </a:pPr>
-            <a:r>
-              <a:rPr sz="2000" b="1">
-                <a:solidFill>
-                  <a:srgbClr val="000000"/>
-                </a:solidFill>
-                <a:latin typeface="Arial"/>
-                <a:ea typeface="Arial"/>
-                <a:cs typeface="Arial"/>
-              </a:rPr>
-              <a:t>Grounded in evidence</a:t>
-            </a:r>
-          </a:p>
-          <a:p xmlns:a="http://schemas.openxmlformats.org/drawingml/2006/main">
-            <a:pPr algn="l">
-              <a:lnSpc>
-                <a:spcPct val="100000"/>
-              </a:lnSpc>
-              <a:buNone/>
-              <a:defRPr sz="2400">
-                <a:solidFill>
-                  <a:srgbClr val="000000"/>
-                </a:solidFill>
-                <a:latin typeface="Helvetica Neue"/>
-                <a:ea typeface="Helvetica Neue"/>
-                <a:cs typeface="Helvetica Neue"/>
-              </a:defRPr>
-            </a:pPr>
-            <a:r>
-              <a:rPr sz="2000" b="1">
-                <a:solidFill>
-                  <a:srgbClr val="000000"/>
-                </a:solidFill>
-                <a:latin typeface="Arial"/>
-                <a:ea typeface="Arial"/>
-                <a:cs typeface="Arial"/>
-              </a:rPr>
-              <a:t>Honest about limitations</a:t>
-            </a:r>
-          </a:p>
-        </p:txBody>
-      </p:sp>
-      <p:sp>
-        <p:nvSpPr>
-          <p:cNvPr id="3" name="Subtitle-4-3">
+              <a:defRPr sz="4350" b="1">
+                <a:solidFill>
+                  <a:srgbClr val="FFFFFF"/>
+                </a:solidFill>
+                <a:latin typeface="Arial"/>
+                <a:ea typeface="Arial"/>
+                <a:cs typeface="Arial"/>
+              </a:defRPr>
+            </a:pPr>
+            <a:r>
+              <a:rPr sz="4350" b="1">
+                <a:solidFill>
+                  <a:srgbClr val="FFFFFF"/>
+                </a:solidFill>
+                <a:latin typeface="Arial"/>
+                <a:ea typeface="Arial"/>
+                <a:cs typeface="Arial"/>
+              </a:rPr>
+              <a:t>around its limits.</a:t>
+            </a:r>
+          </a:p>
+        </p:txBody>
+      </p:sp>
+      <p:sp>
+        <p:nvSpPr>
+          <p:cNvPr id="3" name="close-line-1">
             <a:extLst xmlns:a="http://schemas.openxmlformats.org/drawingml/2006/main">
               <a:ext uri="{FF2B5EF4-FFF2-40B4-BE49-F238E27FC236}">
-                <a16:creationId xmlns:a16="http://schemas.microsoft.com/office/drawing/2014/main" id="{1E10D2F6-84B3-4093-9206-C894B24A3902}"/>
+                <a16:creationId xmlns:a16="http://schemas.microsoft.com/office/drawing/2014/main" id="{08E04FF9-2167-4E23-A4E9-A7BA8E38D9E5}"/>
               </a:ext>
             </a:extLst>
           </p:cNvPr>
@@ -4237,43 +4841,210 @@
         </p:nvSpPr>
         <p:spPr>
           <a:xfrm xmlns:a="http://schemas.openxmlformats.org/drawingml/2006/main">
-            <a:off x="393668" y="392240"/>
-            <a:ext cx="1612868" cy="649129"/>
-          </a:xfrm>
-          <a:prstGeom xmlns:a="http://schemas.openxmlformats.org/drawingml/2006/main" prst="rect">
-            <a:avLst/>
-          </a:prstGeom>
-        </p:spPr>
-        <p:txBody>
-          <a:bodyPr xmlns:a="http://schemas.openxmlformats.org/drawingml/2006/main" lIns="0" tIns="0" rIns="0" bIns="0">
-            <a:noAutofit/>
-          </a:bodyPr>
+            <a:off x="685800" y="4238625"/>
+            <a:ext cx="3143250" cy="400050"/>
+          </a:xfrm>
+          <a:prstGeom xmlns:a="http://schemas.openxmlformats.org/drawingml/2006/main" prst="rect">
+            <a:avLst/>
+          </a:prstGeom>
+          <a:noFill xmlns:a="http://schemas.openxmlformats.org/drawingml/2006/main"/>
+          <a:ln xmlns:a="http://schemas.openxmlformats.org/drawingml/2006/main" w="0">
+            <a:noFill/>
+            <a:prstDash val="solid"/>
+          </a:ln>
+        </p:spPr>
+        <p:txBody>
+          <a:bodyPr xmlns:a="http://schemas.openxmlformats.org/drawingml/2006/main" anchor="t"/>
           <a:lstStyle xmlns:a="http://schemas.openxmlformats.org/drawingml/2006/main"/>
           <a:p xmlns:a="http://schemas.openxmlformats.org/drawingml/2006/main">
             <a:pPr algn="l">
-              <a:lnSpc>
-                <a:spcPct val="100000"/>
-              </a:lnSpc>
-              <a:buNone/>
-              <a:defRPr sz="2400">
-                <a:solidFill>
-                  <a:srgbClr val="000000"/>
-                </a:solidFill>
-                <a:latin typeface="Helvetica Neue"/>
-                <a:ea typeface="Helvetica Neue"/>
-                <a:cs typeface="Helvetica Neue"/>
+              <a:defRPr sz="1800" b="1">
+                <a:solidFill>
+                  <a:srgbClr val="DDF3E7"/>
+                </a:solidFill>
+                <a:latin typeface="Arial"/>
+                <a:ea typeface="Arial"/>
+                <a:cs typeface="Arial"/>
               </a:defRPr>
             </a:pPr>
             <a:r>
               <a:rPr sz="1800" b="1">
                 <a:solidFill>
-                  <a:srgbClr val="3D8DFF"/>
-                </a:solidFill>
-                <a:latin typeface="Arial"/>
-                <a:ea typeface="Arial"/>
-                <a:cs typeface="Arial"/>
-              </a:rPr>
-              <a:t>PAWPAL+</a:t>
+                  <a:srgbClr val="DDF3E7"/>
+                </a:solidFill>
+                <a:latin typeface="Arial"/>
+                <a:ea typeface="Arial"/>
+                <a:cs typeface="Arial"/>
+              </a:rPr>
+              <a:t>Predictable by design</a:t>
+            </a:r>
+          </a:p>
+        </p:txBody>
+      </p:sp>
+      <p:sp>
+        <p:nvSpPr>
+          <p:cNvPr id="4" name="close-line-2">
+            <a:extLst xmlns:a="http://schemas.openxmlformats.org/drawingml/2006/main">
+              <a:ext uri="{FF2B5EF4-FFF2-40B4-BE49-F238E27FC236}">
+                <a16:creationId xmlns:a16="http://schemas.microsoft.com/office/drawing/2014/main" id="{3435B2D8-DF4D-42A2-8C88-7CF9348C2A29}"/>
+              </a:ext>
+            </a:extLst>
+          </p:cNvPr>
+          <p:cNvSpPr>
+            <a:spLocks xmlns:a="http://schemas.openxmlformats.org/drawingml/2006/main" noGrp="1"/>
+          </p:cNvSpPr>
+          <p:nvPr/>
+        </p:nvSpPr>
+        <p:spPr>
+          <a:xfrm xmlns:a="http://schemas.openxmlformats.org/drawingml/2006/main">
+            <a:off x="4495800" y="4238625"/>
+            <a:ext cx="3143250" cy="400050"/>
+          </a:xfrm>
+          <a:prstGeom xmlns:a="http://schemas.openxmlformats.org/drawingml/2006/main" prst="rect">
+            <a:avLst/>
+          </a:prstGeom>
+          <a:noFill xmlns:a="http://schemas.openxmlformats.org/drawingml/2006/main"/>
+          <a:ln xmlns:a="http://schemas.openxmlformats.org/drawingml/2006/main" w="0">
+            <a:noFill/>
+            <a:prstDash val="solid"/>
+          </a:ln>
+        </p:spPr>
+        <p:txBody>
+          <a:bodyPr xmlns:a="http://schemas.openxmlformats.org/drawingml/2006/main" anchor="t"/>
+          <a:lstStyle xmlns:a="http://schemas.openxmlformats.org/drawingml/2006/main"/>
+          <a:p xmlns:a="http://schemas.openxmlformats.org/drawingml/2006/main">
+            <a:pPr algn="l">
+              <a:defRPr sz="1800" b="1">
+                <a:solidFill>
+                  <a:srgbClr val="D7C2E3"/>
+                </a:solidFill>
+                <a:latin typeface="Arial"/>
+                <a:ea typeface="Arial"/>
+                <a:cs typeface="Arial"/>
+              </a:defRPr>
+            </a:pPr>
+            <a:r>
+              <a:rPr sz="1800" b="1">
+                <a:solidFill>
+                  <a:srgbClr val="D7C2E3"/>
+                </a:solidFill>
+                <a:latin typeface="Arial"/>
+                <a:ea typeface="Arial"/>
+                <a:cs typeface="Arial"/>
+              </a:rPr>
+              <a:t>Grounded in evidence</a:t>
+            </a:r>
+          </a:p>
+        </p:txBody>
+      </p:sp>
+      <p:sp>
+        <p:nvSpPr>
+          <p:cNvPr id="5" name="close-line-3">
+            <a:extLst xmlns:a="http://schemas.openxmlformats.org/drawingml/2006/main">
+              <a:ext uri="{FF2B5EF4-FFF2-40B4-BE49-F238E27FC236}">
+                <a16:creationId xmlns:a16="http://schemas.microsoft.com/office/drawing/2014/main" id="{649CC4F2-B91E-4C67-BDF5-E2B2C38C9952}"/>
+              </a:ext>
+            </a:extLst>
+          </p:cNvPr>
+          <p:cNvSpPr>
+            <a:spLocks xmlns:a="http://schemas.openxmlformats.org/drawingml/2006/main" noGrp="1"/>
+          </p:cNvSpPr>
+          <p:nvPr/>
+        </p:nvSpPr>
+        <p:spPr>
+          <a:xfrm xmlns:a="http://schemas.openxmlformats.org/drawingml/2006/main">
+            <a:off x="8305800" y="4238625"/>
+            <a:ext cx="3238500" cy="400050"/>
+          </a:xfrm>
+          <a:prstGeom xmlns:a="http://schemas.openxmlformats.org/drawingml/2006/main" prst="rect">
+            <a:avLst/>
+          </a:prstGeom>
+          <a:noFill xmlns:a="http://schemas.openxmlformats.org/drawingml/2006/main"/>
+          <a:ln xmlns:a="http://schemas.openxmlformats.org/drawingml/2006/main" w="0">
+            <a:noFill/>
+            <a:prstDash val="solid"/>
+          </a:ln>
+        </p:spPr>
+        <p:txBody>
+          <a:bodyPr xmlns:a="http://schemas.openxmlformats.org/drawingml/2006/main" anchor="t"/>
+          <a:lstStyle xmlns:a="http://schemas.openxmlformats.org/drawingml/2006/main"/>
+          <a:p xmlns:a="http://schemas.openxmlformats.org/drawingml/2006/main">
+            <a:pPr algn="l">
+              <a:defRPr sz="1800" b="1">
+                <a:solidFill>
+                  <a:srgbClr val="E98777"/>
+                </a:solidFill>
+                <a:latin typeface="Arial"/>
+                <a:ea typeface="Arial"/>
+                <a:cs typeface="Arial"/>
+              </a:defRPr>
+            </a:pPr>
+            <a:r>
+              <a:rPr sz="1800" b="1">
+                <a:solidFill>
+                  <a:srgbClr val="E98777"/>
+                </a:solidFill>
+                <a:latin typeface="Arial"/>
+                <a:ea typeface="Arial"/>
+                <a:cs typeface="Arial"/>
+              </a:rPr>
+              <a:t>Honest about limitations</a:t>
+            </a:r>
+          </a:p>
+        </p:txBody>
+      </p:sp>
+      <p:sp>
+        <p:nvSpPr>
+          <p:cNvPr id="6" name="close-footer">
+            <a:extLst xmlns:a="http://schemas.openxmlformats.org/drawingml/2006/main">
+              <a:ext uri="{FF2B5EF4-FFF2-40B4-BE49-F238E27FC236}">
+                <a16:creationId xmlns:a16="http://schemas.microsoft.com/office/drawing/2014/main" id="{92B24173-AC1C-4D6A-A001-2773C4A72C1F}"/>
+              </a:ext>
+            </a:extLst>
+          </p:cNvPr>
+          <p:cNvSpPr>
+            <a:spLocks xmlns:a="http://schemas.openxmlformats.org/drawingml/2006/main" noGrp="1"/>
+          </p:cNvSpPr>
+          <p:nvPr/>
+        </p:nvSpPr>
+        <p:spPr>
+          <a:xfrm xmlns:a="http://schemas.openxmlformats.org/drawingml/2006/main">
+            <a:off x="628650" y="5962650"/>
+            <a:ext cx="6858000" cy="342900"/>
+          </a:xfrm>
+          <a:prstGeom xmlns:a="http://schemas.openxmlformats.org/drawingml/2006/main" prst="rect">
+            <a:avLst/>
+          </a:prstGeom>
+          <a:noFill xmlns:a="http://schemas.openxmlformats.org/drawingml/2006/main"/>
+          <a:ln xmlns:a="http://schemas.openxmlformats.org/drawingml/2006/main" w="0">
+            <a:noFill/>
+            <a:prstDash val="solid"/>
+          </a:ln>
+        </p:spPr>
+        <p:txBody>
+          <a:bodyPr xmlns:a="http://schemas.openxmlformats.org/drawingml/2006/main" anchor="t"/>
+          <a:lstStyle xmlns:a="http://schemas.openxmlformats.org/drawingml/2006/main"/>
+          <a:p xmlns:a="http://schemas.openxmlformats.org/drawingml/2006/main">
+            <a:pPr algn="l">
+              <a:defRPr sz="1275" b="0">
+                <a:solidFill>
+                  <a:srgbClr val="D7C2E3"/>
+                </a:solidFill>
+                <a:latin typeface="Arial"/>
+                <a:ea typeface="Arial"/>
+                <a:cs typeface="Arial"/>
+              </a:defRPr>
+            </a:pPr>
+            <a:r>
+              <a:rPr sz="1275" b="0">
+                <a:solidFill>
+                  <a:srgbClr val="D7C2E3"/>
+                </a:solidFill>
+                <a:latin typeface="Arial"/>
+                <a:ea typeface="Arial"/>
+                <a:cs typeface="Arial"/>
+              </a:rPr>
+              <a:t>github.com/hemalekamohanram/codepath-applied-ai-system-project</a:t>
             </a:r>
           </a:p>
         </p:txBody>
@@ -4281,7 +5052,7 @@
     </p:spTree>
     <p:extLst>
       <p:ext uri="{BB962C8B-B14F-4D97-AF65-F5344CB8AC3E}">
-        <p14:creationId xmlns:p14="http://schemas.microsoft.com/office/powerpoint/2010/main" val="424467728"/>
+        <p14:creationId xmlns:p14="http://schemas.microsoft.com/office/powerpoint/2010/main" val="1809168162"/>
       </p:ext>
     </p:extLst>
   </p:cSld>
